--- a/wiki/tools/diagrams/tool_disclosure_map.pptx
+++ b/wiki/tools/diagrams/tool_disclosure_map.pptx
@@ -7,7 +7,7 @@
   <p:sldIdLst>
     <p:sldId id="256" r:id="rId7"/>
   </p:sldIdLst>
-  <p:sldSz cx="14630400" cy="9144000" type="screen4x3"/>
+  <p:sldSz cx="17373600" cy="9144000" type="screen4x3"/>
   <p:notesSz cx="6858000" cy="9144000"/>
   <p:defaultTextStyle>
     <a:defPPr>
@@ -3104,8 +3104,8 @@
         </p:nvSpPr>
         <p:spPr>
           <a:xfrm>
-            <a:off x="274320" y="164592"/>
-            <a:ext cx="13716000" cy="548640"/>
+            <a:off x="274320" y="146304"/>
+            <a:ext cx="16459200" cy="548640"/>
           </a:xfrm>
           <a:prstGeom prst="rect">
             <a:avLst/>
@@ -3126,7 +3126,7 @@
                 </a:solidFill>
                 <a:latin typeface="Malgun Gothic"/>
               </a:rPr>
-              <a:t>OpenProxy MCP — 공시 → 데이터 → Tool 매핑</a:t>
+              <a:t>OpenProxy MCP — 공시 → 데이터 → Tool → 종합 Tool 매핑</a:t>
             </a:r>
           </a:p>
         </p:txBody>
@@ -3139,8 +3139,8 @@
         </p:nvSpPr>
         <p:spPr>
           <a:xfrm>
-            <a:off x="274320" y="731520"/>
-            <a:ext cx="1828800" cy="365760"/>
+            <a:off x="274320" y="713232"/>
+            <a:ext cx="1600200" cy="411480"/>
           </a:xfrm>
           <a:prstGeom prst="rect">
             <a:avLst/>
@@ -3155,7 +3155,7 @@
           <a:p>
             <a:pPr algn="ctr"/>
             <a:r>
-              <a:rPr sz="1500" b="1">
+              <a:rPr sz="1400" b="1">
                 <a:solidFill>
                   <a:srgbClr val="BC5A38"/>
                 </a:solidFill>
@@ -3174,8 +3174,8 @@
         </p:nvSpPr>
         <p:spPr>
           <a:xfrm>
-            <a:off x="2468880" y="731520"/>
-            <a:ext cx="3657600" cy="365760"/>
+            <a:off x="2011680" y="713232"/>
+            <a:ext cx="3520440" cy="411480"/>
           </a:xfrm>
           <a:prstGeom prst="rect">
             <a:avLst/>
@@ -3190,7 +3190,7 @@
           <a:p>
             <a:pPr algn="ctr"/>
             <a:r>
-              <a:rPr sz="1500" b="1">
+              <a:rPr sz="1400" b="1">
                 <a:solidFill>
                   <a:srgbClr val="5E7388"/>
                 </a:solidFill>
@@ -3209,8 +3209,8 @@
         </p:nvSpPr>
         <p:spPr>
           <a:xfrm>
-            <a:off x="6492240" y="731520"/>
-            <a:ext cx="3474720" cy="365760"/>
+            <a:off x="5760720" y="713232"/>
+            <a:ext cx="3246120" cy="411480"/>
           </a:xfrm>
           <a:prstGeom prst="rect">
             <a:avLst/>
@@ -3225,13 +3225,13 @@
           <a:p>
             <a:pPr algn="ctr"/>
             <a:r>
-              <a:rPr sz="1500" b="1">
+              <a:rPr sz="1400" b="1">
                 <a:solidFill>
                   <a:srgbClr val="6E7E50"/>
                 </a:solidFill>
                 <a:latin typeface="Malgun Gothic"/>
               </a:rPr>
-              <a:t>③ 추출 데이터 (27)</a:t>
+              <a:t>③ 추출 데이터 (26)</a:t>
             </a:r>
           </a:p>
         </p:txBody>
@@ -3244,8 +3244,8 @@
         </p:nvSpPr>
         <p:spPr>
           <a:xfrm>
-            <a:off x="10332720" y="731520"/>
-            <a:ext cx="4023360" cy="365760"/>
+            <a:off x="9372600" y="713232"/>
+            <a:ext cx="3291840" cy="411480"/>
           </a:xfrm>
           <a:prstGeom prst="rect">
             <a:avLst/>
@@ -3260,54 +3260,52 @@
           <a:p>
             <a:pPr algn="ctr"/>
             <a:r>
-              <a:rPr sz="1500" b="1">
+              <a:rPr sz="1400" b="1">
                 <a:solidFill>
                   <a:srgbClr val="A87F3C"/>
                 </a:solidFill>
                 <a:latin typeface="Malgun Gothic"/>
               </a:rPr>
-              <a:t>④ Tool · 역할 (17)</a:t>
-            </a:r>
-          </a:p>
-        </p:txBody>
-      </p:sp>
-      <p:cxnSp>
-        <p:nvCxnSpPr>
-          <p:cNvPr id="7" name="Connector 6"/>
-          <p:cNvCxnSpPr/>
-          <p:nvPr/>
-        </p:nvCxnSpPr>
-        <p:spPr>
-          <a:xfrm flipV="1">
-            <a:off x="2103120" y="1371600"/>
-            <a:ext cx="365760" cy="585215"/>
-          </a:xfrm>
-          <a:prstGeom prst="line">
-            <a:avLst/>
-          </a:prstGeom>
-          <a:ln w="9525">
-            <a:solidFill>
-              <a:srgbClr val="CC785C">
-                <a:alpha val="55000"/>
-              </a:srgbClr>
-            </a:solidFill>
-          </a:ln>
-        </p:spPr>
-        <p:style>
-          <a:lnRef idx="2">
-            <a:schemeClr val="accent1"/>
-          </a:lnRef>
-          <a:fillRef idx="0">
-            <a:schemeClr val="accent1"/>
-          </a:fillRef>
-          <a:effectRef idx="1">
-            <a:schemeClr val="accent1"/>
-          </a:effectRef>
-          <a:fontRef idx="minor">
-            <a:schemeClr val="tx1"/>
-          </a:fontRef>
-        </p:style>
-      </p:cxnSp>
+              <a:t>④ 기반 Tool (15)</a:t>
+            </a:r>
+          </a:p>
+        </p:txBody>
+      </p:sp>
+      <p:sp>
+        <p:nvSpPr>
+          <p:cNvPr id="7" name="TextBox 6"/>
+          <p:cNvSpPr txBox="1"/>
+          <p:nvPr/>
+        </p:nvSpPr>
+        <p:spPr>
+          <a:xfrm>
+            <a:off x="13121640" y="713232"/>
+            <a:ext cx="4069080" cy="411480"/>
+          </a:xfrm>
+          <a:prstGeom prst="rect">
+            <a:avLst/>
+          </a:prstGeom>
+          <a:noFill/>
+        </p:spPr>
+        <p:txBody>
+          <a:bodyPr wrap="square">
+            <a:spAutoFit/>
+          </a:bodyPr>
+          <a:lstStyle/>
+          <a:p>
+            <a:pPr algn="ctr"/>
+            <a:r>
+              <a:rPr sz="1400" b="1">
+                <a:solidFill>
+                  <a:srgbClr val="BC5A38"/>
+                </a:solidFill>
+                <a:latin typeface="Malgun Gothic"/>
+              </a:rPr>
+              <a:t>⑤ 종합 Tool (오케스트레이터) (3)</a:t>
+            </a:r>
+          </a:p>
+        </p:txBody>
+      </p:sp>
       <p:cxnSp>
         <p:nvCxnSpPr>
           <p:cNvPr id="8" name="Connector 7"/>
@@ -3316,8 +3314,8 @@
         </p:nvCxnSpPr>
         <p:spPr>
           <a:xfrm flipV="1">
-            <a:off x="2103120" y="1737360"/>
-            <a:ext cx="365760" cy="1755647"/>
+            <a:off x="1874519" y="1416231"/>
+            <a:ext cx="137161" cy="581733"/>
           </a:xfrm>
           <a:prstGeom prst="line">
             <a:avLst/>
@@ -3325,7 +3323,7 @@
           <a:ln w="9525">
             <a:solidFill>
               <a:srgbClr val="CC785C">
-                <a:alpha val="55000"/>
+                <a:alpha val="52000"/>
               </a:srgbClr>
             </a:solidFill>
           </a:ln>
@@ -3353,8 +3351,8 @@
         </p:nvCxnSpPr>
         <p:spPr>
           <a:xfrm flipV="1">
-            <a:off x="2103120" y="2103120"/>
-            <a:ext cx="365760" cy="1389887"/>
+            <a:off x="1874519" y="1779814"/>
+            <a:ext cx="137161" cy="1745198"/>
           </a:xfrm>
           <a:prstGeom prst="line">
             <a:avLst/>
@@ -3362,7 +3360,7 @@
           <a:ln w="9525">
             <a:solidFill>
               <a:srgbClr val="CC785C">
-                <a:alpha val="55000"/>
+                <a:alpha val="52000"/>
               </a:srgbClr>
             </a:solidFill>
           </a:ln>
@@ -3390,8 +3388,8 @@
         </p:nvCxnSpPr>
         <p:spPr>
           <a:xfrm flipV="1">
-            <a:off x="2103120" y="2468879"/>
-            <a:ext cx="365760" cy="1024128"/>
+            <a:off x="1874519" y="2143397"/>
+            <a:ext cx="137161" cy="1381615"/>
           </a:xfrm>
           <a:prstGeom prst="line">
             <a:avLst/>
@@ -3399,7 +3397,7 @@
           <a:ln w="9525">
             <a:solidFill>
               <a:srgbClr val="CC785C">
-                <a:alpha val="55000"/>
+                <a:alpha val="52000"/>
               </a:srgbClr>
             </a:solidFill>
           </a:ln>
@@ -3427,8 +3425,8 @@
         </p:nvCxnSpPr>
         <p:spPr>
           <a:xfrm flipV="1">
-            <a:off x="2103120" y="2834639"/>
-            <a:ext cx="365760" cy="658368"/>
+            <a:off x="1874519" y="2506980"/>
+            <a:ext cx="137161" cy="1018032"/>
           </a:xfrm>
           <a:prstGeom prst="line">
             <a:avLst/>
@@ -3436,7 +3434,7 @@
           <a:ln w="9525">
             <a:solidFill>
               <a:srgbClr val="CC785C">
-                <a:alpha val="55000"/>
+                <a:alpha val="52000"/>
               </a:srgbClr>
             </a:solidFill>
           </a:ln>
@@ -3464,8 +3462,8 @@
         </p:nvCxnSpPr>
         <p:spPr>
           <a:xfrm flipV="1">
-            <a:off x="2103120" y="3200399"/>
-            <a:ext cx="365760" cy="292608"/>
+            <a:off x="1874519" y="2870562"/>
+            <a:ext cx="137161" cy="654450"/>
           </a:xfrm>
           <a:prstGeom prst="line">
             <a:avLst/>
@@ -3473,7 +3471,7 @@
           <a:ln w="9525">
             <a:solidFill>
               <a:srgbClr val="CC785C">
-                <a:alpha val="55000"/>
+                <a:alpha val="52000"/>
               </a:srgbClr>
             </a:solidFill>
           </a:ln>
@@ -3501,8 +3499,8 @@
         </p:nvCxnSpPr>
         <p:spPr>
           <a:xfrm flipV="1">
-            <a:off x="2103120" y="3566159"/>
-            <a:ext cx="365760" cy="1463040"/>
+            <a:off x="1874519" y="3234145"/>
+            <a:ext cx="137161" cy="290867"/>
           </a:xfrm>
           <a:prstGeom prst="line">
             <a:avLst/>
@@ -3510,7 +3508,7 @@
           <a:ln w="9525">
             <a:solidFill>
               <a:srgbClr val="CC785C">
-                <a:alpha val="55000"/>
+                <a:alpha val="52000"/>
               </a:srgbClr>
             </a:solidFill>
           </a:ln>
@@ -3538,8 +3536,8 @@
         </p:nvCxnSpPr>
         <p:spPr>
           <a:xfrm flipV="1">
-            <a:off x="2103120" y="3931919"/>
-            <a:ext cx="365760" cy="1097280"/>
+            <a:off x="1874519" y="3597728"/>
+            <a:ext cx="137161" cy="1454332"/>
           </a:xfrm>
           <a:prstGeom prst="line">
             <a:avLst/>
@@ -3547,7 +3545,7 @@
           <a:ln w="9525">
             <a:solidFill>
               <a:srgbClr val="CC785C">
-                <a:alpha val="55000"/>
+                <a:alpha val="52000"/>
               </a:srgbClr>
             </a:solidFill>
           </a:ln>
@@ -3575,8 +3573,8 @@
         </p:nvCxnSpPr>
         <p:spPr>
           <a:xfrm flipV="1">
-            <a:off x="2103120" y="4297679"/>
-            <a:ext cx="365760" cy="731520"/>
+            <a:off x="1874519" y="3961311"/>
+            <a:ext cx="137161" cy="1090749"/>
           </a:xfrm>
           <a:prstGeom prst="line">
             <a:avLst/>
@@ -3584,7 +3582,7 @@
           <a:ln w="9525">
             <a:solidFill>
               <a:srgbClr val="CC785C">
-                <a:alpha val="55000"/>
+                <a:alpha val="52000"/>
               </a:srgbClr>
             </a:solidFill>
           </a:ln>
@@ -3612,8 +3610,8 @@
         </p:nvCxnSpPr>
         <p:spPr>
           <a:xfrm flipV="1">
-            <a:off x="2103120" y="4663440"/>
-            <a:ext cx="365760" cy="365759"/>
+            <a:off x="1874519" y="4324894"/>
+            <a:ext cx="137161" cy="727166"/>
           </a:xfrm>
           <a:prstGeom prst="line">
             <a:avLst/>
@@ -3621,7 +3619,7 @@
           <a:ln w="9525">
             <a:solidFill>
               <a:srgbClr val="CC785C">
-                <a:alpha val="55000"/>
+                <a:alpha val="52000"/>
               </a:srgbClr>
             </a:solidFill>
           </a:ln>
@@ -3648,9 +3646,9 @@
           <p:nvPr/>
         </p:nvCxnSpPr>
         <p:spPr>
-          <a:xfrm>
-            <a:off x="2103120" y="5029199"/>
-            <a:ext cx="365760" cy="0"/>
+          <a:xfrm flipV="1">
+            <a:off x="1874519" y="4688477"/>
+            <a:ext cx="137161" cy="363583"/>
           </a:xfrm>
           <a:prstGeom prst="line">
             <a:avLst/>
@@ -3658,7 +3656,7 @@
           <a:ln w="9525">
             <a:solidFill>
               <a:srgbClr val="CC785C">
-                <a:alpha val="55000"/>
+                <a:alpha val="52000"/>
               </a:srgbClr>
             </a:solidFill>
           </a:ln>
@@ -3686,8 +3684,8 @@
         </p:nvCxnSpPr>
         <p:spPr>
           <a:xfrm>
-            <a:off x="2103120" y="5029199"/>
-            <a:ext cx="365760" cy="365760"/>
+            <a:off x="1874519" y="5052060"/>
+            <a:ext cx="137161" cy="0"/>
           </a:xfrm>
           <a:prstGeom prst="line">
             <a:avLst/>
@@ -3695,7 +3693,7 @@
           <a:ln w="9525">
             <a:solidFill>
               <a:srgbClr val="CC785C">
-                <a:alpha val="55000"/>
+                <a:alpha val="52000"/>
               </a:srgbClr>
             </a:solidFill>
           </a:ln>
@@ -3723,8 +3721,8 @@
         </p:nvCxnSpPr>
         <p:spPr>
           <a:xfrm>
-            <a:off x="2103120" y="5029199"/>
-            <a:ext cx="365760" cy="731520"/>
+            <a:off x="1874519" y="5052060"/>
+            <a:ext cx="137161" cy="363582"/>
           </a:xfrm>
           <a:prstGeom prst="line">
             <a:avLst/>
@@ -3732,7 +3730,7 @@
           <a:ln w="9525">
             <a:solidFill>
               <a:srgbClr val="CC785C">
-                <a:alpha val="55000"/>
+                <a:alpha val="52000"/>
               </a:srgbClr>
             </a:solidFill>
           </a:ln>
@@ -3760,8 +3758,8 @@
         </p:nvCxnSpPr>
         <p:spPr>
           <a:xfrm>
-            <a:off x="2103120" y="5029199"/>
-            <a:ext cx="365760" cy="1097280"/>
+            <a:off x="1874519" y="5052060"/>
+            <a:ext cx="137161" cy="727165"/>
           </a:xfrm>
           <a:prstGeom prst="line">
             <a:avLst/>
@@ -3769,7 +3767,7 @@
           <a:ln w="9525">
             <a:solidFill>
               <a:srgbClr val="CC785C">
-                <a:alpha val="55000"/>
+                <a:alpha val="52000"/>
               </a:srgbClr>
             </a:solidFill>
           </a:ln>
@@ -3797,8 +3795,8 @@
         </p:nvCxnSpPr>
         <p:spPr>
           <a:xfrm>
-            <a:off x="2103120" y="5029199"/>
-            <a:ext cx="365760" cy="1463040"/>
+            <a:off x="1874519" y="5052060"/>
+            <a:ext cx="137161" cy="1090748"/>
           </a:xfrm>
           <a:prstGeom prst="line">
             <a:avLst/>
@@ -3806,7 +3804,7 @@
           <a:ln w="9525">
             <a:solidFill>
               <a:srgbClr val="CC785C">
-                <a:alpha val="55000"/>
+                <a:alpha val="52000"/>
               </a:srgbClr>
             </a:solidFill>
           </a:ln>
@@ -3834,8 +3832,8 @@
         </p:nvCxnSpPr>
         <p:spPr>
           <a:xfrm>
-            <a:off x="2103120" y="6565391"/>
-            <a:ext cx="365760" cy="292608"/>
+            <a:off x="1874519" y="5052060"/>
+            <a:ext cx="137161" cy="1454331"/>
           </a:xfrm>
           <a:prstGeom prst="line">
             <a:avLst/>
@@ -3843,7 +3841,7 @@
           <a:ln w="9525">
             <a:solidFill>
               <a:srgbClr val="CC785C">
-                <a:alpha val="55000"/>
+                <a:alpha val="52000"/>
               </a:srgbClr>
             </a:solidFill>
           </a:ln>
@@ -3871,8 +3869,8 @@
         </p:nvCxnSpPr>
         <p:spPr>
           <a:xfrm>
-            <a:off x="2103120" y="6565391"/>
-            <a:ext cx="365760" cy="658368"/>
+            <a:off x="1874519" y="6579108"/>
+            <a:ext cx="137161" cy="290866"/>
           </a:xfrm>
           <a:prstGeom prst="line">
             <a:avLst/>
@@ -3880,7 +3878,7 @@
           <a:ln w="9525">
             <a:solidFill>
               <a:srgbClr val="CC785C">
-                <a:alpha val="55000"/>
+                <a:alpha val="52000"/>
               </a:srgbClr>
             </a:solidFill>
           </a:ln>
@@ -3908,8 +3906,8 @@
         </p:nvCxnSpPr>
         <p:spPr>
           <a:xfrm>
-            <a:off x="2103120" y="6565391"/>
-            <a:ext cx="365760" cy="1024128"/>
+            <a:off x="1874519" y="6579108"/>
+            <a:ext cx="137161" cy="654449"/>
           </a:xfrm>
           <a:prstGeom prst="line">
             <a:avLst/>
@@ -3917,7 +3915,7 @@
           <a:ln w="9525">
             <a:solidFill>
               <a:srgbClr val="CC785C">
-                <a:alpha val="55000"/>
+                <a:alpha val="52000"/>
               </a:srgbClr>
             </a:solidFill>
           </a:ln>
@@ -3945,8 +3943,8 @@
         </p:nvCxnSpPr>
         <p:spPr>
           <a:xfrm>
-            <a:off x="2103120" y="6565391"/>
-            <a:ext cx="365760" cy="1389888"/>
+            <a:off x="1874519" y="6579108"/>
+            <a:ext cx="137161" cy="1018032"/>
           </a:xfrm>
           <a:prstGeom prst="line">
             <a:avLst/>
@@ -3954,7 +3952,7 @@
           <a:ln w="9525">
             <a:solidFill>
               <a:srgbClr val="CC785C">
-                <a:alpha val="55000"/>
+                <a:alpha val="52000"/>
               </a:srgbClr>
             </a:solidFill>
           </a:ln>
@@ -3982,8 +3980,8 @@
         </p:nvCxnSpPr>
         <p:spPr>
           <a:xfrm>
-            <a:off x="2103120" y="8101583"/>
-            <a:ext cx="365760" cy="219457"/>
+            <a:off x="1874519" y="6579108"/>
+            <a:ext cx="137161" cy="1381614"/>
           </a:xfrm>
           <a:prstGeom prst="line">
             <a:avLst/>
@@ -3991,7 +3989,7 @@
           <a:ln w="9525">
             <a:solidFill>
               <a:srgbClr val="CC785C">
-                <a:alpha val="55000"/>
+                <a:alpha val="52000"/>
               </a:srgbClr>
             </a:solidFill>
           </a:ln>
@@ -4019,8 +4017,8 @@
         </p:nvCxnSpPr>
         <p:spPr>
           <a:xfrm>
-            <a:off x="2103120" y="8101583"/>
-            <a:ext cx="365760" cy="585216"/>
+            <a:off x="1874519" y="8106155"/>
+            <a:ext cx="137161" cy="218150"/>
           </a:xfrm>
           <a:prstGeom prst="line">
             <a:avLst/>
@@ -4028,7 +4026,7 @@
           <a:ln w="9525">
             <a:solidFill>
               <a:srgbClr val="CC785C">
-                <a:alpha val="55000"/>
+                <a:alpha val="52000"/>
               </a:srgbClr>
             </a:solidFill>
           </a:ln>
@@ -4055,17 +4053,17 @@
           <p:nvPr/>
         </p:nvCxnSpPr>
         <p:spPr>
-          <a:xfrm flipV="1">
-            <a:off x="6126480" y="1330960"/>
-            <a:ext cx="365760" cy="40640"/>
+          <a:xfrm>
+            <a:off x="1874519" y="8106155"/>
+            <a:ext cx="137161" cy="581733"/>
           </a:xfrm>
           <a:prstGeom prst="line">
             <a:avLst/>
           </a:prstGeom>
           <a:ln w="9525">
             <a:solidFill>
-              <a:srgbClr val="7C93A8">
-                <a:alpha val="55000"/>
+              <a:srgbClr val="CC785C">
+                <a:alpha val="52000"/>
               </a:srgbClr>
             </a:solidFill>
           </a:ln>
@@ -4092,9 +4090,9 @@
           <p:nvPr/>
         </p:nvCxnSpPr>
         <p:spPr>
-          <a:xfrm>
-            <a:off x="6126480" y="1371600"/>
-            <a:ext cx="365760" cy="243840"/>
+          <a:xfrm flipV="1">
+            <a:off x="5532120" y="1381271"/>
+            <a:ext cx="228600" cy="34960"/>
           </a:xfrm>
           <a:prstGeom prst="line">
             <a:avLst/>
@@ -4102,7 +4100,7 @@
           <a:ln w="9525">
             <a:solidFill>
               <a:srgbClr val="7C93A8">
-                <a:alpha val="55000"/>
+                <a:alpha val="52000"/>
               </a:srgbClr>
             </a:solidFill>
           </a:ln>
@@ -4130,8 +4128,8 @@
         </p:nvCxnSpPr>
         <p:spPr>
           <a:xfrm>
-            <a:off x="6126480" y="1371600"/>
-            <a:ext cx="365760" cy="528319"/>
+            <a:off x="5532120" y="1416231"/>
+            <a:ext cx="228600" cy="258703"/>
           </a:xfrm>
           <a:prstGeom prst="line">
             <a:avLst/>
@@ -4139,7 +4137,7 @@
           <a:ln w="9525">
             <a:solidFill>
               <a:srgbClr val="7C93A8">
-                <a:alpha val="55000"/>
+                <a:alpha val="52000"/>
               </a:srgbClr>
             </a:solidFill>
           </a:ln>
@@ -4167,8 +4165,8 @@
         </p:nvCxnSpPr>
         <p:spPr>
           <a:xfrm>
-            <a:off x="6126480" y="1371600"/>
-            <a:ext cx="365760" cy="812800"/>
+            <a:off x="5532120" y="1416231"/>
+            <a:ext cx="228600" cy="552366"/>
           </a:xfrm>
           <a:prstGeom prst="line">
             <a:avLst/>
@@ -4176,7 +4174,7 @@
           <a:ln w="9525">
             <a:solidFill>
               <a:srgbClr val="7C93A8">
-                <a:alpha val="55000"/>
+                <a:alpha val="52000"/>
               </a:srgbClr>
             </a:solidFill>
           </a:ln>
@@ -4204,8 +4202,8 @@
         </p:nvCxnSpPr>
         <p:spPr>
           <a:xfrm>
-            <a:off x="6126480" y="1371600"/>
-            <a:ext cx="365760" cy="1097280"/>
+            <a:off x="5532120" y="1416231"/>
+            <a:ext cx="228600" cy="846029"/>
           </a:xfrm>
           <a:prstGeom prst="line">
             <a:avLst/>
@@ -4213,7 +4211,7 @@
           <a:ln w="9525">
             <a:solidFill>
               <a:srgbClr val="7C93A8">
-                <a:alpha val="55000"/>
+                <a:alpha val="52000"/>
               </a:srgbClr>
             </a:solidFill>
           </a:ln>
@@ -4241,8 +4239,8 @@
         </p:nvCxnSpPr>
         <p:spPr>
           <a:xfrm>
-            <a:off x="6126480" y="1737360"/>
-            <a:ext cx="365760" cy="1015999"/>
+            <a:off x="5532120" y="1416231"/>
+            <a:ext cx="228600" cy="1139692"/>
           </a:xfrm>
           <a:prstGeom prst="line">
             <a:avLst/>
@@ -4250,7 +4248,7 @@
           <a:ln w="9525">
             <a:solidFill>
               <a:srgbClr val="7C93A8">
-                <a:alpha val="55000"/>
+                <a:alpha val="52000"/>
               </a:srgbClr>
             </a:solidFill>
           </a:ln>
@@ -4278,8 +4276,8 @@
         </p:nvCxnSpPr>
         <p:spPr>
           <a:xfrm>
-            <a:off x="6126480" y="2103120"/>
-            <a:ext cx="365760" cy="934719"/>
+            <a:off x="5532120" y="1779814"/>
+            <a:ext cx="228600" cy="1069772"/>
           </a:xfrm>
           <a:prstGeom prst="line">
             <a:avLst/>
@@ -4287,7 +4285,7 @@
           <a:ln w="9525">
             <a:solidFill>
               <a:srgbClr val="7C93A8">
-                <a:alpha val="55000"/>
+                <a:alpha val="52000"/>
               </a:srgbClr>
             </a:solidFill>
           </a:ln>
@@ -4315,8 +4313,8 @@
         </p:nvCxnSpPr>
         <p:spPr>
           <a:xfrm>
-            <a:off x="6126480" y="2468879"/>
-            <a:ext cx="365760" cy="853440"/>
+            <a:off x="5532120" y="2143397"/>
+            <a:ext cx="228600" cy="999853"/>
           </a:xfrm>
           <a:prstGeom prst="line">
             <a:avLst/>
@@ -4324,7 +4322,7 @@
           <a:ln w="9525">
             <a:solidFill>
               <a:srgbClr val="7C93A8">
-                <a:alpha val="55000"/>
+                <a:alpha val="52000"/>
               </a:srgbClr>
             </a:solidFill>
           </a:ln>
@@ -4352,8 +4350,8 @@
         </p:nvCxnSpPr>
         <p:spPr>
           <a:xfrm>
-            <a:off x="6126480" y="2834639"/>
-            <a:ext cx="365760" cy="772160"/>
+            <a:off x="5532120" y="2506980"/>
+            <a:ext cx="228600" cy="929933"/>
           </a:xfrm>
           <a:prstGeom prst="line">
             <a:avLst/>
@@ -4361,7 +4359,7 @@
           <a:ln w="9525">
             <a:solidFill>
               <a:srgbClr val="7C93A8">
-                <a:alpha val="55000"/>
+                <a:alpha val="52000"/>
               </a:srgbClr>
             </a:solidFill>
           </a:ln>
@@ -4389,8 +4387,8 @@
         </p:nvCxnSpPr>
         <p:spPr>
           <a:xfrm>
-            <a:off x="6126480" y="3200399"/>
-            <a:ext cx="365760" cy="690880"/>
+            <a:off x="5532120" y="2870562"/>
+            <a:ext cx="228600" cy="860014"/>
           </a:xfrm>
           <a:prstGeom prst="line">
             <a:avLst/>
@@ -4398,7 +4396,7 @@
           <a:ln w="9525">
             <a:solidFill>
               <a:srgbClr val="7C93A8">
-                <a:alpha val="55000"/>
+                <a:alpha val="52000"/>
               </a:srgbClr>
             </a:solidFill>
           </a:ln>
@@ -4426,8 +4424,8 @@
         </p:nvCxnSpPr>
         <p:spPr>
           <a:xfrm>
-            <a:off x="6126480" y="3566159"/>
-            <a:ext cx="365760" cy="609601"/>
+            <a:off x="5532120" y="3234145"/>
+            <a:ext cx="228600" cy="790094"/>
           </a:xfrm>
           <a:prstGeom prst="line">
             <a:avLst/>
@@ -4435,7 +4433,7 @@
           <a:ln w="9525">
             <a:solidFill>
               <a:srgbClr val="7C93A8">
-                <a:alpha val="55000"/>
+                <a:alpha val="52000"/>
               </a:srgbClr>
             </a:solidFill>
           </a:ln>
@@ -4463,8 +4461,8 @@
         </p:nvCxnSpPr>
         <p:spPr>
           <a:xfrm>
-            <a:off x="6126480" y="3566159"/>
-            <a:ext cx="365760" cy="894081"/>
+            <a:off x="5532120" y="3597728"/>
+            <a:ext cx="228600" cy="720174"/>
           </a:xfrm>
           <a:prstGeom prst="line">
             <a:avLst/>
@@ -4472,7 +4470,7 @@
           <a:ln w="9525">
             <a:solidFill>
               <a:srgbClr val="7C93A8">
-                <a:alpha val="55000"/>
+                <a:alpha val="52000"/>
               </a:srgbClr>
             </a:solidFill>
           </a:ln>
@@ -4500,8 +4498,8 @@
         </p:nvCxnSpPr>
         <p:spPr>
           <a:xfrm>
-            <a:off x="6126480" y="3931919"/>
-            <a:ext cx="365760" cy="812800"/>
+            <a:off x="5532120" y="3961311"/>
+            <a:ext cx="228600" cy="650254"/>
           </a:xfrm>
           <a:prstGeom prst="line">
             <a:avLst/>
@@ -4509,7 +4507,7 @@
           <a:ln w="9525">
             <a:solidFill>
               <a:srgbClr val="7C93A8">
-                <a:alpha val="55000"/>
+                <a:alpha val="52000"/>
               </a:srgbClr>
             </a:solidFill>
           </a:ln>
@@ -4537,8 +4535,8 @@
         </p:nvCxnSpPr>
         <p:spPr>
           <a:xfrm>
-            <a:off x="6126480" y="4297679"/>
-            <a:ext cx="365760" cy="731520"/>
+            <a:off x="5532120" y="4324894"/>
+            <a:ext cx="228600" cy="580334"/>
           </a:xfrm>
           <a:prstGeom prst="line">
             <a:avLst/>
@@ -4546,7 +4544,7 @@
           <a:ln w="9525">
             <a:solidFill>
               <a:srgbClr val="7C93A8">
-                <a:alpha val="55000"/>
+                <a:alpha val="52000"/>
               </a:srgbClr>
             </a:solidFill>
           </a:ln>
@@ -4574,8 +4572,8 @@
         </p:nvCxnSpPr>
         <p:spPr>
           <a:xfrm>
-            <a:off x="6126480" y="4663440"/>
-            <a:ext cx="365760" cy="650239"/>
+            <a:off x="5532120" y="4688477"/>
+            <a:ext cx="228600" cy="510414"/>
           </a:xfrm>
           <a:prstGeom prst="line">
             <a:avLst/>
@@ -4583,7 +4581,7 @@
           <a:ln w="9525">
             <a:solidFill>
               <a:srgbClr val="7C93A8">
-                <a:alpha val="55000"/>
+                <a:alpha val="52000"/>
               </a:srgbClr>
             </a:solidFill>
           </a:ln>
@@ -4611,8 +4609,8 @@
         </p:nvCxnSpPr>
         <p:spPr>
           <a:xfrm>
-            <a:off x="6126480" y="5029199"/>
-            <a:ext cx="365760" cy="568961"/>
+            <a:off x="5532120" y="5052060"/>
+            <a:ext cx="228600" cy="440494"/>
           </a:xfrm>
           <a:prstGeom prst="line">
             <a:avLst/>
@@ -4620,7 +4618,7 @@
           <a:ln w="9525">
             <a:solidFill>
               <a:srgbClr val="7C93A8">
-                <a:alpha val="55000"/>
+                <a:alpha val="52000"/>
               </a:srgbClr>
             </a:solidFill>
           </a:ln>
@@ -4648,8 +4646,8 @@
         </p:nvCxnSpPr>
         <p:spPr>
           <a:xfrm>
-            <a:off x="6126480" y="5394959"/>
-            <a:ext cx="365760" cy="487680"/>
+            <a:off x="5532120" y="5415642"/>
+            <a:ext cx="228600" cy="370575"/>
           </a:xfrm>
           <a:prstGeom prst="line">
             <a:avLst/>
@@ -4657,7 +4655,7 @@
           <a:ln w="9525">
             <a:solidFill>
               <a:srgbClr val="7C93A8">
-                <a:alpha val="55000"/>
+                <a:alpha val="52000"/>
               </a:srgbClr>
             </a:solidFill>
           </a:ln>
@@ -4685,8 +4683,8 @@
         </p:nvCxnSpPr>
         <p:spPr>
           <a:xfrm>
-            <a:off x="6126480" y="5760719"/>
-            <a:ext cx="365760" cy="406400"/>
+            <a:off x="5532120" y="5779225"/>
+            <a:ext cx="228600" cy="300655"/>
           </a:xfrm>
           <a:prstGeom prst="line">
             <a:avLst/>
@@ -4694,7 +4692,7 @@
           <a:ln w="9525">
             <a:solidFill>
               <a:srgbClr val="7C93A8">
-                <a:alpha val="55000"/>
+                <a:alpha val="52000"/>
               </a:srgbClr>
             </a:solidFill>
           </a:ln>
@@ -4722,8 +4720,8 @@
         </p:nvCxnSpPr>
         <p:spPr>
           <a:xfrm>
-            <a:off x="6126480" y="6126479"/>
-            <a:ext cx="365760" cy="325120"/>
+            <a:off x="5532120" y="6142808"/>
+            <a:ext cx="228600" cy="230735"/>
           </a:xfrm>
           <a:prstGeom prst="line">
             <a:avLst/>
@@ -4731,7 +4729,7 @@
           <a:ln w="9525">
             <a:solidFill>
               <a:srgbClr val="7C93A8">
-                <a:alpha val="55000"/>
+                <a:alpha val="52000"/>
               </a:srgbClr>
             </a:solidFill>
           </a:ln>
@@ -4759,8 +4757,8 @@
         </p:nvCxnSpPr>
         <p:spPr>
           <a:xfrm>
-            <a:off x="6126480" y="6492239"/>
-            <a:ext cx="365760" cy="243841"/>
+            <a:off x="5532120" y="6506391"/>
+            <a:ext cx="228600" cy="160815"/>
           </a:xfrm>
           <a:prstGeom prst="line">
             <a:avLst/>
@@ -4768,7 +4766,7 @@
           <a:ln w="9525">
             <a:solidFill>
               <a:srgbClr val="7C93A8">
-                <a:alpha val="55000"/>
+                <a:alpha val="52000"/>
               </a:srgbClr>
             </a:solidFill>
           </a:ln>
@@ -4796,8 +4794,8 @@
         </p:nvCxnSpPr>
         <p:spPr>
           <a:xfrm>
-            <a:off x="6126480" y="6857999"/>
-            <a:ext cx="365760" cy="162560"/>
+            <a:off x="5532120" y="6869974"/>
+            <a:ext cx="228600" cy="90895"/>
           </a:xfrm>
           <a:prstGeom prst="line">
             <a:avLst/>
@@ -4805,7 +4803,7 @@
           <a:ln w="9525">
             <a:solidFill>
               <a:srgbClr val="7C93A8">
-                <a:alpha val="55000"/>
+                <a:alpha val="52000"/>
               </a:srgbClr>
             </a:solidFill>
           </a:ln>
@@ -4833,8 +4831,8 @@
         </p:nvCxnSpPr>
         <p:spPr>
           <a:xfrm>
-            <a:off x="6126480" y="6857999"/>
-            <a:ext cx="365760" cy="447040"/>
+            <a:off x="5532120" y="6869974"/>
+            <a:ext cx="228600" cy="384559"/>
           </a:xfrm>
           <a:prstGeom prst="line">
             <a:avLst/>
@@ -4842,7 +4840,7 @@
           <a:ln w="9525">
             <a:solidFill>
               <a:srgbClr val="7C93A8">
-                <a:alpha val="55000"/>
+                <a:alpha val="52000"/>
               </a:srgbClr>
             </a:solidFill>
           </a:ln>
@@ -4870,8 +4868,8 @@
         </p:nvCxnSpPr>
         <p:spPr>
           <a:xfrm>
-            <a:off x="6126480" y="7223759"/>
-            <a:ext cx="365760" cy="365760"/>
+            <a:off x="5532120" y="7233557"/>
+            <a:ext cx="228600" cy="314639"/>
           </a:xfrm>
           <a:prstGeom prst="line">
             <a:avLst/>
@@ -4879,7 +4877,7 @@
           <a:ln w="9525">
             <a:solidFill>
               <a:srgbClr val="7C93A8">
-                <a:alpha val="55000"/>
+                <a:alpha val="52000"/>
               </a:srgbClr>
             </a:solidFill>
           </a:ln>
@@ -4907,8 +4905,8 @@
         </p:nvCxnSpPr>
         <p:spPr>
           <a:xfrm>
-            <a:off x="6126480" y="7589519"/>
-            <a:ext cx="365760" cy="284481"/>
+            <a:off x="5532120" y="7597140"/>
+            <a:ext cx="228600" cy="244719"/>
           </a:xfrm>
           <a:prstGeom prst="line">
             <a:avLst/>
@@ -4916,7 +4914,7 @@
           <a:ln w="9525">
             <a:solidFill>
               <a:srgbClr val="7C93A8">
-                <a:alpha val="55000"/>
+                <a:alpha val="52000"/>
               </a:srgbClr>
             </a:solidFill>
           </a:ln>
@@ -4944,8 +4942,8 @@
         </p:nvCxnSpPr>
         <p:spPr>
           <a:xfrm>
-            <a:off x="6126480" y="7955279"/>
-            <a:ext cx="365760" cy="203200"/>
+            <a:off x="5532120" y="7960722"/>
+            <a:ext cx="228600" cy="174800"/>
           </a:xfrm>
           <a:prstGeom prst="line">
             <a:avLst/>
@@ -4953,7 +4951,7 @@
           <a:ln w="9525">
             <a:solidFill>
               <a:srgbClr val="7C93A8">
-                <a:alpha val="55000"/>
+                <a:alpha val="52000"/>
               </a:srgbClr>
             </a:solidFill>
           </a:ln>
@@ -4981,8 +4979,8 @@
         </p:nvCxnSpPr>
         <p:spPr>
           <a:xfrm>
-            <a:off x="6126480" y="8321040"/>
-            <a:ext cx="365760" cy="121920"/>
+            <a:off x="5532120" y="8324305"/>
+            <a:ext cx="228600" cy="104880"/>
           </a:xfrm>
           <a:prstGeom prst="line">
             <a:avLst/>
@@ -4990,7 +4988,7 @@
           <a:ln w="9525">
             <a:solidFill>
               <a:srgbClr val="7C93A8">
-                <a:alpha val="55000"/>
+                <a:alpha val="52000"/>
               </a:srgbClr>
             </a:solidFill>
           </a:ln>
@@ -5018,8 +5016,8 @@
         </p:nvCxnSpPr>
         <p:spPr>
           <a:xfrm>
-            <a:off x="6126480" y="8686799"/>
-            <a:ext cx="365760" cy="40641"/>
+            <a:off x="5532120" y="8687888"/>
+            <a:ext cx="228600" cy="34960"/>
           </a:xfrm>
           <a:prstGeom prst="line">
             <a:avLst/>
@@ -5027,7 +5025,7 @@
           <a:ln w="9525">
             <a:solidFill>
               <a:srgbClr val="7C93A8">
-                <a:alpha val="55000"/>
+                <a:alpha val="52000"/>
               </a:srgbClr>
             </a:solidFill>
           </a:ln>
@@ -5055,8 +5053,8 @@
         </p:nvCxnSpPr>
         <p:spPr>
           <a:xfrm>
-            <a:off x="9966959" y="1330960"/>
-            <a:ext cx="365761" cy="83670"/>
+            <a:off x="9006840" y="1381271"/>
+            <a:ext cx="365760" cy="107677"/>
           </a:xfrm>
           <a:prstGeom prst="line">
             <a:avLst/>
@@ -5064,7 +5062,7 @@
           <a:ln w="9525">
             <a:solidFill>
               <a:srgbClr val="8A9A6B">
-                <a:alpha val="55000"/>
+                <a:alpha val="52000"/>
               </a:srgbClr>
             </a:solidFill>
           </a:ln>
@@ -5092,8 +5090,8 @@
         </p:nvCxnSpPr>
         <p:spPr>
           <a:xfrm flipV="1">
-            <a:off x="9966959" y="1414630"/>
-            <a:ext cx="365761" cy="200810"/>
+            <a:off x="9006840" y="1488948"/>
+            <a:ext cx="365760" cy="185986"/>
           </a:xfrm>
           <a:prstGeom prst="line">
             <a:avLst/>
@@ -5101,7 +5099,7 @@
           <a:ln w="9525">
             <a:solidFill>
               <a:srgbClr val="8A9A6B">
-                <a:alpha val="55000"/>
+                <a:alpha val="52000"/>
               </a:srgbClr>
             </a:solidFill>
           </a:ln>
@@ -5128,9 +5126,9 @@
           <p:nvPr/>
         </p:nvCxnSpPr>
         <p:spPr>
-          <a:xfrm flipV="1">
-            <a:off x="9966959" y="1866451"/>
-            <a:ext cx="365761" cy="33468"/>
+          <a:xfrm>
+            <a:off x="9006840" y="1968597"/>
+            <a:ext cx="365760" cy="29367"/>
           </a:xfrm>
           <a:prstGeom prst="line">
             <a:avLst/>
@@ -5138,7 +5136,7 @@
           <a:ln w="9525">
             <a:solidFill>
               <a:srgbClr val="8A9A6B">
-                <a:alpha val="55000"/>
+                <a:alpha val="52000"/>
               </a:srgbClr>
             </a:solidFill>
           </a:ln>
@@ -5166,8 +5164,8 @@
         </p:nvCxnSpPr>
         <p:spPr>
           <a:xfrm flipV="1">
-            <a:off x="9966959" y="1866451"/>
-            <a:ext cx="365761" cy="3447228"/>
+            <a:off x="9006840" y="1997964"/>
+            <a:ext cx="365760" cy="3200927"/>
           </a:xfrm>
           <a:prstGeom prst="line">
             <a:avLst/>
@@ -5175,7 +5173,7 @@
           <a:ln w="9525">
             <a:solidFill>
               <a:srgbClr val="8A9A6B">
-                <a:alpha val="55000"/>
+                <a:alpha val="52000"/>
               </a:srgbClr>
             </a:solidFill>
           </a:ln>
@@ -5203,8 +5201,8 @@
         </p:nvCxnSpPr>
         <p:spPr>
           <a:xfrm>
-            <a:off x="9966959" y="2184400"/>
-            <a:ext cx="365761" cy="133872"/>
+            <a:off x="9006840" y="2262260"/>
+            <a:ext cx="365760" cy="244720"/>
           </a:xfrm>
           <a:prstGeom prst="line">
             <a:avLst/>
@@ -5212,7 +5210,7 @@
           <a:ln w="9525">
             <a:solidFill>
               <a:srgbClr val="8A9A6B">
-                <a:alpha val="55000"/>
+                <a:alpha val="52000"/>
               </a:srgbClr>
             </a:solidFill>
           </a:ln>
@@ -5240,8 +5238,8 @@
         </p:nvCxnSpPr>
         <p:spPr>
           <a:xfrm flipV="1">
-            <a:off x="9966959" y="2318272"/>
-            <a:ext cx="365761" cy="150608"/>
+            <a:off x="9006840" y="2506980"/>
+            <a:ext cx="365760" cy="48943"/>
           </a:xfrm>
           <a:prstGeom prst="line">
             <a:avLst/>
@@ -5249,7 +5247,7 @@
           <a:ln w="9525">
             <a:solidFill>
               <a:srgbClr val="8A9A6B">
-                <a:alpha val="55000"/>
+                <a:alpha val="52000"/>
               </a:srgbClr>
             </a:solidFill>
           </a:ln>
@@ -5277,8 +5275,8 @@
         </p:nvCxnSpPr>
         <p:spPr>
           <a:xfrm flipV="1">
-            <a:off x="9966959" y="2318272"/>
-            <a:ext cx="365761" cy="4702287"/>
+            <a:off x="9006840" y="2506980"/>
+            <a:ext cx="365760" cy="4453889"/>
           </a:xfrm>
           <a:prstGeom prst="line">
             <a:avLst/>
@@ -5286,7 +5284,7 @@
           <a:ln w="9525">
             <a:solidFill>
               <a:srgbClr val="8A9A6B">
-                <a:alpha val="55000"/>
+                <a:alpha val="52000"/>
               </a:srgbClr>
             </a:solidFill>
           </a:ln>
@@ -5314,8 +5312,8 @@
         </p:nvCxnSpPr>
         <p:spPr>
           <a:xfrm flipV="1">
-            <a:off x="9966959" y="2318272"/>
-            <a:ext cx="365761" cy="5271247"/>
+            <a:off x="9006840" y="2506980"/>
+            <a:ext cx="365760" cy="5041216"/>
           </a:xfrm>
           <a:prstGeom prst="line">
             <a:avLst/>
@@ -5323,7 +5321,7 @@
           <a:ln w="9525">
             <a:solidFill>
               <a:srgbClr val="8A9A6B">
-                <a:alpha val="55000"/>
+                <a:alpha val="52000"/>
               </a:srgbClr>
             </a:solidFill>
           </a:ln>
@@ -5351,8 +5349,8 @@
         </p:nvCxnSpPr>
         <p:spPr>
           <a:xfrm>
-            <a:off x="9966959" y="2753359"/>
-            <a:ext cx="365761" cy="16735"/>
+            <a:off x="9006840" y="2849586"/>
+            <a:ext cx="365760" cy="166410"/>
           </a:xfrm>
           <a:prstGeom prst="line">
             <a:avLst/>
@@ -5360,7 +5358,7 @@
           <a:ln w="9525">
             <a:solidFill>
               <a:srgbClr val="8A9A6B">
-                <a:alpha val="55000"/>
+                <a:alpha val="52000"/>
               </a:srgbClr>
             </a:solidFill>
           </a:ln>
@@ -5388,8 +5386,8 @@
         </p:nvCxnSpPr>
         <p:spPr>
           <a:xfrm flipV="1">
-            <a:off x="9966959" y="2770094"/>
-            <a:ext cx="365761" cy="2259105"/>
+            <a:off x="9006840" y="3015996"/>
+            <a:ext cx="365760" cy="1889232"/>
           </a:xfrm>
           <a:prstGeom prst="line">
             <a:avLst/>
@@ -5397,7 +5395,7 @@
           <a:ln w="9525">
             <a:solidFill>
               <a:srgbClr val="8A9A6B">
-                <a:alpha val="55000"/>
+                <a:alpha val="52000"/>
               </a:srgbClr>
             </a:solidFill>
           </a:ln>
@@ -5425,8 +5423,8 @@
         </p:nvCxnSpPr>
         <p:spPr>
           <a:xfrm>
-            <a:off x="9966959" y="3037839"/>
-            <a:ext cx="365761" cy="184076"/>
+            <a:off x="9006840" y="3143250"/>
+            <a:ext cx="365760" cy="381762"/>
           </a:xfrm>
           <a:prstGeom prst="line">
             <a:avLst/>
@@ -5434,7 +5432,7 @@
           <a:ln w="9525">
             <a:solidFill>
               <a:srgbClr val="8A9A6B">
-                <a:alpha val="55000"/>
+                <a:alpha val="52000"/>
               </a:srgbClr>
             </a:solidFill>
           </a:ln>
@@ -5462,8 +5460,8 @@
         </p:nvCxnSpPr>
         <p:spPr>
           <a:xfrm>
-            <a:off x="9966959" y="3322319"/>
-            <a:ext cx="365761" cy="351417"/>
+            <a:off x="9006840" y="3436913"/>
+            <a:ext cx="365760" cy="597115"/>
           </a:xfrm>
           <a:prstGeom prst="line">
             <a:avLst/>
@@ -5471,7 +5469,7 @@
           <a:ln w="9525">
             <a:solidFill>
               <a:srgbClr val="8A9A6B">
-                <a:alpha val="55000"/>
+                <a:alpha val="52000"/>
               </a:srgbClr>
             </a:solidFill>
           </a:ln>
@@ -5499,8 +5497,8 @@
         </p:nvCxnSpPr>
         <p:spPr>
           <a:xfrm>
-            <a:off x="9966959" y="3606799"/>
-            <a:ext cx="365761" cy="518758"/>
+            <a:off x="9006840" y="3730576"/>
+            <a:ext cx="365760" cy="812468"/>
           </a:xfrm>
           <a:prstGeom prst="line">
             <a:avLst/>
@@ -5508,7 +5506,7 @@
           <a:ln w="9525">
             <a:solidFill>
               <a:srgbClr val="8A9A6B">
-                <a:alpha val="55000"/>
+                <a:alpha val="52000"/>
               </a:srgbClr>
             </a:solidFill>
           </a:ln>
@@ -5536,8 +5534,8 @@
         </p:nvCxnSpPr>
         <p:spPr>
           <a:xfrm>
-            <a:off x="9966959" y="3891279"/>
-            <a:ext cx="365761" cy="686099"/>
+            <a:off x="9006840" y="4024239"/>
+            <a:ext cx="365760" cy="1027821"/>
           </a:xfrm>
           <a:prstGeom prst="line">
             <a:avLst/>
@@ -5545,7 +5543,7 @@
           <a:ln w="9525">
             <a:solidFill>
               <a:srgbClr val="8A9A6B">
-                <a:alpha val="55000"/>
+                <a:alpha val="52000"/>
               </a:srgbClr>
             </a:solidFill>
           </a:ln>
@@ -5573,8 +5571,8 @@
         </p:nvCxnSpPr>
         <p:spPr>
           <a:xfrm flipV="1">
-            <a:off x="9966959" y="4577378"/>
-            <a:ext cx="365761" cy="1874221"/>
+            <a:off x="9006840" y="5052060"/>
+            <a:ext cx="365760" cy="1321483"/>
           </a:xfrm>
           <a:prstGeom prst="line">
             <a:avLst/>
@@ -5582,7 +5580,7 @@
           <a:ln w="9525">
             <a:solidFill>
               <a:srgbClr val="8A9A6B">
-                <a:alpha val="55000"/>
+                <a:alpha val="52000"/>
               </a:srgbClr>
             </a:solidFill>
           </a:ln>
@@ -5610,8 +5608,8 @@
         </p:nvCxnSpPr>
         <p:spPr>
           <a:xfrm>
-            <a:off x="9966959" y="4175760"/>
-            <a:ext cx="365761" cy="853439"/>
+            <a:off x="9006840" y="4317902"/>
+            <a:ext cx="365760" cy="1243174"/>
           </a:xfrm>
           <a:prstGeom prst="line">
             <a:avLst/>
@@ -5619,7 +5617,7 @@
           <a:ln w="9525">
             <a:solidFill>
               <a:srgbClr val="8A9A6B">
-                <a:alpha val="55000"/>
+                <a:alpha val="52000"/>
               </a:srgbClr>
             </a:solidFill>
           </a:ln>
@@ -5647,8 +5645,8 @@
         </p:nvCxnSpPr>
         <p:spPr>
           <a:xfrm>
-            <a:off x="9966959" y="4460240"/>
-            <a:ext cx="365761" cy="1020781"/>
+            <a:off x="9006840" y="4611565"/>
+            <a:ext cx="365760" cy="1458527"/>
           </a:xfrm>
           <a:prstGeom prst="line">
             <a:avLst/>
@@ -5656,7 +5654,7 @@
           <a:ln w="9525">
             <a:solidFill>
               <a:srgbClr val="8A9A6B">
-                <a:alpha val="55000"/>
+                <a:alpha val="52000"/>
               </a:srgbClr>
             </a:solidFill>
           </a:ln>
@@ -5684,8 +5682,8 @@
         </p:nvCxnSpPr>
         <p:spPr>
           <a:xfrm>
-            <a:off x="9966959" y="4744719"/>
-            <a:ext cx="365761" cy="1188123"/>
+            <a:off x="9006840" y="5492554"/>
+            <a:ext cx="365760" cy="1086554"/>
           </a:xfrm>
           <a:prstGeom prst="line">
             <a:avLst/>
@@ -5693,7 +5691,7 @@
           <a:ln w="9525">
             <a:solidFill>
               <a:srgbClr val="8A9A6B">
-                <a:alpha val="55000"/>
+                <a:alpha val="52000"/>
               </a:srgbClr>
             </a:solidFill>
           </a:ln>
@@ -5721,8 +5719,8 @@
         </p:nvCxnSpPr>
         <p:spPr>
           <a:xfrm>
-            <a:off x="9966959" y="5598160"/>
-            <a:ext cx="365761" cy="786503"/>
+            <a:off x="9006840" y="5786217"/>
+            <a:ext cx="365760" cy="1301907"/>
           </a:xfrm>
           <a:prstGeom prst="line">
             <a:avLst/>
@@ -5730,7 +5728,7 @@
           <a:ln w="9525">
             <a:solidFill>
               <a:srgbClr val="8A9A6B">
-                <a:alpha val="55000"/>
+                <a:alpha val="52000"/>
               </a:srgbClr>
             </a:solidFill>
           </a:ln>
@@ -5758,8 +5756,8 @@
         </p:nvCxnSpPr>
         <p:spPr>
           <a:xfrm>
-            <a:off x="9966959" y="5882639"/>
-            <a:ext cx="365761" cy="953845"/>
+            <a:off x="9006840" y="6079880"/>
+            <a:ext cx="365760" cy="1517260"/>
           </a:xfrm>
           <a:prstGeom prst="line">
             <a:avLst/>
@@ -5767,7 +5765,7 @@
           <a:ln w="9525">
             <a:solidFill>
               <a:srgbClr val="8A9A6B">
-                <a:alpha val="55000"/>
+                <a:alpha val="52000"/>
               </a:srgbClr>
             </a:solidFill>
           </a:ln>
@@ -5794,9 +5792,9 @@
           <p:nvPr/>
         </p:nvCxnSpPr>
         <p:spPr>
-          <a:xfrm>
-            <a:off x="9966959" y="6167119"/>
-            <a:ext cx="365761" cy="1121186"/>
+          <a:xfrm flipV="1">
+            <a:off x="9006840" y="8106156"/>
+            <a:ext cx="365760" cy="323029"/>
           </a:xfrm>
           <a:prstGeom prst="line">
             <a:avLst/>
@@ -5804,7 +5802,7 @@
           <a:ln w="9525">
             <a:solidFill>
               <a:srgbClr val="8A9A6B">
-                <a:alpha val="55000"/>
+                <a:alpha val="52000"/>
               </a:srgbClr>
             </a:solidFill>
           </a:ln>
@@ -5831,9 +5829,9 @@
           <p:nvPr/>
         </p:nvCxnSpPr>
         <p:spPr>
-          <a:xfrm>
-            <a:off x="9966959" y="6736080"/>
-            <a:ext cx="365761" cy="1004047"/>
+          <a:xfrm flipV="1">
+            <a:off x="9006840" y="8615171"/>
+            <a:ext cx="365760" cy="107677"/>
           </a:xfrm>
           <a:prstGeom prst="line">
             <a:avLst/>
@@ -5841,7 +5839,7 @@
           <a:ln w="9525">
             <a:solidFill>
               <a:srgbClr val="8A9A6B">
-                <a:alpha val="55000"/>
+                <a:alpha val="52000"/>
               </a:srgbClr>
             </a:solidFill>
           </a:ln>
@@ -5869,16 +5867,16 @@
         </p:nvCxnSpPr>
         <p:spPr>
           <a:xfrm>
-            <a:off x="9966959" y="7305039"/>
-            <a:ext cx="365761" cy="435088"/>
+            <a:off x="12664440" y="2506980"/>
+            <a:ext cx="457200" cy="4099560"/>
           </a:xfrm>
           <a:prstGeom prst="line">
             <a:avLst/>
           </a:prstGeom>
-          <a:ln w="9525">
-            <a:solidFill>
-              <a:srgbClr val="8A9A6B">
-                <a:alpha val="55000"/>
+          <a:ln w="19050">
+            <a:solidFill>
+              <a:srgbClr val="CC785C">
+                <a:alpha val="90000"/>
               </a:srgbClr>
             </a:solidFill>
           </a:ln>
@@ -5905,17 +5903,17 @@
           <p:nvPr/>
         </p:nvCxnSpPr>
         <p:spPr>
-          <a:xfrm flipV="1">
-            <a:off x="9966959" y="7740127"/>
-            <a:ext cx="365761" cy="133873"/>
+          <a:xfrm>
+            <a:off x="12664440" y="6070092"/>
+            <a:ext cx="457200" cy="536448"/>
           </a:xfrm>
           <a:prstGeom prst="line">
             <a:avLst/>
           </a:prstGeom>
-          <a:ln w="9525">
-            <a:solidFill>
-              <a:srgbClr val="8A9A6B">
-                <a:alpha val="55000"/>
+          <a:ln w="19050">
+            <a:solidFill>
+              <a:srgbClr val="CC785C">
+                <a:alpha val="90000"/>
               </a:srgbClr>
             </a:solidFill>
           </a:ln>
@@ -5942,17 +5940,17 @@
           <p:nvPr/>
         </p:nvCxnSpPr>
         <p:spPr>
-          <a:xfrm flipV="1">
-            <a:off x="9966959" y="7740127"/>
-            <a:ext cx="365761" cy="418352"/>
+          <a:xfrm>
+            <a:off x="12664440" y="1488948"/>
+            <a:ext cx="457200" cy="2442972"/>
           </a:xfrm>
           <a:prstGeom prst="line">
             <a:avLst/>
           </a:prstGeom>
-          <a:ln w="9525">
-            <a:solidFill>
-              <a:srgbClr val="8A9A6B">
-                <a:alpha val="55000"/>
+          <a:ln w="19050">
+            <a:solidFill>
+              <a:srgbClr val="CC785C">
+                <a:alpha val="90000"/>
               </a:srgbClr>
             </a:solidFill>
           </a:ln>
@@ -5979,17 +5977,17 @@
           <p:nvPr/>
         </p:nvCxnSpPr>
         <p:spPr>
-          <a:xfrm flipV="1">
-            <a:off x="9966959" y="8191948"/>
-            <a:ext cx="365761" cy="251012"/>
+          <a:xfrm>
+            <a:off x="12664440" y="1997964"/>
+            <a:ext cx="457200" cy="1933956"/>
           </a:xfrm>
           <a:prstGeom prst="line">
             <a:avLst/>
           </a:prstGeom>
-          <a:ln w="9525">
-            <a:solidFill>
-              <a:srgbClr val="8A9A6B">
-                <a:alpha val="55000"/>
+          <a:ln w="19050">
+            <a:solidFill>
+              <a:srgbClr val="CC785C">
+                <a:alpha val="90000"/>
               </a:srgbClr>
             </a:solidFill>
           </a:ln>
@@ -6016,19 +6014,205 @@
           <p:nvPr/>
         </p:nvCxnSpPr>
         <p:spPr>
+          <a:xfrm>
+            <a:off x="12664440" y="2506980"/>
+            <a:ext cx="457200" cy="1424940"/>
+          </a:xfrm>
+          <a:prstGeom prst="line">
+            <a:avLst/>
+          </a:prstGeom>
+          <a:ln w="19050">
+            <a:solidFill>
+              <a:srgbClr val="CC785C">
+                <a:alpha val="90000"/>
+              </a:srgbClr>
+            </a:solidFill>
+          </a:ln>
+        </p:spPr>
+        <p:style>
+          <a:lnRef idx="2">
+            <a:schemeClr val="accent1"/>
+          </a:lnRef>
+          <a:fillRef idx="0">
+            <a:schemeClr val="accent1"/>
+          </a:fillRef>
+          <a:effectRef idx="1">
+            <a:schemeClr val="accent1"/>
+          </a:effectRef>
+          <a:fontRef idx="minor">
+            <a:schemeClr val="tx1"/>
+          </a:fontRef>
+        </p:style>
+      </p:cxnSp>
+      <p:cxnSp>
+        <p:nvCxnSpPr>
+          <p:cNvPr id="82" name="Connector 81"/>
+          <p:cNvCxnSpPr/>
+          <p:nvPr/>
+        </p:nvCxnSpPr>
+        <p:spPr>
+          <a:xfrm>
+            <a:off x="12664440" y="3015996"/>
+            <a:ext cx="457200" cy="915924"/>
+          </a:xfrm>
+          <a:prstGeom prst="line">
+            <a:avLst/>
+          </a:prstGeom>
+          <a:ln w="19050">
+            <a:solidFill>
+              <a:srgbClr val="CC785C">
+                <a:alpha val="90000"/>
+              </a:srgbClr>
+            </a:solidFill>
+          </a:ln>
+        </p:spPr>
+        <p:style>
+          <a:lnRef idx="2">
+            <a:schemeClr val="accent1"/>
+          </a:lnRef>
+          <a:fillRef idx="0">
+            <a:schemeClr val="accent1"/>
+          </a:fillRef>
+          <a:effectRef idx="1">
+            <a:schemeClr val="accent1"/>
+          </a:effectRef>
+          <a:fontRef idx="minor">
+            <a:schemeClr val="tx1"/>
+          </a:fontRef>
+        </p:style>
+      </p:cxnSp>
+      <p:cxnSp>
+        <p:nvCxnSpPr>
+          <p:cNvPr id="83" name="Connector 82"/>
+          <p:cNvCxnSpPr/>
+          <p:nvPr/>
+        </p:nvCxnSpPr>
+        <p:spPr>
           <a:xfrm flipV="1">
-            <a:off x="9966959" y="8643769"/>
-            <a:ext cx="365761" cy="83671"/>
+            <a:off x="12664440" y="3931920"/>
+            <a:ext cx="457200" cy="2647188"/>
           </a:xfrm>
           <a:prstGeom prst="line">
             <a:avLst/>
           </a:prstGeom>
-          <a:ln w="9525">
-            <a:solidFill>
-              <a:srgbClr val="8A9A6B">
+          <a:ln w="19050">
+            <a:solidFill>
+              <a:srgbClr val="CC785C">
+                <a:alpha val="90000"/>
+              </a:srgbClr>
+            </a:solidFill>
+          </a:ln>
+        </p:spPr>
+        <p:style>
+          <a:lnRef idx="2">
+            <a:schemeClr val="accent1"/>
+          </a:lnRef>
+          <a:fillRef idx="0">
+            <a:schemeClr val="accent1"/>
+          </a:fillRef>
+          <a:effectRef idx="1">
+            <a:schemeClr val="accent1"/>
+          </a:effectRef>
+          <a:fontRef idx="minor">
+            <a:schemeClr val="tx1"/>
+          </a:fontRef>
+        </p:style>
+      </p:cxnSp>
+      <p:cxnSp>
+        <p:nvCxnSpPr>
+          <p:cNvPr id="84" name="Connector 83"/>
+          <p:cNvCxnSpPr/>
+          <p:nvPr/>
+        </p:nvCxnSpPr>
+        <p:spPr>
+          <a:xfrm flipV="1">
+            <a:off x="12664440" y="3931920"/>
+            <a:ext cx="457200" cy="3156204"/>
+          </a:xfrm>
+          <a:prstGeom prst="line">
+            <a:avLst/>
+          </a:prstGeom>
+          <a:ln w="19050">
+            <a:solidFill>
+              <a:srgbClr val="CC785C">
+                <a:alpha val="90000"/>
+              </a:srgbClr>
+            </a:solidFill>
+          </a:ln>
+        </p:spPr>
+        <p:style>
+          <a:lnRef idx="2">
+            <a:schemeClr val="accent1"/>
+          </a:lnRef>
+          <a:fillRef idx="0">
+            <a:schemeClr val="accent1"/>
+          </a:fillRef>
+          <a:effectRef idx="1">
+            <a:schemeClr val="accent1"/>
+          </a:effectRef>
+          <a:fontRef idx="minor">
+            <a:schemeClr val="tx1"/>
+          </a:fontRef>
+        </p:style>
+      </p:cxnSp>
+      <p:cxnSp>
+        <p:nvCxnSpPr>
+          <p:cNvPr id="85" name="Connector 84"/>
+          <p:cNvCxnSpPr/>
+          <p:nvPr/>
+        </p:nvCxnSpPr>
+        <p:spPr>
+          <a:xfrm flipV="1">
+            <a:off x="12664440" y="3931920"/>
+            <a:ext cx="457200" cy="1629156"/>
+          </a:xfrm>
+          <a:prstGeom prst="line">
+            <a:avLst/>
+          </a:prstGeom>
+          <a:ln w="19050">
+            <a:solidFill>
+              <a:srgbClr val="CC785C">
+                <a:alpha val="90000"/>
+              </a:srgbClr>
+            </a:solidFill>
+          </a:ln>
+        </p:spPr>
+        <p:style>
+          <a:lnRef idx="2">
+            <a:schemeClr val="accent1"/>
+          </a:lnRef>
+          <a:fillRef idx="0">
+            <a:schemeClr val="accent1"/>
+          </a:fillRef>
+          <a:effectRef idx="1">
+            <a:schemeClr val="accent1"/>
+          </a:effectRef>
+          <a:fontRef idx="minor">
+            <a:schemeClr val="tx1"/>
+          </a:fontRef>
+        </p:style>
+      </p:cxnSp>
+      <p:cxnSp>
+        <p:nvCxnSpPr>
+          <p:cNvPr id="86" name="Connector 85"/>
+          <p:cNvCxnSpPr/>
+          <p:nvPr/>
+        </p:nvCxnSpPr>
+        <p:spPr>
+          <a:xfrm flipV="1">
+            <a:off x="9006840" y="6606540"/>
+            <a:ext cx="4114800" cy="647993"/>
+          </a:xfrm>
+          <a:prstGeom prst="line">
+            <a:avLst/>
+          </a:prstGeom>
+          <a:ln w="11430">
+            <a:solidFill>
+              <a:srgbClr val="9A8C7A">
                 <a:alpha val="55000"/>
               </a:srgbClr>
             </a:solidFill>
+            <a:prstDash val="dash"/>
           </a:ln>
         </p:spPr>
         <p:style>
@@ -6046,16 +6230,167 @@
           </a:fontRef>
         </p:style>
       </p:cxnSp>
-      <p:sp>
-        <p:nvSpPr>
-          <p:cNvPr id="82" name="Rounded Rectangle 81"/>
+      <p:cxnSp>
+        <p:nvCxnSpPr>
+          <p:cNvPr id="87" name="Connector 86"/>
+          <p:cNvCxnSpPr/>
+          <p:nvPr/>
+        </p:nvCxnSpPr>
+        <p:spPr>
+          <a:xfrm flipV="1">
+            <a:off x="9006840" y="6606540"/>
+            <a:ext cx="4114800" cy="60666"/>
+          </a:xfrm>
+          <a:prstGeom prst="line">
+            <a:avLst/>
+          </a:prstGeom>
+          <a:ln w="11430">
+            <a:solidFill>
+              <a:srgbClr val="9A8C7A">
+                <a:alpha val="55000"/>
+              </a:srgbClr>
+            </a:solidFill>
+            <a:prstDash val="dash"/>
+          </a:ln>
+        </p:spPr>
+        <p:style>
+          <a:lnRef idx="2">
+            <a:schemeClr val="accent1"/>
+          </a:lnRef>
+          <a:fillRef idx="0">
+            <a:schemeClr val="accent1"/>
+          </a:fillRef>
+          <a:effectRef idx="1">
+            <a:schemeClr val="accent1"/>
+          </a:effectRef>
+          <a:fontRef idx="minor">
+            <a:schemeClr val="tx1"/>
+          </a:fontRef>
+        </p:style>
+      </p:cxnSp>
+      <p:cxnSp>
+        <p:nvCxnSpPr>
+          <p:cNvPr id="88" name="Connector 87"/>
+          <p:cNvCxnSpPr/>
+          <p:nvPr/>
+        </p:nvCxnSpPr>
+        <p:spPr>
+          <a:xfrm flipV="1">
+            <a:off x="9006840" y="6606540"/>
+            <a:ext cx="4114800" cy="1235319"/>
+          </a:xfrm>
+          <a:prstGeom prst="line">
+            <a:avLst/>
+          </a:prstGeom>
+          <a:ln w="11430">
+            <a:solidFill>
+              <a:srgbClr val="9A8C7A">
+                <a:alpha val="55000"/>
+              </a:srgbClr>
+            </a:solidFill>
+            <a:prstDash val="dash"/>
+          </a:ln>
+        </p:spPr>
+        <p:style>
+          <a:lnRef idx="2">
+            <a:schemeClr val="accent1"/>
+          </a:lnRef>
+          <a:fillRef idx="0">
+            <a:schemeClr val="accent1"/>
+          </a:fillRef>
+          <a:effectRef idx="1">
+            <a:schemeClr val="accent1"/>
+          </a:effectRef>
+          <a:fontRef idx="minor">
+            <a:schemeClr val="tx1"/>
+          </a:fontRef>
+        </p:style>
+      </p:cxnSp>
+      <p:cxnSp>
+        <p:nvCxnSpPr>
+          <p:cNvPr id="89" name="Connector 88"/>
+          <p:cNvCxnSpPr/>
+          <p:nvPr/>
+        </p:nvCxnSpPr>
+        <p:spPr>
+          <a:xfrm flipV="1">
+            <a:off x="9006840" y="6606540"/>
+            <a:ext cx="4114800" cy="1528982"/>
+          </a:xfrm>
+          <a:prstGeom prst="line">
+            <a:avLst/>
+          </a:prstGeom>
+          <a:ln w="11430">
+            <a:solidFill>
+              <a:srgbClr val="9A8C7A">
+                <a:alpha val="55000"/>
+              </a:srgbClr>
+            </a:solidFill>
+            <a:prstDash val="dash"/>
+          </a:ln>
+        </p:spPr>
+        <p:style>
+          <a:lnRef idx="2">
+            <a:schemeClr val="accent1"/>
+          </a:lnRef>
+          <a:fillRef idx="0">
+            <a:schemeClr val="accent1"/>
+          </a:fillRef>
+          <a:effectRef idx="1">
+            <a:schemeClr val="accent1"/>
+          </a:effectRef>
+          <a:fontRef idx="minor">
+            <a:schemeClr val="tx1"/>
+          </a:fontRef>
+        </p:style>
+      </p:cxnSp>
+      <p:cxnSp>
+        <p:nvCxnSpPr>
+          <p:cNvPr id="90" name="Connector 89"/>
+          <p:cNvCxnSpPr/>
+          <p:nvPr/>
+        </p:nvCxnSpPr>
+        <p:spPr>
+          <a:xfrm flipH="1">
+            <a:off x="13121640" y="1604772"/>
+            <a:ext cx="4069080" cy="2327148"/>
+          </a:xfrm>
+          <a:prstGeom prst="line">
+            <a:avLst/>
+          </a:prstGeom>
+          <a:ln w="17780">
+            <a:solidFill>
+              <a:srgbClr val="C09A5B">
+                <a:alpha val="90000"/>
+              </a:srgbClr>
+            </a:solidFill>
+          </a:ln>
+        </p:spPr>
+        <p:style>
+          <a:lnRef idx="2">
+            <a:schemeClr val="accent1"/>
+          </a:lnRef>
+          <a:fillRef idx="0">
+            <a:schemeClr val="accent1"/>
+          </a:fillRef>
+          <a:effectRef idx="1">
+            <a:schemeClr val="accent1"/>
+          </a:effectRef>
+          <a:fontRef idx="minor">
+            <a:schemeClr val="tx1"/>
+          </a:fontRef>
+        </p:style>
+      </p:cxnSp>
+      <p:sp>
+        <p:nvSpPr>
+          <p:cNvPr id="91" name="Rounded Rectangle 90"/>
           <p:cNvSpPr/>
           <p:nvPr/>
         </p:nvSpPr>
         <p:spPr>
           <a:xfrm>
-            <a:off x="274320" y="1831085"/>
-            <a:ext cx="1828800" cy="251460"/>
+            <a:off x="274320" y="1872234"/>
+            <a:ext cx="1600200" cy="251460"/>
           </a:xfrm>
           <a:prstGeom prst="roundRect">
             <a:avLst/>
@@ -6085,7 +6420,7 @@
           </a:fontRef>
         </p:style>
         <p:txBody>
-          <a:bodyPr rtlCol="0" anchor="ctr" wrap="square" lIns="20000" rIns="20000" tIns="5000" bIns="5000"/>
+          <a:bodyPr rtlCol="0" anchor="ctr" wrap="square" lIns="20000" rIns="20000" tIns="4000" bIns="4000"/>
           <a:lstStyle/>
           <a:p>
             <a:pPr algn="ctr"/>
@@ -6103,14 +6438,14 @@
       </p:sp>
       <p:sp>
         <p:nvSpPr>
-          <p:cNvPr id="83" name="Rounded Rectangle 82"/>
+          <p:cNvPr id="92" name="Rounded Rectangle 91"/>
           <p:cNvSpPr/>
           <p:nvPr/>
         </p:nvSpPr>
         <p:spPr>
           <a:xfrm>
-            <a:off x="274320" y="3367277"/>
-            <a:ext cx="1828800" cy="251460"/>
+            <a:off x="274320" y="3399282"/>
+            <a:ext cx="1600200" cy="251460"/>
           </a:xfrm>
           <a:prstGeom prst="roundRect">
             <a:avLst/>
@@ -6140,7 +6475,7 @@
           </a:fontRef>
         </p:style>
         <p:txBody>
-          <a:bodyPr rtlCol="0" anchor="ctr" wrap="square" lIns="20000" rIns="20000" tIns="5000" bIns="5000"/>
+          <a:bodyPr rtlCol="0" anchor="ctr" wrap="square" lIns="20000" rIns="20000" tIns="4000" bIns="4000"/>
           <a:lstStyle/>
           <a:p>
             <a:pPr algn="ctr"/>
@@ -6158,14 +6493,14 @@
       </p:sp>
       <p:sp>
         <p:nvSpPr>
-          <p:cNvPr id="84" name="Rounded Rectangle 83"/>
+          <p:cNvPr id="93" name="Rounded Rectangle 92"/>
           <p:cNvSpPr/>
           <p:nvPr/>
         </p:nvSpPr>
         <p:spPr>
           <a:xfrm>
-            <a:off x="274320" y="4903469"/>
-            <a:ext cx="1828800" cy="251460"/>
+            <a:off x="274320" y="4926330"/>
+            <a:ext cx="1600200" cy="251460"/>
           </a:xfrm>
           <a:prstGeom prst="roundRect">
             <a:avLst/>
@@ -6195,7 +6530,7 @@
           </a:fontRef>
         </p:style>
         <p:txBody>
-          <a:bodyPr rtlCol="0" anchor="ctr" wrap="square" lIns="20000" rIns="20000" tIns="5000" bIns="5000"/>
+          <a:bodyPr rtlCol="0" anchor="ctr" wrap="square" lIns="20000" rIns="20000" tIns="4000" bIns="4000"/>
           <a:lstStyle/>
           <a:p>
             <a:pPr algn="ctr"/>
@@ -6213,14 +6548,14 @@
       </p:sp>
       <p:sp>
         <p:nvSpPr>
-          <p:cNvPr id="85" name="Rounded Rectangle 84"/>
+          <p:cNvPr id="94" name="Rounded Rectangle 93"/>
           <p:cNvSpPr/>
           <p:nvPr/>
         </p:nvSpPr>
         <p:spPr>
           <a:xfrm>
-            <a:off x="274320" y="6439661"/>
-            <a:ext cx="1828800" cy="251460"/>
+            <a:off x="274320" y="6453378"/>
+            <a:ext cx="1600200" cy="251460"/>
           </a:xfrm>
           <a:prstGeom prst="roundRect">
             <a:avLst/>
@@ -6250,7 +6585,7 @@
           </a:fontRef>
         </p:style>
         <p:txBody>
-          <a:bodyPr rtlCol="0" anchor="ctr" wrap="square" lIns="20000" rIns="20000" tIns="5000" bIns="5000"/>
+          <a:bodyPr rtlCol="0" anchor="ctr" wrap="square" lIns="20000" rIns="20000" tIns="4000" bIns="4000"/>
           <a:lstStyle/>
           <a:p>
             <a:pPr algn="ctr"/>
@@ -6268,14 +6603,14 @@
       </p:sp>
       <p:sp>
         <p:nvSpPr>
-          <p:cNvPr id="86" name="Rounded Rectangle 85"/>
+          <p:cNvPr id="95" name="Rounded Rectangle 94"/>
           <p:cNvSpPr/>
           <p:nvPr/>
         </p:nvSpPr>
         <p:spPr>
           <a:xfrm>
-            <a:off x="274320" y="7975854"/>
-            <a:ext cx="1828800" cy="251460"/>
+            <a:off x="274320" y="7980425"/>
+            <a:ext cx="1600200" cy="251460"/>
           </a:xfrm>
           <a:prstGeom prst="roundRect">
             <a:avLst/>
@@ -6305,7 +6640,7 @@
           </a:fontRef>
         </p:style>
         <p:txBody>
-          <a:bodyPr rtlCol="0" anchor="ctr" wrap="square" lIns="20000" rIns="20000" tIns="5000" bIns="5000"/>
+          <a:bodyPr rtlCol="0" anchor="ctr" wrap="square" lIns="20000" rIns="20000" tIns="4000" bIns="4000"/>
           <a:lstStyle/>
           <a:p>
             <a:pPr algn="ctr"/>
@@ -6323,14 +6658,14 @@
       </p:sp>
       <p:sp>
         <p:nvSpPr>
-          <p:cNvPr id="87" name="Rounded Rectangle 86"/>
+          <p:cNvPr id="96" name="Rounded Rectangle 95"/>
           <p:cNvSpPr/>
           <p:nvPr/>
         </p:nvSpPr>
         <p:spPr>
           <a:xfrm>
-            <a:off x="2468880" y="1245870"/>
-            <a:ext cx="3657600" cy="251460"/>
+            <a:off x="2011680" y="1290501"/>
+            <a:ext cx="3520440" cy="251460"/>
           </a:xfrm>
           <a:prstGeom prst="roundRect">
             <a:avLst/>
@@ -6360,7 +6695,7 @@
           </a:fontRef>
         </p:style>
         <p:txBody>
-          <a:bodyPr rtlCol="0" anchor="ctr" wrap="square" lIns="20000" rIns="20000" tIns="5000" bIns="5000"/>
+          <a:bodyPr rtlCol="0" anchor="ctr" wrap="square" lIns="20000" rIns="20000" tIns="4000" bIns="4000"/>
           <a:lstStyle/>
           <a:p>
             <a:pPr algn="ctr"/>
@@ -6378,14 +6713,14 @@
       </p:sp>
       <p:sp>
         <p:nvSpPr>
-          <p:cNvPr id="88" name="Rounded Rectangle 87"/>
+          <p:cNvPr id="97" name="Rounded Rectangle 96"/>
           <p:cNvSpPr/>
           <p:nvPr/>
         </p:nvSpPr>
         <p:spPr>
           <a:xfrm>
-            <a:off x="2468880" y="1611630"/>
-            <a:ext cx="3657600" cy="251460"/>
+            <a:off x="2011680" y="1654084"/>
+            <a:ext cx="3520440" cy="251460"/>
           </a:xfrm>
           <a:prstGeom prst="roundRect">
             <a:avLst/>
@@ -6415,7 +6750,7 @@
           </a:fontRef>
         </p:style>
         <p:txBody>
-          <a:bodyPr rtlCol="0" anchor="ctr" wrap="square" lIns="20000" rIns="20000" tIns="5000" bIns="5000"/>
+          <a:bodyPr rtlCol="0" anchor="ctr" wrap="square" lIns="20000" rIns="20000" tIns="4000" bIns="4000"/>
           <a:lstStyle/>
           <a:p>
             <a:pPr algn="ctr"/>
@@ -6433,14 +6768,14 @@
       </p:sp>
       <p:sp>
         <p:nvSpPr>
-          <p:cNvPr id="89" name="Rounded Rectangle 88"/>
+          <p:cNvPr id="98" name="Rounded Rectangle 97"/>
           <p:cNvSpPr/>
           <p:nvPr/>
         </p:nvSpPr>
         <p:spPr>
           <a:xfrm>
-            <a:off x="2468880" y="1977389"/>
-            <a:ext cx="3657600" cy="251460"/>
+            <a:off x="2011680" y="2017667"/>
+            <a:ext cx="3520440" cy="251460"/>
           </a:xfrm>
           <a:prstGeom prst="roundRect">
             <a:avLst/>
@@ -6470,7 +6805,7 @@
           </a:fontRef>
         </p:style>
         <p:txBody>
-          <a:bodyPr rtlCol="0" anchor="ctr" wrap="square" lIns="20000" rIns="20000" tIns="5000" bIns="5000"/>
+          <a:bodyPr rtlCol="0" anchor="ctr" wrap="square" lIns="20000" rIns="20000" tIns="4000" bIns="4000"/>
           <a:lstStyle/>
           <a:p>
             <a:pPr algn="ctr"/>
@@ -6488,14 +6823,14 @@
       </p:sp>
       <p:sp>
         <p:nvSpPr>
-          <p:cNvPr id="90" name="Rounded Rectangle 89"/>
+          <p:cNvPr id="99" name="Rounded Rectangle 98"/>
           <p:cNvSpPr/>
           <p:nvPr/>
         </p:nvSpPr>
         <p:spPr>
           <a:xfrm>
-            <a:off x="2468880" y="2343149"/>
-            <a:ext cx="3657600" cy="251460"/>
+            <a:off x="2011680" y="2381250"/>
+            <a:ext cx="3520440" cy="251460"/>
           </a:xfrm>
           <a:prstGeom prst="roundRect">
             <a:avLst/>
@@ -6525,7 +6860,7 @@
           </a:fontRef>
         </p:style>
         <p:txBody>
-          <a:bodyPr rtlCol="0" anchor="ctr" wrap="square" lIns="20000" rIns="20000" tIns="5000" bIns="5000"/>
+          <a:bodyPr rtlCol="0" anchor="ctr" wrap="square" lIns="20000" rIns="20000" tIns="4000" bIns="4000"/>
           <a:lstStyle/>
           <a:p>
             <a:pPr algn="ctr"/>
@@ -6543,14 +6878,14 @@
       </p:sp>
       <p:sp>
         <p:nvSpPr>
-          <p:cNvPr id="91" name="Rounded Rectangle 90"/>
+          <p:cNvPr id="100" name="Rounded Rectangle 99"/>
           <p:cNvSpPr/>
           <p:nvPr/>
         </p:nvSpPr>
         <p:spPr>
           <a:xfrm>
-            <a:off x="2468880" y="2708909"/>
-            <a:ext cx="3657600" cy="251460"/>
+            <a:off x="2011680" y="2744832"/>
+            <a:ext cx="3520440" cy="251460"/>
           </a:xfrm>
           <a:prstGeom prst="roundRect">
             <a:avLst/>
@@ -6580,7 +6915,7 @@
           </a:fontRef>
         </p:style>
         <p:txBody>
-          <a:bodyPr rtlCol="0" anchor="ctr" wrap="square" lIns="20000" rIns="20000" tIns="5000" bIns="5000"/>
+          <a:bodyPr rtlCol="0" anchor="ctr" wrap="square" lIns="20000" rIns="20000" tIns="4000" bIns="4000"/>
           <a:lstStyle/>
           <a:p>
             <a:pPr algn="ctr"/>
@@ -6598,14 +6933,14 @@
       </p:sp>
       <p:sp>
         <p:nvSpPr>
-          <p:cNvPr id="92" name="Rounded Rectangle 91"/>
+          <p:cNvPr id="101" name="Rounded Rectangle 100"/>
           <p:cNvSpPr/>
           <p:nvPr/>
         </p:nvSpPr>
         <p:spPr>
           <a:xfrm>
-            <a:off x="2468880" y="3074669"/>
-            <a:ext cx="3657600" cy="251460"/>
+            <a:off x="2011680" y="3108415"/>
+            <a:ext cx="3520440" cy="251460"/>
           </a:xfrm>
           <a:prstGeom prst="roundRect">
             <a:avLst/>
@@ -6635,7 +6970,7 @@
           </a:fontRef>
         </p:style>
         <p:txBody>
-          <a:bodyPr rtlCol="0" anchor="ctr" wrap="square" lIns="20000" rIns="20000" tIns="5000" bIns="5000"/>
+          <a:bodyPr rtlCol="0" anchor="ctr" wrap="square" lIns="20000" rIns="20000" tIns="4000" bIns="4000"/>
           <a:lstStyle/>
           <a:p>
             <a:pPr algn="ctr"/>
@@ -6653,14 +6988,14 @@
       </p:sp>
       <p:sp>
         <p:nvSpPr>
-          <p:cNvPr id="93" name="Rounded Rectangle 92"/>
+          <p:cNvPr id="102" name="Rounded Rectangle 101"/>
           <p:cNvSpPr/>
           <p:nvPr/>
         </p:nvSpPr>
         <p:spPr>
           <a:xfrm>
-            <a:off x="2468880" y="3440429"/>
-            <a:ext cx="3657600" cy="251460"/>
+            <a:off x="2011680" y="3471998"/>
+            <a:ext cx="3520440" cy="251460"/>
           </a:xfrm>
           <a:prstGeom prst="roundRect">
             <a:avLst/>
@@ -6690,7 +7025,7 @@
           </a:fontRef>
         </p:style>
         <p:txBody>
-          <a:bodyPr rtlCol="0" anchor="ctr" wrap="square" lIns="20000" rIns="20000" tIns="5000" bIns="5000"/>
+          <a:bodyPr rtlCol="0" anchor="ctr" wrap="square" lIns="20000" rIns="20000" tIns="4000" bIns="4000"/>
           <a:lstStyle/>
           <a:p>
             <a:pPr algn="ctr"/>
@@ -6708,14 +7043,14 @@
       </p:sp>
       <p:sp>
         <p:nvSpPr>
-          <p:cNvPr id="94" name="Rounded Rectangle 93"/>
+          <p:cNvPr id="103" name="Rounded Rectangle 102"/>
           <p:cNvSpPr/>
           <p:nvPr/>
         </p:nvSpPr>
         <p:spPr>
           <a:xfrm>
-            <a:off x="2468880" y="3806189"/>
-            <a:ext cx="3657600" cy="251460"/>
+            <a:off x="2011680" y="3835581"/>
+            <a:ext cx="3520440" cy="251460"/>
           </a:xfrm>
           <a:prstGeom prst="roundRect">
             <a:avLst/>
@@ -6745,7 +7080,7 @@
           </a:fontRef>
         </p:style>
         <p:txBody>
-          <a:bodyPr rtlCol="0" anchor="ctr" wrap="square" lIns="20000" rIns="20000" tIns="5000" bIns="5000"/>
+          <a:bodyPr rtlCol="0" anchor="ctr" wrap="square" lIns="20000" rIns="20000" tIns="4000" bIns="4000"/>
           <a:lstStyle/>
           <a:p>
             <a:pPr algn="ctr"/>
@@ -6763,14 +7098,14 @@
       </p:sp>
       <p:sp>
         <p:nvSpPr>
-          <p:cNvPr id="95" name="Rounded Rectangle 94"/>
+          <p:cNvPr id="104" name="Rounded Rectangle 103"/>
           <p:cNvSpPr/>
           <p:nvPr/>
         </p:nvSpPr>
         <p:spPr>
           <a:xfrm>
-            <a:off x="2468880" y="4171949"/>
-            <a:ext cx="3657600" cy="251460"/>
+            <a:off x="2011680" y="4199164"/>
+            <a:ext cx="3520440" cy="251460"/>
           </a:xfrm>
           <a:prstGeom prst="roundRect">
             <a:avLst/>
@@ -6800,7 +7135,7 @@
           </a:fontRef>
         </p:style>
         <p:txBody>
-          <a:bodyPr rtlCol="0" anchor="ctr" wrap="square" lIns="20000" rIns="20000" tIns="5000" bIns="5000"/>
+          <a:bodyPr rtlCol="0" anchor="ctr" wrap="square" lIns="20000" rIns="20000" tIns="4000" bIns="4000"/>
           <a:lstStyle/>
           <a:p>
             <a:pPr algn="ctr"/>
@@ -6818,14 +7153,14 @@
       </p:sp>
       <p:sp>
         <p:nvSpPr>
-          <p:cNvPr id="96" name="Rounded Rectangle 95"/>
+          <p:cNvPr id="105" name="Rounded Rectangle 104"/>
           <p:cNvSpPr/>
           <p:nvPr/>
         </p:nvSpPr>
         <p:spPr>
           <a:xfrm>
-            <a:off x="2468880" y="4537709"/>
-            <a:ext cx="3657600" cy="251460"/>
+            <a:off x="2011680" y="4562747"/>
+            <a:ext cx="3520440" cy="251460"/>
           </a:xfrm>
           <a:prstGeom prst="roundRect">
             <a:avLst/>
@@ -6855,7 +7190,7 @@
           </a:fontRef>
         </p:style>
         <p:txBody>
-          <a:bodyPr rtlCol="0" anchor="ctr" wrap="square" lIns="20000" rIns="20000" tIns="5000" bIns="5000"/>
+          <a:bodyPr rtlCol="0" anchor="ctr" wrap="square" lIns="20000" rIns="20000" tIns="4000" bIns="4000"/>
           <a:lstStyle/>
           <a:p>
             <a:pPr algn="ctr"/>
@@ -6873,14 +7208,14 @@
       </p:sp>
       <p:sp>
         <p:nvSpPr>
-          <p:cNvPr id="97" name="Rounded Rectangle 96"/>
+          <p:cNvPr id="106" name="Rounded Rectangle 105"/>
           <p:cNvSpPr/>
           <p:nvPr/>
         </p:nvSpPr>
         <p:spPr>
           <a:xfrm>
-            <a:off x="2468880" y="4903469"/>
-            <a:ext cx="3657600" cy="251460"/>
+            <a:off x="2011680" y="4926330"/>
+            <a:ext cx="3520440" cy="251460"/>
           </a:xfrm>
           <a:prstGeom prst="roundRect">
             <a:avLst/>
@@ -6910,7 +7245,7 @@
           </a:fontRef>
         </p:style>
         <p:txBody>
-          <a:bodyPr rtlCol="0" anchor="ctr" wrap="square" lIns="20000" rIns="20000" tIns="5000" bIns="5000"/>
+          <a:bodyPr rtlCol="0" anchor="ctr" wrap="square" lIns="20000" rIns="20000" tIns="4000" bIns="4000"/>
           <a:lstStyle/>
           <a:p>
             <a:pPr algn="ctr"/>
@@ -6928,14 +7263,14 @@
       </p:sp>
       <p:sp>
         <p:nvSpPr>
-          <p:cNvPr id="98" name="Rounded Rectangle 97"/>
+          <p:cNvPr id="107" name="Rounded Rectangle 106"/>
           <p:cNvSpPr/>
           <p:nvPr/>
         </p:nvSpPr>
         <p:spPr>
           <a:xfrm>
-            <a:off x="2468880" y="5269229"/>
-            <a:ext cx="3657600" cy="251460"/>
+            <a:off x="2011680" y="5289912"/>
+            <a:ext cx="3520440" cy="251460"/>
           </a:xfrm>
           <a:prstGeom prst="roundRect">
             <a:avLst/>
@@ -6965,7 +7300,7 @@
           </a:fontRef>
         </p:style>
         <p:txBody>
-          <a:bodyPr rtlCol="0" anchor="ctr" wrap="square" lIns="20000" rIns="20000" tIns="5000" bIns="5000"/>
+          <a:bodyPr rtlCol="0" anchor="ctr" wrap="square" lIns="20000" rIns="20000" tIns="4000" bIns="4000"/>
           <a:lstStyle/>
           <a:p>
             <a:pPr algn="ctr"/>
@@ -6983,14 +7318,14 @@
       </p:sp>
       <p:sp>
         <p:nvSpPr>
-          <p:cNvPr id="99" name="Rounded Rectangle 98"/>
+          <p:cNvPr id="108" name="Rounded Rectangle 107"/>
           <p:cNvSpPr/>
           <p:nvPr/>
         </p:nvSpPr>
         <p:spPr>
           <a:xfrm>
-            <a:off x="2468880" y="5634989"/>
-            <a:ext cx="3657600" cy="251460"/>
+            <a:off x="2011680" y="5653495"/>
+            <a:ext cx="3520440" cy="251460"/>
           </a:xfrm>
           <a:prstGeom prst="roundRect">
             <a:avLst/>
@@ -7020,7 +7355,7 @@
           </a:fontRef>
         </p:style>
         <p:txBody>
-          <a:bodyPr rtlCol="0" anchor="ctr" wrap="square" lIns="20000" rIns="20000" tIns="5000" bIns="5000"/>
+          <a:bodyPr rtlCol="0" anchor="ctr" wrap="square" lIns="20000" rIns="20000" tIns="4000" bIns="4000"/>
           <a:lstStyle/>
           <a:p>
             <a:pPr algn="ctr"/>
@@ -7038,14 +7373,14 @@
       </p:sp>
       <p:sp>
         <p:nvSpPr>
-          <p:cNvPr id="100" name="Rounded Rectangle 99"/>
+          <p:cNvPr id="109" name="Rounded Rectangle 108"/>
           <p:cNvSpPr/>
           <p:nvPr/>
         </p:nvSpPr>
         <p:spPr>
           <a:xfrm>
-            <a:off x="2468880" y="6000749"/>
-            <a:ext cx="3657600" cy="251460"/>
+            <a:off x="2011680" y="6017078"/>
+            <a:ext cx="3520440" cy="251460"/>
           </a:xfrm>
           <a:prstGeom prst="roundRect">
             <a:avLst/>
@@ -7075,7 +7410,7 @@
           </a:fontRef>
         </p:style>
         <p:txBody>
-          <a:bodyPr rtlCol="0" anchor="ctr" wrap="square" lIns="20000" rIns="20000" tIns="5000" bIns="5000"/>
+          <a:bodyPr rtlCol="0" anchor="ctr" wrap="square" lIns="20000" rIns="20000" tIns="4000" bIns="4000"/>
           <a:lstStyle/>
           <a:p>
             <a:pPr algn="ctr"/>
@@ -7093,14 +7428,14 @@
       </p:sp>
       <p:sp>
         <p:nvSpPr>
-          <p:cNvPr id="101" name="Rounded Rectangle 100"/>
+          <p:cNvPr id="110" name="Rounded Rectangle 109"/>
           <p:cNvSpPr/>
           <p:nvPr/>
         </p:nvSpPr>
         <p:spPr>
           <a:xfrm>
-            <a:off x="2468880" y="6366509"/>
-            <a:ext cx="3657600" cy="251460"/>
+            <a:off x="2011680" y="6380661"/>
+            <a:ext cx="3520440" cy="251460"/>
           </a:xfrm>
           <a:prstGeom prst="roundRect">
             <a:avLst/>
@@ -7130,7 +7465,7 @@
           </a:fontRef>
         </p:style>
         <p:txBody>
-          <a:bodyPr rtlCol="0" anchor="ctr" wrap="square" lIns="20000" rIns="20000" tIns="5000" bIns="5000"/>
+          <a:bodyPr rtlCol="0" anchor="ctr" wrap="square" lIns="20000" rIns="20000" tIns="4000" bIns="4000"/>
           <a:lstStyle/>
           <a:p>
             <a:pPr algn="ctr"/>
@@ -7148,14 +7483,14 @@
       </p:sp>
       <p:sp>
         <p:nvSpPr>
-          <p:cNvPr id="102" name="Rounded Rectangle 101"/>
+          <p:cNvPr id="111" name="Rounded Rectangle 110"/>
           <p:cNvSpPr/>
           <p:nvPr/>
         </p:nvSpPr>
         <p:spPr>
           <a:xfrm>
-            <a:off x="2468880" y="6732269"/>
-            <a:ext cx="3657600" cy="251460"/>
+            <a:off x="2011680" y="6744244"/>
+            <a:ext cx="3520440" cy="251460"/>
           </a:xfrm>
           <a:prstGeom prst="roundRect">
             <a:avLst/>
@@ -7185,7 +7520,7 @@
           </a:fontRef>
         </p:style>
         <p:txBody>
-          <a:bodyPr rtlCol="0" anchor="ctr" wrap="square" lIns="20000" rIns="20000" tIns="5000" bIns="5000"/>
+          <a:bodyPr rtlCol="0" anchor="ctr" wrap="square" lIns="20000" rIns="20000" tIns="4000" bIns="4000"/>
           <a:lstStyle/>
           <a:p>
             <a:pPr algn="ctr"/>
@@ -7203,14 +7538,14 @@
       </p:sp>
       <p:sp>
         <p:nvSpPr>
-          <p:cNvPr id="103" name="Rounded Rectangle 102"/>
+          <p:cNvPr id="112" name="Rounded Rectangle 111"/>
           <p:cNvSpPr/>
           <p:nvPr/>
         </p:nvSpPr>
         <p:spPr>
           <a:xfrm>
-            <a:off x="2468880" y="7098029"/>
-            <a:ext cx="3657600" cy="251460"/>
+            <a:off x="2011680" y="7107827"/>
+            <a:ext cx="3520440" cy="251460"/>
           </a:xfrm>
           <a:prstGeom prst="roundRect">
             <a:avLst/>
@@ -7240,7 +7575,7 @@
           </a:fontRef>
         </p:style>
         <p:txBody>
-          <a:bodyPr rtlCol="0" anchor="ctr" wrap="square" lIns="20000" rIns="20000" tIns="5000" bIns="5000"/>
+          <a:bodyPr rtlCol="0" anchor="ctr" wrap="square" lIns="20000" rIns="20000" tIns="4000" bIns="4000"/>
           <a:lstStyle/>
           <a:p>
             <a:pPr algn="ctr"/>
@@ -7258,14 +7593,14 @@
       </p:sp>
       <p:sp>
         <p:nvSpPr>
-          <p:cNvPr id="104" name="Rounded Rectangle 103"/>
+          <p:cNvPr id="113" name="Rounded Rectangle 112"/>
           <p:cNvSpPr/>
           <p:nvPr/>
         </p:nvSpPr>
         <p:spPr>
           <a:xfrm>
-            <a:off x="2468880" y="7463790"/>
-            <a:ext cx="3657600" cy="251460"/>
+            <a:off x="2011680" y="7471410"/>
+            <a:ext cx="3520440" cy="251460"/>
           </a:xfrm>
           <a:prstGeom prst="roundRect">
             <a:avLst/>
@@ -7295,7 +7630,7 @@
           </a:fontRef>
         </p:style>
         <p:txBody>
-          <a:bodyPr rtlCol="0" anchor="ctr" wrap="square" lIns="20000" rIns="20000" tIns="5000" bIns="5000"/>
+          <a:bodyPr rtlCol="0" anchor="ctr" wrap="square" lIns="20000" rIns="20000" tIns="4000" bIns="4000"/>
           <a:lstStyle/>
           <a:p>
             <a:pPr algn="ctr"/>
@@ -7313,14 +7648,14 @@
       </p:sp>
       <p:sp>
         <p:nvSpPr>
-          <p:cNvPr id="105" name="Rounded Rectangle 104"/>
+          <p:cNvPr id="114" name="Rounded Rectangle 113"/>
           <p:cNvSpPr/>
           <p:nvPr/>
         </p:nvSpPr>
         <p:spPr>
           <a:xfrm>
-            <a:off x="2468880" y="7829550"/>
-            <a:ext cx="3657600" cy="251460"/>
+            <a:off x="2011680" y="7834992"/>
+            <a:ext cx="3520440" cy="251460"/>
           </a:xfrm>
           <a:prstGeom prst="roundRect">
             <a:avLst/>
@@ -7350,7 +7685,7 @@
           </a:fontRef>
         </p:style>
         <p:txBody>
-          <a:bodyPr rtlCol="0" anchor="ctr" wrap="square" lIns="20000" rIns="20000" tIns="5000" bIns="5000"/>
+          <a:bodyPr rtlCol="0" anchor="ctr" wrap="square" lIns="20000" rIns="20000" tIns="4000" bIns="4000"/>
           <a:lstStyle/>
           <a:p>
             <a:pPr algn="ctr"/>
@@ -7368,14 +7703,14 @@
       </p:sp>
       <p:sp>
         <p:nvSpPr>
-          <p:cNvPr id="106" name="Rounded Rectangle 105"/>
+          <p:cNvPr id="115" name="Rounded Rectangle 114"/>
           <p:cNvSpPr/>
           <p:nvPr/>
         </p:nvSpPr>
         <p:spPr>
           <a:xfrm>
-            <a:off x="2468880" y="8195310"/>
-            <a:ext cx="3657600" cy="251460"/>
+            <a:off x="2011680" y="8198575"/>
+            <a:ext cx="3520440" cy="251460"/>
           </a:xfrm>
           <a:prstGeom prst="roundRect">
             <a:avLst/>
@@ -7405,7 +7740,7 @@
           </a:fontRef>
         </p:style>
         <p:txBody>
-          <a:bodyPr rtlCol="0" anchor="ctr" wrap="square" lIns="20000" rIns="20000" tIns="5000" bIns="5000"/>
+          <a:bodyPr rtlCol="0" anchor="ctr" wrap="square" lIns="20000" rIns="20000" tIns="4000" bIns="4000"/>
           <a:lstStyle/>
           <a:p>
             <a:pPr algn="ctr"/>
@@ -7423,14 +7758,14 @@
       </p:sp>
       <p:sp>
         <p:nvSpPr>
-          <p:cNvPr id="107" name="Rounded Rectangle 106"/>
+          <p:cNvPr id="116" name="Rounded Rectangle 115"/>
           <p:cNvSpPr/>
           <p:nvPr/>
         </p:nvSpPr>
         <p:spPr>
           <a:xfrm>
-            <a:off x="2468880" y="8561069"/>
-            <a:ext cx="3657600" cy="251460"/>
+            <a:off x="2011680" y="8562158"/>
+            <a:ext cx="3520440" cy="251460"/>
           </a:xfrm>
           <a:prstGeom prst="roundRect">
             <a:avLst/>
@@ -7460,7 +7795,7 @@
           </a:fontRef>
         </p:style>
         <p:txBody>
-          <a:bodyPr rtlCol="0" anchor="ctr" wrap="square" lIns="20000" rIns="20000" tIns="5000" bIns="5000"/>
+          <a:bodyPr rtlCol="0" anchor="ctr" wrap="square" lIns="20000" rIns="20000" tIns="4000" bIns="4000"/>
           <a:lstStyle/>
           <a:p>
             <a:pPr algn="ctr"/>
@@ -7478,14 +7813,14 @@
       </p:sp>
       <p:sp>
         <p:nvSpPr>
-          <p:cNvPr id="108" name="Rounded Rectangle 107"/>
+          <p:cNvPr id="117" name="Rounded Rectangle 116"/>
           <p:cNvSpPr/>
           <p:nvPr/>
         </p:nvSpPr>
         <p:spPr>
           <a:xfrm>
-            <a:off x="6492240" y="1205230"/>
-            <a:ext cx="3474720" cy="251460"/>
+            <a:off x="5760720" y="1255541"/>
+            <a:ext cx="3246120" cy="251460"/>
           </a:xfrm>
           <a:prstGeom prst="roundRect">
             <a:avLst/>
@@ -7515,7 +7850,7 @@
           </a:fontRef>
         </p:style>
         <p:txBody>
-          <a:bodyPr rtlCol="0" anchor="ctr" wrap="square" lIns="20000" rIns="20000" tIns="5000" bIns="5000"/>
+          <a:bodyPr rtlCol="0" anchor="ctr" wrap="square" lIns="20000" rIns="20000" tIns="4000" bIns="4000"/>
           <a:lstStyle/>
           <a:p>
             <a:pPr algn="ctr"/>
@@ -7533,14 +7868,14 @@
       </p:sp>
       <p:sp>
         <p:nvSpPr>
-          <p:cNvPr id="109" name="Rounded Rectangle 108"/>
+          <p:cNvPr id="118" name="Rounded Rectangle 117"/>
           <p:cNvSpPr/>
           <p:nvPr/>
         </p:nvSpPr>
         <p:spPr>
           <a:xfrm>
-            <a:off x="6492240" y="1489710"/>
-            <a:ext cx="3474720" cy="251460"/>
+            <a:off x="5760720" y="1549204"/>
+            <a:ext cx="3246120" cy="251460"/>
           </a:xfrm>
           <a:prstGeom prst="roundRect">
             <a:avLst/>
@@ -7570,7 +7905,7 @@
           </a:fontRef>
         </p:style>
         <p:txBody>
-          <a:bodyPr rtlCol="0" anchor="ctr" wrap="square" lIns="20000" rIns="20000" tIns="5000" bIns="5000"/>
+          <a:bodyPr rtlCol="0" anchor="ctr" wrap="square" lIns="20000" rIns="20000" tIns="4000" bIns="4000"/>
           <a:lstStyle/>
           <a:p>
             <a:pPr algn="ctr"/>
@@ -7588,14 +7923,14 @@
       </p:sp>
       <p:sp>
         <p:nvSpPr>
-          <p:cNvPr id="110" name="Rounded Rectangle 109"/>
+          <p:cNvPr id="119" name="Rounded Rectangle 118"/>
           <p:cNvSpPr/>
           <p:nvPr/>
         </p:nvSpPr>
         <p:spPr>
           <a:xfrm>
-            <a:off x="6492240" y="1774189"/>
-            <a:ext cx="3474720" cy="251460"/>
+            <a:off x="5760720" y="1842867"/>
+            <a:ext cx="3246120" cy="251460"/>
           </a:xfrm>
           <a:prstGeom prst="roundRect">
             <a:avLst/>
@@ -7625,7 +7960,7 @@
           </a:fontRef>
         </p:style>
         <p:txBody>
-          <a:bodyPr rtlCol="0" anchor="ctr" wrap="square" lIns="20000" rIns="20000" tIns="5000" bIns="5000"/>
+          <a:bodyPr rtlCol="0" anchor="ctr" wrap="square" lIns="20000" rIns="20000" tIns="4000" bIns="4000"/>
           <a:lstStyle/>
           <a:p>
             <a:pPr algn="ctr"/>
@@ -7643,14 +7978,14 @@
       </p:sp>
       <p:sp>
         <p:nvSpPr>
-          <p:cNvPr id="111" name="Rounded Rectangle 110"/>
+          <p:cNvPr id="120" name="Rounded Rectangle 119"/>
           <p:cNvSpPr/>
           <p:nvPr/>
         </p:nvSpPr>
         <p:spPr>
           <a:xfrm>
-            <a:off x="6492240" y="2058669"/>
-            <a:ext cx="3474720" cy="251460"/>
+            <a:off x="5760720" y="2136530"/>
+            <a:ext cx="3246120" cy="251460"/>
           </a:xfrm>
           <a:prstGeom prst="roundRect">
             <a:avLst/>
@@ -7680,7 +8015,7 @@
           </a:fontRef>
         </p:style>
         <p:txBody>
-          <a:bodyPr rtlCol="0" anchor="ctr" wrap="square" lIns="20000" rIns="20000" tIns="5000" bIns="5000"/>
+          <a:bodyPr rtlCol="0" anchor="ctr" wrap="square" lIns="20000" rIns="20000" tIns="4000" bIns="4000"/>
           <a:lstStyle/>
           <a:p>
             <a:pPr algn="ctr"/>
@@ -7698,14 +8033,14 @@
       </p:sp>
       <p:sp>
         <p:nvSpPr>
-          <p:cNvPr id="112" name="Rounded Rectangle 111"/>
+          <p:cNvPr id="121" name="Rounded Rectangle 120"/>
           <p:cNvSpPr/>
           <p:nvPr/>
         </p:nvSpPr>
         <p:spPr>
           <a:xfrm>
-            <a:off x="6492240" y="2343150"/>
-            <a:ext cx="3474720" cy="251460"/>
+            <a:off x="5760720" y="2430193"/>
+            <a:ext cx="3246120" cy="251460"/>
           </a:xfrm>
           <a:prstGeom prst="roundRect">
             <a:avLst/>
@@ -7735,7 +8070,7 @@
           </a:fontRef>
         </p:style>
         <p:txBody>
-          <a:bodyPr rtlCol="0" anchor="ctr" wrap="square" lIns="20000" rIns="20000" tIns="5000" bIns="5000"/>
+          <a:bodyPr rtlCol="0" anchor="ctr" wrap="square" lIns="20000" rIns="20000" tIns="4000" bIns="4000"/>
           <a:lstStyle/>
           <a:p>
             <a:pPr algn="ctr"/>
@@ -7753,14 +8088,14 @@
       </p:sp>
       <p:sp>
         <p:nvSpPr>
-          <p:cNvPr id="113" name="Rounded Rectangle 112"/>
+          <p:cNvPr id="122" name="Rounded Rectangle 121"/>
           <p:cNvSpPr/>
           <p:nvPr/>
         </p:nvSpPr>
         <p:spPr>
           <a:xfrm>
-            <a:off x="6492240" y="2627629"/>
-            <a:ext cx="3474720" cy="251460"/>
+            <a:off x="5760720" y="2723856"/>
+            <a:ext cx="3246120" cy="251460"/>
           </a:xfrm>
           <a:prstGeom prst="roundRect">
             <a:avLst/>
@@ -7790,7 +8125,7 @@
           </a:fontRef>
         </p:style>
         <p:txBody>
-          <a:bodyPr rtlCol="0" anchor="ctr" wrap="square" lIns="20000" rIns="20000" tIns="5000" bIns="5000"/>
+          <a:bodyPr rtlCol="0" anchor="ctr" wrap="square" lIns="20000" rIns="20000" tIns="4000" bIns="4000"/>
           <a:lstStyle/>
           <a:p>
             <a:pPr algn="ctr"/>
@@ -7808,14 +8143,14 @@
       </p:sp>
       <p:sp>
         <p:nvSpPr>
-          <p:cNvPr id="114" name="Rounded Rectangle 113"/>
+          <p:cNvPr id="123" name="Rounded Rectangle 122"/>
           <p:cNvSpPr/>
           <p:nvPr/>
         </p:nvSpPr>
         <p:spPr>
           <a:xfrm>
-            <a:off x="6492240" y="2912109"/>
-            <a:ext cx="3474720" cy="251460"/>
+            <a:off x="5760720" y="3017520"/>
+            <a:ext cx="3246120" cy="251460"/>
           </a:xfrm>
           <a:prstGeom prst="roundRect">
             <a:avLst/>
@@ -7845,7 +8180,7 @@
           </a:fontRef>
         </p:style>
         <p:txBody>
-          <a:bodyPr rtlCol="0" anchor="ctr" wrap="square" lIns="20000" rIns="20000" tIns="5000" bIns="5000"/>
+          <a:bodyPr rtlCol="0" anchor="ctr" wrap="square" lIns="20000" rIns="20000" tIns="4000" bIns="4000"/>
           <a:lstStyle/>
           <a:p>
             <a:pPr algn="ctr"/>
@@ -7863,14 +8198,14 @@
       </p:sp>
       <p:sp>
         <p:nvSpPr>
-          <p:cNvPr id="115" name="Rounded Rectangle 114"/>
+          <p:cNvPr id="124" name="Rounded Rectangle 123"/>
           <p:cNvSpPr/>
           <p:nvPr/>
         </p:nvSpPr>
         <p:spPr>
           <a:xfrm>
-            <a:off x="6492240" y="3196589"/>
-            <a:ext cx="3474720" cy="251460"/>
+            <a:off x="5760720" y="3311183"/>
+            <a:ext cx="3246120" cy="251460"/>
           </a:xfrm>
           <a:prstGeom prst="roundRect">
             <a:avLst/>
@@ -7900,7 +8235,7 @@
           </a:fontRef>
         </p:style>
         <p:txBody>
-          <a:bodyPr rtlCol="0" anchor="ctr" wrap="square" lIns="20000" rIns="20000" tIns="5000" bIns="5000"/>
+          <a:bodyPr rtlCol="0" anchor="ctr" wrap="square" lIns="20000" rIns="20000" tIns="4000" bIns="4000"/>
           <a:lstStyle/>
           <a:p>
             <a:pPr algn="ctr"/>
@@ -7918,14 +8253,14 @@
       </p:sp>
       <p:sp>
         <p:nvSpPr>
-          <p:cNvPr id="116" name="Rounded Rectangle 115"/>
+          <p:cNvPr id="125" name="Rounded Rectangle 124"/>
           <p:cNvSpPr/>
           <p:nvPr/>
         </p:nvSpPr>
         <p:spPr>
           <a:xfrm>
-            <a:off x="6492240" y="3481069"/>
-            <a:ext cx="3474720" cy="251460"/>
+            <a:off x="5760720" y="3604846"/>
+            <a:ext cx="3246120" cy="251460"/>
           </a:xfrm>
           <a:prstGeom prst="roundRect">
             <a:avLst/>
@@ -7955,7 +8290,7 @@
           </a:fontRef>
         </p:style>
         <p:txBody>
-          <a:bodyPr rtlCol="0" anchor="ctr" wrap="square" lIns="20000" rIns="20000" tIns="5000" bIns="5000"/>
+          <a:bodyPr rtlCol="0" anchor="ctr" wrap="square" lIns="20000" rIns="20000" tIns="4000" bIns="4000"/>
           <a:lstStyle/>
           <a:p>
             <a:pPr algn="ctr"/>
@@ -7973,14 +8308,14 @@
       </p:sp>
       <p:sp>
         <p:nvSpPr>
-          <p:cNvPr id="117" name="Rounded Rectangle 116"/>
+          <p:cNvPr id="126" name="Rounded Rectangle 125"/>
           <p:cNvSpPr/>
           <p:nvPr/>
         </p:nvSpPr>
         <p:spPr>
           <a:xfrm>
-            <a:off x="6492240" y="3765549"/>
-            <a:ext cx="3474720" cy="251460"/>
+            <a:off x="5760720" y="3898509"/>
+            <a:ext cx="3246120" cy="251460"/>
           </a:xfrm>
           <a:prstGeom prst="roundRect">
             <a:avLst/>
@@ -8010,7 +8345,7 @@
           </a:fontRef>
         </p:style>
         <p:txBody>
-          <a:bodyPr rtlCol="0" anchor="ctr" wrap="square" lIns="20000" rIns="20000" tIns="5000" bIns="5000"/>
+          <a:bodyPr rtlCol="0" anchor="ctr" wrap="square" lIns="20000" rIns="20000" tIns="4000" bIns="4000"/>
           <a:lstStyle/>
           <a:p>
             <a:pPr algn="ctr"/>
@@ -8028,14 +8363,14 @@
       </p:sp>
       <p:sp>
         <p:nvSpPr>
-          <p:cNvPr id="118" name="Rounded Rectangle 117"/>
+          <p:cNvPr id="127" name="Rounded Rectangle 126"/>
           <p:cNvSpPr/>
           <p:nvPr/>
         </p:nvSpPr>
         <p:spPr>
           <a:xfrm>
-            <a:off x="6492240" y="4050029"/>
-            <a:ext cx="3474720" cy="251460"/>
+            <a:off x="5760720" y="4192172"/>
+            <a:ext cx="3246120" cy="251460"/>
           </a:xfrm>
           <a:prstGeom prst="roundRect">
             <a:avLst/>
@@ -8065,7 +8400,7 @@
           </a:fontRef>
         </p:style>
         <p:txBody>
-          <a:bodyPr rtlCol="0" anchor="ctr" wrap="square" lIns="20000" rIns="20000" tIns="5000" bIns="5000"/>
+          <a:bodyPr rtlCol="0" anchor="ctr" wrap="square" lIns="20000" rIns="20000" tIns="4000" bIns="4000"/>
           <a:lstStyle/>
           <a:p>
             <a:pPr algn="ctr"/>
@@ -8083,14 +8418,14 @@
       </p:sp>
       <p:sp>
         <p:nvSpPr>
-          <p:cNvPr id="119" name="Rounded Rectangle 118"/>
+          <p:cNvPr id="128" name="Rounded Rectangle 127"/>
           <p:cNvSpPr/>
           <p:nvPr/>
         </p:nvSpPr>
         <p:spPr>
           <a:xfrm>
-            <a:off x="6492240" y="4334509"/>
-            <a:ext cx="3474720" cy="251460"/>
+            <a:off x="5760720" y="4485835"/>
+            <a:ext cx="3246120" cy="251460"/>
           </a:xfrm>
           <a:prstGeom prst="roundRect">
             <a:avLst/>
@@ -8120,62 +8455,7 @@
           </a:fontRef>
         </p:style>
         <p:txBody>
-          <a:bodyPr rtlCol="0" anchor="ctr" wrap="square" lIns="20000" rIns="20000" tIns="5000" bIns="5000"/>
-          <a:lstStyle/>
-          <a:p>
-            <a:pPr algn="ctr"/>
-            <a:r>
-              <a:rPr sz="850" b="0">
-                <a:solidFill>
-                  <a:srgbClr val="2B2A28"/>
-                </a:solidFill>
-                <a:latin typeface="Malgun Gothic"/>
-              </a:rPr>
-              <a:t>안건 적법성·후보 평가</a:t>
-            </a:r>
-          </a:p>
-        </p:txBody>
-      </p:sp>
-      <p:sp>
-        <p:nvSpPr>
-          <p:cNvPr id="120" name="Rounded Rectangle 119"/>
-          <p:cNvSpPr/>
-          <p:nvPr/>
-        </p:nvSpPr>
-        <p:spPr>
-          <a:xfrm>
-            <a:off x="6492240" y="4618989"/>
-            <a:ext cx="3474720" cy="251460"/>
-          </a:xfrm>
-          <a:prstGeom prst="roundRect">
-            <a:avLst/>
-          </a:prstGeom>
-          <a:solidFill>
-            <a:srgbClr val="E3E8D8"/>
-          </a:solidFill>
-          <a:ln w="12700">
-            <a:solidFill>
-              <a:srgbClr val="8A9A6B"/>
-            </a:solidFill>
-          </a:ln>
-          <a:effectLst/>
-        </p:spPr>
-        <p:style>
-          <a:lnRef idx="1">
-            <a:schemeClr val="accent1"/>
-          </a:lnRef>
-          <a:fillRef idx="3">
-            <a:schemeClr val="accent1"/>
-          </a:fillRef>
-          <a:effectRef idx="2">
-            <a:schemeClr val="accent1"/>
-          </a:effectRef>
-          <a:fontRef idx="minor">
-            <a:schemeClr val="lt1"/>
-          </a:fontRef>
-        </p:style>
-        <p:txBody>
-          <a:bodyPr rtlCol="0" anchor="ctr" wrap="square" lIns="20000" rIns="20000" tIns="5000" bIns="5000"/>
+          <a:bodyPr rtlCol="0" anchor="ctr" wrap="square" lIns="20000" rIns="20000" tIns="4000" bIns="4000"/>
           <a:lstStyle/>
           <a:p>
             <a:pPr algn="ctr"/>
@@ -8193,14 +8473,14 @@
       </p:sp>
       <p:sp>
         <p:nvSpPr>
-          <p:cNvPr id="121" name="Rounded Rectangle 120"/>
+          <p:cNvPr id="129" name="Rounded Rectangle 128"/>
           <p:cNvSpPr/>
           <p:nvPr/>
         </p:nvSpPr>
         <p:spPr>
           <a:xfrm>
-            <a:off x="6492240" y="4903469"/>
-            <a:ext cx="3474720" cy="251460"/>
+            <a:off x="5760720" y="4779498"/>
+            <a:ext cx="3246120" cy="251460"/>
           </a:xfrm>
           <a:prstGeom prst="roundRect">
             <a:avLst/>
@@ -8230,7 +8510,7 @@
           </a:fontRef>
         </p:style>
         <p:txBody>
-          <a:bodyPr rtlCol="0" anchor="ctr" wrap="square" lIns="20000" rIns="20000" tIns="5000" bIns="5000"/>
+          <a:bodyPr rtlCol="0" anchor="ctr" wrap="square" lIns="20000" rIns="20000" tIns="4000" bIns="4000"/>
           <a:lstStyle/>
           <a:p>
             <a:pPr algn="ctr"/>
@@ -8248,14 +8528,14 @@
       </p:sp>
       <p:sp>
         <p:nvSpPr>
-          <p:cNvPr id="122" name="Rounded Rectangle 121"/>
+          <p:cNvPr id="130" name="Rounded Rectangle 129"/>
           <p:cNvSpPr/>
           <p:nvPr/>
         </p:nvSpPr>
         <p:spPr>
           <a:xfrm>
-            <a:off x="6492240" y="5187949"/>
-            <a:ext cx="3474720" cy="251460"/>
+            <a:off x="5760720" y="5073161"/>
+            <a:ext cx="3246120" cy="251460"/>
           </a:xfrm>
           <a:prstGeom prst="roundRect">
             <a:avLst/>
@@ -8285,7 +8565,7 @@
           </a:fontRef>
         </p:style>
         <p:txBody>
-          <a:bodyPr rtlCol="0" anchor="ctr" wrap="square" lIns="20000" rIns="20000" tIns="5000" bIns="5000"/>
+          <a:bodyPr rtlCol="0" anchor="ctr" wrap="square" lIns="20000" rIns="20000" tIns="4000" bIns="4000"/>
           <a:lstStyle/>
           <a:p>
             <a:pPr algn="ctr"/>
@@ -8303,14 +8583,14 @@
       </p:sp>
       <p:sp>
         <p:nvSpPr>
-          <p:cNvPr id="123" name="Rounded Rectangle 122"/>
+          <p:cNvPr id="131" name="Rounded Rectangle 130"/>
           <p:cNvSpPr/>
           <p:nvPr/>
         </p:nvSpPr>
         <p:spPr>
           <a:xfrm>
-            <a:off x="6492240" y="5472429"/>
-            <a:ext cx="3474720" cy="251460"/>
+            <a:off x="5760720" y="5366824"/>
+            <a:ext cx="3246120" cy="251460"/>
           </a:xfrm>
           <a:prstGeom prst="roundRect">
             <a:avLst/>
@@ -8340,7 +8620,7 @@
           </a:fontRef>
         </p:style>
         <p:txBody>
-          <a:bodyPr rtlCol="0" anchor="ctr" wrap="square" lIns="20000" rIns="20000" tIns="5000" bIns="5000"/>
+          <a:bodyPr rtlCol="0" anchor="ctr" wrap="square" lIns="20000" rIns="20000" tIns="4000" bIns="4000"/>
           <a:lstStyle/>
           <a:p>
             <a:pPr algn="ctr"/>
@@ -8358,14 +8638,14 @@
       </p:sp>
       <p:sp>
         <p:nvSpPr>
-          <p:cNvPr id="124" name="Rounded Rectangle 123"/>
+          <p:cNvPr id="132" name="Rounded Rectangle 131"/>
           <p:cNvSpPr/>
           <p:nvPr/>
         </p:nvSpPr>
         <p:spPr>
           <a:xfrm>
-            <a:off x="6492240" y="5756909"/>
-            <a:ext cx="3474720" cy="251460"/>
+            <a:off x="5760720" y="5660487"/>
+            <a:ext cx="3246120" cy="251460"/>
           </a:xfrm>
           <a:prstGeom prst="roundRect">
             <a:avLst/>
@@ -8395,7 +8675,7 @@
           </a:fontRef>
         </p:style>
         <p:txBody>
-          <a:bodyPr rtlCol="0" anchor="ctr" wrap="square" lIns="20000" rIns="20000" tIns="5000" bIns="5000"/>
+          <a:bodyPr rtlCol="0" anchor="ctr" wrap="square" lIns="20000" rIns="20000" tIns="4000" bIns="4000"/>
           <a:lstStyle/>
           <a:p>
             <a:pPr algn="ctr"/>
@@ -8413,14 +8693,14 @@
       </p:sp>
       <p:sp>
         <p:nvSpPr>
-          <p:cNvPr id="125" name="Rounded Rectangle 124"/>
+          <p:cNvPr id="133" name="Rounded Rectangle 132"/>
           <p:cNvSpPr/>
           <p:nvPr/>
         </p:nvSpPr>
         <p:spPr>
           <a:xfrm>
-            <a:off x="6492240" y="6041389"/>
-            <a:ext cx="3474720" cy="251460"/>
+            <a:off x="5760720" y="5954150"/>
+            <a:ext cx="3246120" cy="251460"/>
           </a:xfrm>
           <a:prstGeom prst="roundRect">
             <a:avLst/>
@@ -8450,7 +8730,7 @@
           </a:fontRef>
         </p:style>
         <p:txBody>
-          <a:bodyPr rtlCol="0" anchor="ctr" wrap="square" lIns="20000" rIns="20000" tIns="5000" bIns="5000"/>
+          <a:bodyPr rtlCol="0" anchor="ctr" wrap="square" lIns="20000" rIns="20000" tIns="4000" bIns="4000"/>
           <a:lstStyle/>
           <a:p>
             <a:pPr algn="ctr"/>
@@ -8468,14 +8748,14 @@
       </p:sp>
       <p:sp>
         <p:nvSpPr>
-          <p:cNvPr id="126" name="Rounded Rectangle 125"/>
+          <p:cNvPr id="134" name="Rounded Rectangle 133"/>
           <p:cNvSpPr/>
           <p:nvPr/>
         </p:nvSpPr>
         <p:spPr>
           <a:xfrm>
-            <a:off x="6492240" y="6325869"/>
-            <a:ext cx="3474720" cy="251460"/>
+            <a:off x="5760720" y="6247813"/>
+            <a:ext cx="3246120" cy="251460"/>
           </a:xfrm>
           <a:prstGeom prst="roundRect">
             <a:avLst/>
@@ -8505,7 +8785,7 @@
           </a:fontRef>
         </p:style>
         <p:txBody>
-          <a:bodyPr rtlCol="0" anchor="ctr" wrap="square" lIns="20000" rIns="20000" tIns="5000" bIns="5000"/>
+          <a:bodyPr rtlCol="0" anchor="ctr" wrap="square" lIns="20000" rIns="20000" tIns="4000" bIns="4000"/>
           <a:lstStyle/>
           <a:p>
             <a:pPr algn="ctr"/>
@@ -8523,14 +8803,14 @@
       </p:sp>
       <p:sp>
         <p:nvSpPr>
-          <p:cNvPr id="127" name="Rounded Rectangle 126"/>
+          <p:cNvPr id="135" name="Rounded Rectangle 134"/>
           <p:cNvSpPr/>
           <p:nvPr/>
         </p:nvSpPr>
         <p:spPr>
           <a:xfrm>
-            <a:off x="6492240" y="6610349"/>
-            <a:ext cx="3474720" cy="251460"/>
+            <a:off x="5760720" y="6541476"/>
+            <a:ext cx="3246120" cy="251460"/>
           </a:xfrm>
           <a:prstGeom prst="roundRect">
             <a:avLst/>
@@ -8560,7 +8840,7 @@
           </a:fontRef>
         </p:style>
         <p:txBody>
-          <a:bodyPr rtlCol="0" anchor="ctr" wrap="square" lIns="20000" rIns="20000" tIns="5000" bIns="5000"/>
+          <a:bodyPr rtlCol="0" anchor="ctr" wrap="square" lIns="20000" rIns="20000" tIns="4000" bIns="4000"/>
           <a:lstStyle/>
           <a:p>
             <a:pPr algn="ctr"/>
@@ -8578,14 +8858,14 @@
       </p:sp>
       <p:sp>
         <p:nvSpPr>
-          <p:cNvPr id="128" name="Rounded Rectangle 127"/>
+          <p:cNvPr id="136" name="Rounded Rectangle 135"/>
           <p:cNvSpPr/>
           <p:nvPr/>
         </p:nvSpPr>
         <p:spPr>
           <a:xfrm>
-            <a:off x="6492240" y="6894829"/>
-            <a:ext cx="3474720" cy="251460"/>
+            <a:off x="5760720" y="6835139"/>
+            <a:ext cx="3246120" cy="251460"/>
           </a:xfrm>
           <a:prstGeom prst="roundRect">
             <a:avLst/>
@@ -8615,7 +8895,7 @@
           </a:fontRef>
         </p:style>
         <p:txBody>
-          <a:bodyPr rtlCol="0" anchor="ctr" wrap="square" lIns="20000" rIns="20000" tIns="5000" bIns="5000"/>
+          <a:bodyPr rtlCol="0" anchor="ctr" wrap="square" lIns="20000" rIns="20000" tIns="4000" bIns="4000"/>
           <a:lstStyle/>
           <a:p>
             <a:pPr algn="ctr"/>
@@ -8633,14 +8913,14 @@
       </p:sp>
       <p:sp>
         <p:nvSpPr>
-          <p:cNvPr id="129" name="Rounded Rectangle 128"/>
+          <p:cNvPr id="137" name="Rounded Rectangle 136"/>
           <p:cNvSpPr/>
           <p:nvPr/>
         </p:nvSpPr>
         <p:spPr>
           <a:xfrm>
-            <a:off x="6492240" y="7179309"/>
-            <a:ext cx="3474720" cy="251460"/>
+            <a:off x="5760720" y="7128803"/>
+            <a:ext cx="3246120" cy="251460"/>
           </a:xfrm>
           <a:prstGeom prst="roundRect">
             <a:avLst/>
@@ -8670,7 +8950,7 @@
           </a:fontRef>
         </p:style>
         <p:txBody>
-          <a:bodyPr rtlCol="0" anchor="ctr" wrap="square" lIns="20000" rIns="20000" tIns="5000" bIns="5000"/>
+          <a:bodyPr rtlCol="0" anchor="ctr" wrap="square" lIns="20000" rIns="20000" tIns="4000" bIns="4000"/>
           <a:lstStyle/>
           <a:p>
             <a:pPr algn="ctr"/>
@@ -8688,14 +8968,14 @@
       </p:sp>
       <p:sp>
         <p:nvSpPr>
-          <p:cNvPr id="130" name="Rounded Rectangle 129"/>
+          <p:cNvPr id="138" name="Rounded Rectangle 137"/>
           <p:cNvSpPr/>
           <p:nvPr/>
         </p:nvSpPr>
         <p:spPr>
           <a:xfrm>
-            <a:off x="6492240" y="7463790"/>
-            <a:ext cx="3474720" cy="251460"/>
+            <a:off x="5760720" y="7422466"/>
+            <a:ext cx="3246120" cy="251460"/>
           </a:xfrm>
           <a:prstGeom prst="roundRect">
             <a:avLst/>
@@ -8725,7 +9005,7 @@
           </a:fontRef>
         </p:style>
         <p:txBody>
-          <a:bodyPr rtlCol="0" anchor="ctr" wrap="square" lIns="20000" rIns="20000" tIns="5000" bIns="5000"/>
+          <a:bodyPr rtlCol="0" anchor="ctr" wrap="square" lIns="20000" rIns="20000" tIns="4000" bIns="4000"/>
           <a:lstStyle/>
           <a:p>
             <a:pPr algn="ctr"/>
@@ -8743,14 +9023,14 @@
       </p:sp>
       <p:sp>
         <p:nvSpPr>
-          <p:cNvPr id="131" name="Rounded Rectangle 130"/>
+          <p:cNvPr id="139" name="Rounded Rectangle 138"/>
           <p:cNvSpPr/>
           <p:nvPr/>
         </p:nvSpPr>
         <p:spPr>
           <a:xfrm>
-            <a:off x="6492240" y="7748270"/>
-            <a:ext cx="3474720" cy="251460"/>
+            <a:off x="5760720" y="7716129"/>
+            <a:ext cx="3246120" cy="251460"/>
           </a:xfrm>
           <a:prstGeom prst="roundRect">
             <a:avLst/>
@@ -8780,7 +9060,7 @@
           </a:fontRef>
         </p:style>
         <p:txBody>
-          <a:bodyPr rtlCol="0" anchor="ctr" wrap="square" lIns="20000" rIns="20000" tIns="5000" bIns="5000"/>
+          <a:bodyPr rtlCol="0" anchor="ctr" wrap="square" lIns="20000" rIns="20000" tIns="4000" bIns="4000"/>
           <a:lstStyle/>
           <a:p>
             <a:pPr algn="ctr"/>
@@ -8798,14 +9078,14 @@
       </p:sp>
       <p:sp>
         <p:nvSpPr>
-          <p:cNvPr id="132" name="Rounded Rectangle 131"/>
+          <p:cNvPr id="140" name="Rounded Rectangle 139"/>
           <p:cNvSpPr/>
           <p:nvPr/>
         </p:nvSpPr>
         <p:spPr>
           <a:xfrm>
-            <a:off x="6492240" y="8032749"/>
-            <a:ext cx="3474720" cy="251460"/>
+            <a:off x="5760720" y="8009792"/>
+            <a:ext cx="3246120" cy="251460"/>
           </a:xfrm>
           <a:prstGeom prst="roundRect">
             <a:avLst/>
@@ -8835,7 +9115,7 @@
           </a:fontRef>
         </p:style>
         <p:txBody>
-          <a:bodyPr rtlCol="0" anchor="ctr" wrap="square" lIns="20000" rIns="20000" tIns="5000" bIns="5000"/>
+          <a:bodyPr rtlCol="0" anchor="ctr" wrap="square" lIns="20000" rIns="20000" tIns="4000" bIns="4000"/>
           <a:lstStyle/>
           <a:p>
             <a:pPr algn="ctr"/>
@@ -8853,14 +9133,14 @@
       </p:sp>
       <p:sp>
         <p:nvSpPr>
-          <p:cNvPr id="133" name="Rounded Rectangle 132"/>
+          <p:cNvPr id="141" name="Rounded Rectangle 140"/>
           <p:cNvSpPr/>
           <p:nvPr/>
         </p:nvSpPr>
         <p:spPr>
           <a:xfrm>
-            <a:off x="6492240" y="8317230"/>
-            <a:ext cx="3474720" cy="251460"/>
+            <a:off x="5760720" y="8303455"/>
+            <a:ext cx="3246120" cy="251460"/>
           </a:xfrm>
           <a:prstGeom prst="roundRect">
             <a:avLst/>
@@ -8890,7 +9170,7 @@
           </a:fontRef>
         </p:style>
         <p:txBody>
-          <a:bodyPr rtlCol="0" anchor="ctr" wrap="square" lIns="20000" rIns="20000" tIns="5000" bIns="5000"/>
+          <a:bodyPr rtlCol="0" anchor="ctr" wrap="square" lIns="20000" rIns="20000" tIns="4000" bIns="4000"/>
           <a:lstStyle/>
           <a:p>
             <a:pPr algn="ctr"/>
@@ -8908,14 +9188,14 @@
       </p:sp>
       <p:sp>
         <p:nvSpPr>
-          <p:cNvPr id="134" name="Rounded Rectangle 133"/>
+          <p:cNvPr id="142" name="Rounded Rectangle 141"/>
           <p:cNvSpPr/>
           <p:nvPr/>
         </p:nvSpPr>
         <p:spPr>
           <a:xfrm>
-            <a:off x="6492240" y="8601710"/>
-            <a:ext cx="3474720" cy="251460"/>
+            <a:off x="5760720" y="8597118"/>
+            <a:ext cx="3246120" cy="251460"/>
           </a:xfrm>
           <a:prstGeom prst="roundRect">
             <a:avLst/>
@@ -8945,7 +9225,7 @@
           </a:fontRef>
         </p:style>
         <p:txBody>
-          <a:bodyPr rtlCol="0" anchor="ctr" wrap="square" lIns="20000" rIns="20000" tIns="5000" bIns="5000"/>
+          <a:bodyPr rtlCol="0" anchor="ctr" wrap="square" lIns="20000" rIns="20000" tIns="4000" bIns="4000"/>
           <a:lstStyle/>
           <a:p>
             <a:pPr algn="ctr"/>
@@ -8963,14 +9243,14 @@
       </p:sp>
       <p:sp>
         <p:nvSpPr>
-          <p:cNvPr id="135" name="Rounded Rectangle 134"/>
+          <p:cNvPr id="143" name="Rounded Rectangle 142"/>
           <p:cNvSpPr/>
           <p:nvPr/>
         </p:nvSpPr>
         <p:spPr>
           <a:xfrm>
-            <a:off x="10332720" y="1288900"/>
-            <a:ext cx="4023360" cy="251460"/>
+            <a:off x="9372600" y="1363218"/>
+            <a:ext cx="3291840" cy="251460"/>
           </a:xfrm>
           <a:prstGeom prst="roundRect">
             <a:avLst/>
@@ -9000,7 +9280,7 @@
           </a:fontRef>
         </p:style>
         <p:txBody>
-          <a:bodyPr rtlCol="0" anchor="ctr" wrap="square" lIns="20000" rIns="20000" tIns="5000" bIns="5000"/>
+          <a:bodyPr rtlCol="0" anchor="ctr" wrap="square" lIns="20000" rIns="20000" tIns="4000" bIns="4000"/>
           <a:lstStyle/>
           <a:p>
             <a:pPr algn="ctr"/>
@@ -9018,14 +9298,14 @@
       </p:sp>
       <p:sp>
         <p:nvSpPr>
-          <p:cNvPr id="136" name="Rounded Rectangle 135"/>
+          <p:cNvPr id="144" name="Rounded Rectangle 143"/>
           <p:cNvSpPr/>
           <p:nvPr/>
         </p:nvSpPr>
         <p:spPr>
           <a:xfrm>
-            <a:off x="10332720" y="1740721"/>
-            <a:ext cx="4023360" cy="251460"/>
+            <a:off x="9372600" y="1872234"/>
+            <a:ext cx="3291840" cy="251460"/>
           </a:xfrm>
           <a:prstGeom prst="roundRect">
             <a:avLst/>
@@ -9055,7 +9335,7 @@
           </a:fontRef>
         </p:style>
         <p:txBody>
-          <a:bodyPr rtlCol="0" anchor="ctr" wrap="square" lIns="20000" rIns="20000" tIns="5000" bIns="5000"/>
+          <a:bodyPr rtlCol="0" anchor="ctr" wrap="square" lIns="20000" rIns="20000" tIns="4000" bIns="4000"/>
           <a:lstStyle/>
           <a:p>
             <a:pPr algn="ctr"/>
@@ -9073,14 +9353,14 @@
       </p:sp>
       <p:sp>
         <p:nvSpPr>
-          <p:cNvPr id="137" name="Rounded Rectangle 136"/>
+          <p:cNvPr id="145" name="Rounded Rectangle 144"/>
           <p:cNvSpPr/>
           <p:nvPr/>
         </p:nvSpPr>
         <p:spPr>
           <a:xfrm>
-            <a:off x="10332720" y="2192542"/>
-            <a:ext cx="4023360" cy="251460"/>
+            <a:off x="9372600" y="2381250"/>
+            <a:ext cx="3291840" cy="251460"/>
           </a:xfrm>
           <a:prstGeom prst="roundRect">
             <a:avLst/>
@@ -9110,7 +9390,7 @@
           </a:fontRef>
         </p:style>
         <p:txBody>
-          <a:bodyPr rtlCol="0" anchor="ctr" wrap="square" lIns="20000" rIns="20000" tIns="5000" bIns="5000"/>
+          <a:bodyPr rtlCol="0" anchor="ctr" wrap="square" lIns="20000" rIns="20000" tIns="4000" bIns="4000"/>
           <a:lstStyle/>
           <a:p>
             <a:pPr algn="ctr"/>
@@ -9128,14 +9408,14 @@
       </p:sp>
       <p:sp>
         <p:nvSpPr>
-          <p:cNvPr id="138" name="Rounded Rectangle 137"/>
+          <p:cNvPr id="146" name="Rounded Rectangle 145"/>
           <p:cNvSpPr/>
           <p:nvPr/>
         </p:nvSpPr>
         <p:spPr>
           <a:xfrm>
-            <a:off x="10332720" y="2644364"/>
-            <a:ext cx="4023360" cy="251460"/>
+            <a:off x="9372600" y="2890266"/>
+            <a:ext cx="3291840" cy="251460"/>
           </a:xfrm>
           <a:prstGeom prst="roundRect">
             <a:avLst/>
@@ -9165,7 +9445,7 @@
           </a:fontRef>
         </p:style>
         <p:txBody>
-          <a:bodyPr rtlCol="0" anchor="ctr" wrap="square" lIns="20000" rIns="20000" tIns="5000" bIns="5000"/>
+          <a:bodyPr rtlCol="0" anchor="ctr" wrap="square" lIns="20000" rIns="20000" tIns="4000" bIns="4000"/>
           <a:lstStyle/>
           <a:p>
             <a:pPr algn="ctr"/>
@@ -9183,14 +9463,14 @@
       </p:sp>
       <p:sp>
         <p:nvSpPr>
-          <p:cNvPr id="139" name="Rounded Rectangle 138"/>
+          <p:cNvPr id="147" name="Rounded Rectangle 146"/>
           <p:cNvSpPr/>
           <p:nvPr/>
         </p:nvSpPr>
         <p:spPr>
           <a:xfrm>
-            <a:off x="10332720" y="3096185"/>
-            <a:ext cx="4023360" cy="251460"/>
+            <a:off x="9372600" y="3399282"/>
+            <a:ext cx="3291840" cy="251460"/>
           </a:xfrm>
           <a:prstGeom prst="roundRect">
             <a:avLst/>
@@ -9220,7 +9500,7 @@
           </a:fontRef>
         </p:style>
         <p:txBody>
-          <a:bodyPr rtlCol="0" anchor="ctr" wrap="square" lIns="20000" rIns="20000" tIns="5000" bIns="5000"/>
+          <a:bodyPr rtlCol="0" anchor="ctr" wrap="square" lIns="20000" rIns="20000" tIns="4000" bIns="4000"/>
           <a:lstStyle/>
           <a:p>
             <a:pPr algn="ctr"/>
@@ -9238,14 +9518,14 @@
       </p:sp>
       <p:sp>
         <p:nvSpPr>
-          <p:cNvPr id="140" name="Rounded Rectangle 139"/>
+          <p:cNvPr id="148" name="Rounded Rectangle 147"/>
           <p:cNvSpPr/>
           <p:nvPr/>
         </p:nvSpPr>
         <p:spPr>
           <a:xfrm>
-            <a:off x="10332720" y="3548006"/>
-            <a:ext cx="4023360" cy="251460"/>
+            <a:off x="9372600" y="3908298"/>
+            <a:ext cx="3291840" cy="251460"/>
           </a:xfrm>
           <a:prstGeom prst="roundRect">
             <a:avLst/>
@@ -9275,7 +9555,7 @@
           </a:fontRef>
         </p:style>
         <p:txBody>
-          <a:bodyPr rtlCol="0" anchor="ctr" wrap="square" lIns="20000" rIns="20000" tIns="5000" bIns="5000"/>
+          <a:bodyPr rtlCol="0" anchor="ctr" wrap="square" lIns="20000" rIns="20000" tIns="4000" bIns="4000"/>
           <a:lstStyle/>
           <a:p>
             <a:pPr algn="ctr"/>
@@ -9293,14 +9573,14 @@
       </p:sp>
       <p:sp>
         <p:nvSpPr>
-          <p:cNvPr id="141" name="Rounded Rectangle 140"/>
+          <p:cNvPr id="149" name="Rounded Rectangle 148"/>
           <p:cNvSpPr/>
           <p:nvPr/>
         </p:nvSpPr>
         <p:spPr>
           <a:xfrm>
-            <a:off x="10332720" y="3999827"/>
-            <a:ext cx="4023360" cy="251460"/>
+            <a:off x="9372600" y="4417314"/>
+            <a:ext cx="3291840" cy="251460"/>
           </a:xfrm>
           <a:prstGeom prst="roundRect">
             <a:avLst/>
@@ -9330,7 +9610,7 @@
           </a:fontRef>
         </p:style>
         <p:txBody>
-          <a:bodyPr rtlCol="0" anchor="ctr" wrap="square" lIns="20000" rIns="20000" tIns="5000" bIns="5000"/>
+          <a:bodyPr rtlCol="0" anchor="ctr" wrap="square" lIns="20000" rIns="20000" tIns="4000" bIns="4000"/>
           <a:lstStyle/>
           <a:p>
             <a:pPr algn="ctr"/>
@@ -9348,14 +9628,14 @@
       </p:sp>
       <p:sp>
         <p:nvSpPr>
-          <p:cNvPr id="142" name="Rounded Rectangle 141"/>
+          <p:cNvPr id="150" name="Rounded Rectangle 149"/>
           <p:cNvSpPr/>
           <p:nvPr/>
         </p:nvSpPr>
         <p:spPr>
           <a:xfrm>
-            <a:off x="10332720" y="4451648"/>
-            <a:ext cx="4023360" cy="251460"/>
+            <a:off x="9372600" y="4926330"/>
+            <a:ext cx="3291840" cy="251460"/>
           </a:xfrm>
           <a:prstGeom prst="roundRect">
             <a:avLst/>
@@ -9385,7 +9665,7 @@
           </a:fontRef>
         </p:style>
         <p:txBody>
-          <a:bodyPr rtlCol="0" anchor="ctr" wrap="square" lIns="20000" rIns="20000" tIns="5000" bIns="5000"/>
+          <a:bodyPr rtlCol="0" anchor="ctr" wrap="square" lIns="20000" rIns="20000" tIns="4000" bIns="4000"/>
           <a:lstStyle/>
           <a:p>
             <a:pPr algn="ctr"/>
@@ -9403,14 +9683,14 @@
       </p:sp>
       <p:sp>
         <p:nvSpPr>
-          <p:cNvPr id="143" name="Rounded Rectangle 142"/>
+          <p:cNvPr id="151" name="Rounded Rectangle 150"/>
           <p:cNvSpPr/>
           <p:nvPr/>
         </p:nvSpPr>
         <p:spPr>
           <a:xfrm>
-            <a:off x="10332720" y="4903469"/>
-            <a:ext cx="4023360" cy="251460"/>
+            <a:off x="9372600" y="5435346"/>
+            <a:ext cx="3291840" cy="251460"/>
           </a:xfrm>
           <a:prstGeom prst="roundRect">
             <a:avLst/>
@@ -9440,7 +9720,7 @@
           </a:fontRef>
         </p:style>
         <p:txBody>
-          <a:bodyPr rtlCol="0" anchor="ctr" wrap="square" lIns="20000" rIns="20000" tIns="5000" bIns="5000"/>
+          <a:bodyPr rtlCol="0" anchor="ctr" wrap="square" lIns="20000" rIns="20000" tIns="4000" bIns="4000"/>
           <a:lstStyle/>
           <a:p>
             <a:pPr algn="ctr"/>
@@ -9458,14 +9738,14 @@
       </p:sp>
       <p:sp>
         <p:nvSpPr>
-          <p:cNvPr id="144" name="Rounded Rectangle 143"/>
+          <p:cNvPr id="152" name="Rounded Rectangle 151"/>
           <p:cNvSpPr/>
           <p:nvPr/>
         </p:nvSpPr>
         <p:spPr>
           <a:xfrm>
-            <a:off x="10332720" y="5355291"/>
-            <a:ext cx="4023360" cy="251460"/>
+            <a:off x="9372600" y="5944362"/>
+            <a:ext cx="3291840" cy="251460"/>
           </a:xfrm>
           <a:prstGeom prst="roundRect">
             <a:avLst/>
@@ -9495,62 +9775,7 @@
           </a:fontRef>
         </p:style>
         <p:txBody>
-          <a:bodyPr rtlCol="0" anchor="ctr" wrap="square" lIns="20000" rIns="20000" tIns="5000" bIns="5000"/>
-          <a:lstStyle/>
-          <a:p>
-            <a:pPr algn="ctr"/>
-            <a:r>
-              <a:rPr sz="850" b="1">
-                <a:solidFill>
-                  <a:srgbClr val="2B2A28"/>
-                </a:solidFill>
-                <a:latin typeface="Malgun Gothic"/>
-              </a:rPr>
-              <a:t>proxy_advise_before_meeting</a:t>
-            </a:r>
-          </a:p>
-        </p:txBody>
-      </p:sp>
-      <p:sp>
-        <p:nvSpPr>
-          <p:cNvPr id="145" name="Rounded Rectangle 144"/>
-          <p:cNvSpPr/>
-          <p:nvPr/>
-        </p:nvSpPr>
-        <p:spPr>
-          <a:xfrm>
-            <a:off x="10332720" y="5807112"/>
-            <a:ext cx="4023360" cy="251460"/>
-          </a:xfrm>
-          <a:prstGeom prst="roundRect">
-            <a:avLst/>
-          </a:prstGeom>
-          <a:solidFill>
-            <a:srgbClr val="F1E3CA"/>
-          </a:solidFill>
-          <a:ln w="12700">
-            <a:solidFill>
-              <a:srgbClr val="C09A5B"/>
-            </a:solidFill>
-          </a:ln>
-          <a:effectLst/>
-        </p:spPr>
-        <p:style>
-          <a:lnRef idx="1">
-            <a:schemeClr val="accent1"/>
-          </a:lnRef>
-          <a:fillRef idx="3">
-            <a:schemeClr val="accent1"/>
-          </a:fillRef>
-          <a:effectRef idx="2">
-            <a:schemeClr val="accent1"/>
-          </a:effectRef>
-          <a:fontRef idx="minor">
-            <a:schemeClr val="lt1"/>
-          </a:fontRef>
-        </p:style>
-        <p:txBody>
-          <a:bodyPr rtlCol="0" anchor="ctr" wrap="square" lIns="20000" rIns="20000" tIns="5000" bIns="5000"/>
+          <a:bodyPr rtlCol="0" anchor="ctr" wrap="square" lIns="20000" rIns="20000" tIns="4000" bIns="4000"/>
           <a:lstStyle/>
           <a:p>
             <a:pPr algn="ctr"/>
@@ -9568,14 +9793,14 @@
       </p:sp>
       <p:sp>
         <p:nvSpPr>
-          <p:cNvPr id="146" name="Rounded Rectangle 145"/>
+          <p:cNvPr id="153" name="Rounded Rectangle 152"/>
           <p:cNvSpPr/>
           <p:nvPr/>
         </p:nvSpPr>
         <p:spPr>
           <a:xfrm>
-            <a:off x="10332720" y="6258933"/>
-            <a:ext cx="4023360" cy="251460"/>
+            <a:off x="9372600" y="6453378"/>
+            <a:ext cx="3291840" cy="251460"/>
           </a:xfrm>
           <a:prstGeom prst="roundRect">
             <a:avLst/>
@@ -9605,7 +9830,7 @@
           </a:fontRef>
         </p:style>
         <p:txBody>
-          <a:bodyPr rtlCol="0" anchor="ctr" wrap="square" lIns="20000" rIns="20000" tIns="5000" bIns="5000"/>
+          <a:bodyPr rtlCol="0" anchor="ctr" wrap="square" lIns="20000" rIns="20000" tIns="4000" bIns="4000"/>
           <a:lstStyle/>
           <a:p>
             <a:pPr algn="ctr"/>
@@ -9623,14 +9848,14 @@
       </p:sp>
       <p:sp>
         <p:nvSpPr>
-          <p:cNvPr id="147" name="Rounded Rectangle 146"/>
+          <p:cNvPr id="154" name="Rounded Rectangle 153"/>
           <p:cNvSpPr/>
           <p:nvPr/>
         </p:nvSpPr>
         <p:spPr>
           <a:xfrm>
-            <a:off x="10332720" y="6710754"/>
-            <a:ext cx="4023360" cy="251460"/>
+            <a:off x="9372600" y="6962394"/>
+            <a:ext cx="3291840" cy="251460"/>
           </a:xfrm>
           <a:prstGeom prst="roundRect">
             <a:avLst/>
@@ -9660,7 +9885,7 @@
           </a:fontRef>
         </p:style>
         <p:txBody>
-          <a:bodyPr rtlCol="0" anchor="ctr" wrap="square" lIns="20000" rIns="20000" tIns="5000" bIns="5000"/>
+          <a:bodyPr rtlCol="0" anchor="ctr" wrap="square" lIns="20000" rIns="20000" tIns="4000" bIns="4000"/>
           <a:lstStyle/>
           <a:p>
             <a:pPr algn="ctr"/>
@@ -9678,14 +9903,14 @@
       </p:sp>
       <p:sp>
         <p:nvSpPr>
-          <p:cNvPr id="148" name="Rounded Rectangle 147"/>
+          <p:cNvPr id="155" name="Rounded Rectangle 154"/>
           <p:cNvSpPr/>
           <p:nvPr/>
         </p:nvSpPr>
         <p:spPr>
           <a:xfrm>
-            <a:off x="10332720" y="7162575"/>
-            <a:ext cx="4023360" cy="251460"/>
+            <a:off x="9372600" y="7471410"/>
+            <a:ext cx="3291840" cy="251460"/>
           </a:xfrm>
           <a:prstGeom prst="roundRect">
             <a:avLst/>
@@ -9715,7 +9940,7 @@
           </a:fontRef>
         </p:style>
         <p:txBody>
-          <a:bodyPr rtlCol="0" anchor="ctr" wrap="square" lIns="20000" rIns="20000" tIns="5000" bIns="5000"/>
+          <a:bodyPr rtlCol="0" anchor="ctr" wrap="square" lIns="20000" rIns="20000" tIns="4000" bIns="4000"/>
           <a:lstStyle/>
           <a:p>
             <a:pPr algn="ctr"/>
@@ -9733,14 +9958,14 @@
       </p:sp>
       <p:sp>
         <p:nvSpPr>
-          <p:cNvPr id="149" name="Rounded Rectangle 148"/>
+          <p:cNvPr id="156" name="Rounded Rectangle 155"/>
           <p:cNvSpPr/>
           <p:nvPr/>
         </p:nvSpPr>
         <p:spPr>
           <a:xfrm>
-            <a:off x="10332720" y="7614397"/>
-            <a:ext cx="4023360" cy="251460"/>
+            <a:off x="9372600" y="7980426"/>
+            <a:ext cx="3291840" cy="251460"/>
           </a:xfrm>
           <a:prstGeom prst="roundRect">
             <a:avLst/>
@@ -9770,62 +9995,7 @@
           </a:fontRef>
         </p:style>
         <p:txBody>
-          <a:bodyPr rtlCol="0" anchor="ctr" wrap="square" lIns="20000" rIns="20000" tIns="5000" bIns="5000"/>
-          <a:lstStyle/>
-          <a:p>
-            <a:pPr algn="ctr"/>
-            <a:r>
-              <a:rPr sz="850" b="1">
-                <a:solidFill>
-                  <a:srgbClr val="2B2A28"/>
-                </a:solidFill>
-                <a:latin typeface="Malgun Gothic"/>
-              </a:rPr>
-              <a:t>proxy_contest</a:t>
-            </a:r>
-          </a:p>
-        </p:txBody>
-      </p:sp>
-      <p:sp>
-        <p:nvSpPr>
-          <p:cNvPr id="150" name="Rounded Rectangle 149"/>
-          <p:cNvSpPr/>
-          <p:nvPr/>
-        </p:nvSpPr>
-        <p:spPr>
-          <a:xfrm>
-            <a:off x="10332720" y="8066218"/>
-            <a:ext cx="4023360" cy="251460"/>
-          </a:xfrm>
-          <a:prstGeom prst="roundRect">
-            <a:avLst/>
-          </a:prstGeom>
-          <a:solidFill>
-            <a:srgbClr val="F1E3CA"/>
-          </a:solidFill>
-          <a:ln w="12700">
-            <a:solidFill>
-              <a:srgbClr val="C09A5B"/>
-            </a:solidFill>
-          </a:ln>
-          <a:effectLst/>
-        </p:spPr>
-        <p:style>
-          <a:lnRef idx="1">
-            <a:schemeClr val="accent1"/>
-          </a:lnRef>
-          <a:fillRef idx="3">
-            <a:schemeClr val="accent1"/>
-          </a:fillRef>
-          <a:effectRef idx="2">
-            <a:schemeClr val="accent1"/>
-          </a:effectRef>
-          <a:fontRef idx="minor">
-            <a:schemeClr val="lt1"/>
-          </a:fontRef>
-        </p:style>
-        <p:txBody>
-          <a:bodyPr rtlCol="0" anchor="ctr" wrap="square" lIns="20000" rIns="20000" tIns="5000" bIns="5000"/>
+          <a:bodyPr rtlCol="0" anchor="ctr" wrap="square" lIns="20000" rIns="20000" tIns="4000" bIns="4000"/>
           <a:lstStyle/>
           <a:p>
             <a:pPr algn="ctr"/>
@@ -9843,14 +10013,14 @@
       </p:sp>
       <p:sp>
         <p:nvSpPr>
-          <p:cNvPr id="151" name="Rounded Rectangle 150"/>
+          <p:cNvPr id="157" name="Rounded Rectangle 156"/>
           <p:cNvSpPr/>
           <p:nvPr/>
         </p:nvSpPr>
         <p:spPr>
           <a:xfrm>
-            <a:off x="10332720" y="8518039"/>
-            <a:ext cx="4023360" cy="251460"/>
+            <a:off x="9372600" y="8489442"/>
+            <a:ext cx="3291840" cy="251460"/>
           </a:xfrm>
           <a:prstGeom prst="roundRect">
             <a:avLst/>
@@ -9880,7 +10050,7 @@
           </a:fontRef>
         </p:style>
         <p:txBody>
-          <a:bodyPr rtlCol="0" anchor="ctr" wrap="square" lIns="20000" rIns="20000" tIns="5000" bIns="5000"/>
+          <a:bodyPr rtlCol="0" anchor="ctr" wrap="square" lIns="20000" rIns="20000" tIns="4000" bIns="4000"/>
           <a:lstStyle/>
           <a:p>
             <a:pPr algn="ctr"/>
@@ -9892,6 +10062,243 @@
                 <a:latin typeface="Malgun Gothic"/>
               </a:rPr>
               <a:t>evidence</a:t>
+            </a:r>
+          </a:p>
+        </p:txBody>
+      </p:sp>
+      <p:sp>
+        <p:nvSpPr>
+          <p:cNvPr id="158" name="Rounded Rectangle 157"/>
+          <p:cNvSpPr/>
+          <p:nvPr/>
+        </p:nvSpPr>
+        <p:spPr>
+          <a:xfrm>
+            <a:off x="13121640" y="1353312"/>
+            <a:ext cx="4069080" cy="502920"/>
+          </a:xfrm>
+          <a:prstGeom prst="roundRect">
+            <a:avLst/>
+          </a:prstGeom>
+          <a:solidFill>
+            <a:srgbClr val="F1E3CA"/>
+          </a:solidFill>
+          <a:ln w="12700">
+            <a:solidFill>
+              <a:srgbClr val="C09A5B"/>
+            </a:solidFill>
+          </a:ln>
+          <a:effectLst/>
+        </p:spPr>
+        <p:style>
+          <a:lnRef idx="1">
+            <a:schemeClr val="accent1"/>
+          </a:lnRef>
+          <a:fillRef idx="3">
+            <a:schemeClr val="accent1"/>
+          </a:fillRef>
+          <a:effectRef idx="2">
+            <a:schemeClr val="accent1"/>
+          </a:effectRef>
+          <a:fontRef idx="minor">
+            <a:schemeClr val="lt1"/>
+          </a:fontRef>
+        </p:style>
+        <p:txBody>
+          <a:bodyPr rtlCol="0" anchor="ctr" wrap="square" lIns="20000" rIns="20000" tIns="4000" bIns="4000"/>
+          <a:lstStyle/>
+          <a:p>
+            <a:pPr algn="ctr"/>
+            <a:r>
+              <a:rPr sz="850" b="1">
+                <a:solidFill>
+                  <a:srgbClr val="2B2A28"/>
+                </a:solidFill>
+                <a:latin typeface="Malgun Gothic"/>
+              </a:rPr>
+              <a:t>상법 법령 레이어</a:t>
+            </a:r>
+          </a:p>
+          <a:p>
+            <a:pPr algn="ctr"/>
+            <a:r>
+              <a:rPr sz="850" b="0">
+                <a:solidFill>
+                  <a:srgbClr val="2B2A28"/>
+                </a:solidFill>
+                <a:latin typeface="Malgun Gothic"/>
+              </a:rPr>
+              <a:t>(wiki/rules/laws)</a:t>
+            </a:r>
+          </a:p>
+        </p:txBody>
+      </p:sp>
+      <p:sp>
+        <p:nvSpPr>
+          <p:cNvPr id="159" name="Rounded Rectangle 158"/>
+          <p:cNvSpPr/>
+          <p:nvPr/>
+        </p:nvSpPr>
+        <p:spPr>
+          <a:xfrm>
+            <a:off x="13121640" y="3429000"/>
+            <a:ext cx="4069080" cy="1005840"/>
+          </a:xfrm>
+          <a:prstGeom prst="roundRect">
+            <a:avLst/>
+          </a:prstGeom>
+          <a:solidFill>
+            <a:srgbClr val="EFC9B8"/>
+          </a:solidFill>
+          <a:ln w="25400">
+            <a:solidFill>
+              <a:srgbClr val="CC785C"/>
+            </a:solidFill>
+          </a:ln>
+          <a:effectLst/>
+        </p:spPr>
+        <p:style>
+          <a:lnRef idx="1">
+            <a:schemeClr val="accent1"/>
+          </a:lnRef>
+          <a:fillRef idx="3">
+            <a:schemeClr val="accent1"/>
+          </a:fillRef>
+          <a:effectRef idx="2">
+            <a:schemeClr val="accent1"/>
+          </a:effectRef>
+          <a:fontRef idx="minor">
+            <a:schemeClr val="lt1"/>
+          </a:fontRef>
+        </p:style>
+        <p:txBody>
+          <a:bodyPr rtlCol="0" anchor="ctr" wrap="square" lIns="20000" rIns="20000" tIns="4000" bIns="4000"/>
+          <a:lstStyle/>
+          <a:p>
+            <a:pPr algn="ctr"/>
+            <a:r>
+              <a:rPr sz="950" b="1">
+                <a:solidFill>
+                  <a:srgbClr val="2B2A28"/>
+                </a:solidFill>
+                <a:latin typeface="Malgun Gothic"/>
+              </a:rPr>
+              <a:t>proxy_advise_before_meeting</a:t>
+            </a:r>
+          </a:p>
+          <a:p>
+            <a:pPr algn="ctr"/>
+            <a:r>
+              <a:rPr sz="800" b="0">
+                <a:solidFill>
+                  <a:srgbClr val="2B2A28"/>
+                </a:solidFill>
+                <a:latin typeface="Malgun Gothic"/>
+              </a:rPr>
+              <a:t>★ TOOL OF TOOLS ★</a:t>
+            </a:r>
+          </a:p>
+          <a:p>
+            <a:pPr algn="ctr"/>
+            <a:r>
+              <a:rPr sz="800" b="0">
+                <a:solidFill>
+                  <a:srgbClr val="2B2A28"/>
+                </a:solidFill>
+                <a:latin typeface="Malgun Gothic"/>
+              </a:rPr>
+              <a:t>내부: director_evaluation</a:t>
+            </a:r>
+          </a:p>
+          <a:p>
+            <a:pPr algn="ctr"/>
+            <a:r>
+              <a:rPr sz="800" b="0">
+                <a:solidFill>
+                  <a:srgbClr val="2B2A28"/>
+                </a:solidFill>
+                <a:latin typeface="Malgun Gothic"/>
+              </a:rPr>
+              <a:t>→ 안건별 의결권 권고</a:t>
+            </a:r>
+          </a:p>
+        </p:txBody>
+      </p:sp>
+      <p:sp>
+        <p:nvSpPr>
+          <p:cNvPr id="160" name="Rounded Rectangle 159"/>
+          <p:cNvSpPr/>
+          <p:nvPr/>
+        </p:nvSpPr>
+        <p:spPr>
+          <a:xfrm>
+            <a:off x="13121640" y="6172200"/>
+            <a:ext cx="4069080" cy="868680"/>
+          </a:xfrm>
+          <a:prstGeom prst="roundRect">
+            <a:avLst/>
+          </a:prstGeom>
+          <a:solidFill>
+            <a:srgbClr val="EFC9B8"/>
+          </a:solidFill>
+          <a:ln w="25400">
+            <a:solidFill>
+              <a:srgbClr val="CC785C"/>
+            </a:solidFill>
+          </a:ln>
+          <a:effectLst/>
+        </p:spPr>
+        <p:style>
+          <a:lnRef idx="1">
+            <a:schemeClr val="accent1"/>
+          </a:lnRef>
+          <a:fillRef idx="3">
+            <a:schemeClr val="accent1"/>
+          </a:fillRef>
+          <a:effectRef idx="2">
+            <a:schemeClr val="accent1"/>
+          </a:effectRef>
+          <a:fontRef idx="minor">
+            <a:schemeClr val="lt1"/>
+          </a:fontRef>
+        </p:style>
+        <p:txBody>
+          <a:bodyPr rtlCol="0" anchor="ctr" wrap="square" lIns="20000" rIns="20000" tIns="4000" bIns="4000"/>
+          <a:lstStyle/>
+          <a:p>
+            <a:pPr algn="ctr"/>
+            <a:r>
+              <a:rPr sz="950" b="1">
+                <a:solidFill>
+                  <a:srgbClr val="2B2A28"/>
+                </a:solidFill>
+                <a:latin typeface="Malgun Gothic"/>
+              </a:rPr>
+              <a:t>proxy_contest</a:t>
+            </a:r>
+          </a:p>
+          <a:p>
+            <a:pPr algn="ctr"/>
+            <a:r>
+              <a:rPr sz="800" b="0">
+                <a:solidFill>
+                  <a:srgbClr val="2B2A28"/>
+                </a:solidFill>
+                <a:latin typeface="Malgun Gothic"/>
+              </a:rPr>
+              <a:t>→ 경영권 분쟁 신호</a:t>
+            </a:r>
+          </a:p>
+          <a:p>
+            <a:pPr algn="ctr"/>
+            <a:r>
+              <a:rPr sz="800" b="0">
+                <a:solidFill>
+                  <a:srgbClr val="2B2A28"/>
+                </a:solidFill>
+                <a:latin typeface="Malgun Gothic"/>
+              </a:rPr>
+              <a:t>(+ 소송·위임장·공개매수·5% 공시 직접조회)</a:t>
             </a:r>
           </a:p>
         </p:txBody>

--- a/wiki/tools/diagrams/tool_disclosure_map.pptx
+++ b/wiki/tools/diagrams/tool_disclosure_map.pptx
@@ -8356,7 +8356,7 @@
                 </a:solidFill>
                 <a:latin typeface="Malgun Gothic"/>
               </a:rPr>
-              <a:t>사유·영향(도산·정지)</a:t>
+              <a:t>발생사실·금액·법원(도산·정지)</a:t>
             </a:r>
           </a:p>
         </p:txBody>
@@ -8411,7 +8411,7 @@
                 </a:solidFill>
                 <a:latin typeface="Malgun Gothic"/>
               </a:rPr>
-              <a:t>안건·이사후보·보수한도</a:t>
+              <a:t>안건·이사후보·보수한도·정관변경</a:t>
             </a:r>
           </a:p>
         </p:txBody>
@@ -8741,7 +8741,7 @@
                 </a:solidFill>
                 <a:latin typeface="Malgun Gothic"/>
               </a:rPr>
-              <a:t>commitment·이행</a:t>
+              <a:t>약속문장·이행현황</a:t>
             </a:r>
           </a:p>
         </p:txBody>
@@ -9126,7 +9126,7 @@
                 </a:solidFill>
                 <a:latin typeface="Malgun Gothic"/>
               </a:rPr>
-              <a:t>공개매수 조건</a:t>
+              <a:t>공개매수 신고내역</a:t>
             </a:r>
           </a:p>
         </p:txBody>

--- a/wiki/tools/diagrams/tool_disclosure_map.pptx
+++ b/wiki/tools/diagrams/tool_disclosure_map.pptx
@@ -3104,8 +3104,8 @@
         </p:nvSpPr>
         <p:spPr>
           <a:xfrm>
-            <a:off x="274320" y="146304"/>
-            <a:ext cx="16459200" cy="548640"/>
+            <a:off x="274320" y="91440"/>
+            <a:ext cx="16459200" cy="457200"/>
           </a:xfrm>
           <a:prstGeom prst="rect">
             <a:avLst/>
@@ -3126,7 +3126,7 @@
                 </a:solidFill>
                 <a:latin typeface="Malgun Gothic"/>
               </a:rPr>
-              <a:t>OpenProxy MCP — 공시 → 데이터 → Tool → 종합 Tool 매핑</a:t>
+              <a:t>OpenProxy MCP — 공시 → 데이터 → 도구 → 종합 도구 매핑</a:t>
             </a:r>
           </a:p>
         </p:txBody>
@@ -3139,8 +3139,8 @@
         </p:nvSpPr>
         <p:spPr>
           <a:xfrm>
-            <a:off x="274320" y="713232"/>
-            <a:ext cx="1600200" cy="411480"/>
+            <a:off x="274320" y="548640"/>
+            <a:ext cx="16824960" cy="457200"/>
           </a:xfrm>
           <a:prstGeom prst="rect">
             <a:avLst/>
@@ -3153,6 +3153,41 @@
           </a:bodyPr>
           <a:lstStyle/>
           <a:p>
+            <a:pPr algn="l"/>
+            <a:r>
+              <a:rPr sz="1250" b="0">
+                <a:solidFill>
+                  <a:srgbClr val="6B6256"/>
+                </a:solidFill>
+                <a:latin typeface="Malgun Gothic"/>
+              </a:rPr>
+              <a:t>AI(Claude)가 호출하는 17개 분석 도구: 어떤 공시(①②)를 읽어 → 무슨 데이터(③)를 뽑고 → 어떤 도구(④)가 무엇을 답하는지. ⑤는 다른 도구를 모아 종합 판단하는 도구.</a:t>
+            </a:r>
+          </a:p>
+        </p:txBody>
+      </p:sp>
+      <p:sp>
+        <p:nvSpPr>
+          <p:cNvPr id="4" name="TextBox 3"/>
+          <p:cNvSpPr txBox="1"/>
+          <p:nvPr/>
+        </p:nvSpPr>
+        <p:spPr>
+          <a:xfrm>
+            <a:off x="274320" y="987552"/>
+            <a:ext cx="1600200" cy="384048"/>
+          </a:xfrm>
+          <a:prstGeom prst="rect">
+            <a:avLst/>
+          </a:prstGeom>
+          <a:noFill/>
+        </p:spPr>
+        <p:txBody>
+          <a:bodyPr wrap="square">
+            <a:spAutoFit/>
+          </a:bodyPr>
+          <a:lstStyle/>
+          <a:p>
             <a:pPr algn="ctr"/>
             <a:r>
               <a:rPr sz="1400" b="1">
@@ -3168,14 +3203,14 @@
       </p:sp>
       <p:sp>
         <p:nvSpPr>
-          <p:cNvPr id="4" name="TextBox 3"/>
+          <p:cNvPr id="5" name="TextBox 4"/>
           <p:cNvSpPr txBox="1"/>
           <p:nvPr/>
         </p:nvSpPr>
         <p:spPr>
           <a:xfrm>
-            <a:off x="2011680" y="713232"/>
-            <a:ext cx="3520440" cy="411480"/>
+            <a:off x="2011680" y="987552"/>
+            <a:ext cx="3520440" cy="384048"/>
           </a:xfrm>
           <a:prstGeom prst="rect">
             <a:avLst/>
@@ -3203,14 +3238,14 @@
       </p:sp>
       <p:sp>
         <p:nvSpPr>
-          <p:cNvPr id="5" name="TextBox 4"/>
+          <p:cNvPr id="6" name="TextBox 5"/>
           <p:cNvSpPr txBox="1"/>
           <p:nvPr/>
         </p:nvSpPr>
         <p:spPr>
           <a:xfrm>
-            <a:off x="5760720" y="713232"/>
-            <a:ext cx="3246120" cy="411480"/>
+            <a:off x="5760720" y="987552"/>
+            <a:ext cx="3246120" cy="384048"/>
           </a:xfrm>
           <a:prstGeom prst="rect">
             <a:avLst/>
@@ -3238,14 +3273,14 @@
       </p:sp>
       <p:sp>
         <p:nvSpPr>
-          <p:cNvPr id="6" name="TextBox 5"/>
+          <p:cNvPr id="7" name="TextBox 6"/>
           <p:cNvSpPr txBox="1"/>
           <p:nvPr/>
         </p:nvSpPr>
         <p:spPr>
           <a:xfrm>
-            <a:off x="9372600" y="713232"/>
-            <a:ext cx="3291840" cy="411480"/>
+            <a:off x="9372600" y="987552"/>
+            <a:ext cx="3291840" cy="384048"/>
           </a:xfrm>
           <a:prstGeom prst="rect">
             <a:avLst/>
@@ -3273,14 +3308,14 @@
       </p:sp>
       <p:sp>
         <p:nvSpPr>
-          <p:cNvPr id="7" name="TextBox 6"/>
+          <p:cNvPr id="8" name="TextBox 7"/>
           <p:cNvSpPr txBox="1"/>
           <p:nvPr/>
         </p:nvSpPr>
         <p:spPr>
           <a:xfrm>
-            <a:off x="13121640" y="713232"/>
-            <a:ext cx="4069080" cy="411480"/>
+            <a:off x="13121640" y="987552"/>
+            <a:ext cx="4069080" cy="384048"/>
           </a:xfrm>
           <a:prstGeom prst="rect">
             <a:avLst/>
@@ -3306,43 +3341,6 @@
           </a:p>
         </p:txBody>
       </p:sp>
-      <p:cxnSp>
-        <p:nvCxnSpPr>
-          <p:cNvPr id="8" name="Connector 7"/>
-          <p:cNvCxnSpPr/>
-          <p:nvPr/>
-        </p:nvCxnSpPr>
-        <p:spPr>
-          <a:xfrm flipV="1">
-            <a:off x="1874519" y="1416231"/>
-            <a:ext cx="137161" cy="581733"/>
-          </a:xfrm>
-          <a:prstGeom prst="line">
-            <a:avLst/>
-          </a:prstGeom>
-          <a:ln w="9525">
-            <a:solidFill>
-              <a:srgbClr val="CC785C">
-                <a:alpha val="52000"/>
-              </a:srgbClr>
-            </a:solidFill>
-          </a:ln>
-        </p:spPr>
-        <p:style>
-          <a:lnRef idx="2">
-            <a:schemeClr val="accent1"/>
-          </a:lnRef>
-          <a:fillRef idx="0">
-            <a:schemeClr val="accent1"/>
-          </a:fillRef>
-          <a:effectRef idx="1">
-            <a:schemeClr val="accent1"/>
-          </a:effectRef>
-          <a:fontRef idx="minor">
-            <a:schemeClr val="tx1"/>
-          </a:fontRef>
-        </p:style>
-      </p:cxnSp>
       <p:cxnSp>
         <p:nvCxnSpPr>
           <p:cNvPr id="9" name="Connector 8"/>
@@ -3351,8 +3349,8 @@
         </p:nvCxnSpPr>
         <p:spPr>
           <a:xfrm flipV="1">
-            <a:off x="1874519" y="1779814"/>
-            <a:ext cx="137161" cy="1745198"/>
+            <a:off x="1874519" y="1594757"/>
+            <a:ext cx="137161" cy="567799"/>
           </a:xfrm>
           <a:prstGeom prst="line">
             <a:avLst/>
@@ -3388,8 +3386,8 @@
         </p:nvCxnSpPr>
         <p:spPr>
           <a:xfrm flipV="1">
-            <a:off x="1874519" y="2143397"/>
-            <a:ext cx="137161" cy="1381615"/>
+            <a:off x="1874519" y="1949631"/>
+            <a:ext cx="137161" cy="1703396"/>
           </a:xfrm>
           <a:prstGeom prst="line">
             <a:avLst/>
@@ -3425,8 +3423,8 @@
         </p:nvCxnSpPr>
         <p:spPr>
           <a:xfrm flipV="1">
-            <a:off x="1874519" y="2506980"/>
-            <a:ext cx="137161" cy="1018032"/>
+            <a:off x="1874519" y="2304505"/>
+            <a:ext cx="137161" cy="1348522"/>
           </a:xfrm>
           <a:prstGeom prst="line">
             <a:avLst/>
@@ -3462,8 +3460,8 @@
         </p:nvCxnSpPr>
         <p:spPr>
           <a:xfrm flipV="1">
-            <a:off x="1874519" y="2870562"/>
-            <a:ext cx="137161" cy="654450"/>
+            <a:off x="1874519" y="2659380"/>
+            <a:ext cx="137161" cy="993647"/>
           </a:xfrm>
           <a:prstGeom prst="line">
             <a:avLst/>
@@ -3499,8 +3497,8 @@
         </p:nvCxnSpPr>
         <p:spPr>
           <a:xfrm flipV="1">
-            <a:off x="1874519" y="3234145"/>
-            <a:ext cx="137161" cy="290867"/>
+            <a:off x="1874519" y="3014254"/>
+            <a:ext cx="137161" cy="638773"/>
           </a:xfrm>
           <a:prstGeom prst="line">
             <a:avLst/>
@@ -3536,8 +3534,8 @@
         </p:nvCxnSpPr>
         <p:spPr>
           <a:xfrm flipV="1">
-            <a:off x="1874519" y="3597728"/>
-            <a:ext cx="137161" cy="1454332"/>
+            <a:off x="1874519" y="3369128"/>
+            <a:ext cx="137161" cy="283899"/>
           </a:xfrm>
           <a:prstGeom prst="line">
             <a:avLst/>
@@ -3573,8 +3571,8 @@
         </p:nvCxnSpPr>
         <p:spPr>
           <a:xfrm flipV="1">
-            <a:off x="1874519" y="3961311"/>
-            <a:ext cx="137161" cy="1090749"/>
+            <a:off x="1874519" y="3724002"/>
+            <a:ext cx="137161" cy="1419497"/>
           </a:xfrm>
           <a:prstGeom prst="line">
             <a:avLst/>
@@ -3610,8 +3608,8 @@
         </p:nvCxnSpPr>
         <p:spPr>
           <a:xfrm flipV="1">
-            <a:off x="1874519" y="4324894"/>
-            <a:ext cx="137161" cy="727166"/>
+            <a:off x="1874519" y="4078877"/>
+            <a:ext cx="137161" cy="1064622"/>
           </a:xfrm>
           <a:prstGeom prst="line">
             <a:avLst/>
@@ -3647,8 +3645,8 @@
         </p:nvCxnSpPr>
         <p:spPr>
           <a:xfrm flipV="1">
-            <a:off x="1874519" y="4688477"/>
-            <a:ext cx="137161" cy="363583"/>
+            <a:off x="1874519" y="4433751"/>
+            <a:ext cx="137161" cy="709748"/>
           </a:xfrm>
           <a:prstGeom prst="line">
             <a:avLst/>
@@ -3683,9 +3681,9 @@
           <p:nvPr/>
         </p:nvCxnSpPr>
         <p:spPr>
-          <a:xfrm>
-            <a:off x="1874519" y="5052060"/>
-            <a:ext cx="137161" cy="0"/>
+          <a:xfrm flipV="1">
+            <a:off x="1874519" y="4788625"/>
+            <a:ext cx="137161" cy="354874"/>
           </a:xfrm>
           <a:prstGeom prst="line">
             <a:avLst/>
@@ -3721,8 +3719,8 @@
         </p:nvCxnSpPr>
         <p:spPr>
           <a:xfrm>
-            <a:off x="1874519" y="5052060"/>
-            <a:ext cx="137161" cy="363582"/>
+            <a:off x="1874519" y="5143499"/>
+            <a:ext cx="137161" cy="0"/>
           </a:xfrm>
           <a:prstGeom prst="line">
             <a:avLst/>
@@ -3758,8 +3756,8 @@
         </p:nvCxnSpPr>
         <p:spPr>
           <a:xfrm>
-            <a:off x="1874519" y="5052060"/>
-            <a:ext cx="137161" cy="727165"/>
+            <a:off x="1874519" y="5143499"/>
+            <a:ext cx="137161" cy="354875"/>
           </a:xfrm>
           <a:prstGeom prst="line">
             <a:avLst/>
@@ -3795,8 +3793,8 @@
         </p:nvCxnSpPr>
         <p:spPr>
           <a:xfrm>
-            <a:off x="1874519" y="5052060"/>
-            <a:ext cx="137161" cy="1090748"/>
+            <a:off x="1874519" y="5143499"/>
+            <a:ext cx="137161" cy="709749"/>
           </a:xfrm>
           <a:prstGeom prst="line">
             <a:avLst/>
@@ -3832,8 +3830,8 @@
         </p:nvCxnSpPr>
         <p:spPr>
           <a:xfrm>
-            <a:off x="1874519" y="5052060"/>
-            <a:ext cx="137161" cy="1454331"/>
+            <a:off x="1874519" y="5143499"/>
+            <a:ext cx="137161" cy="1064623"/>
           </a:xfrm>
           <a:prstGeom prst="line">
             <a:avLst/>
@@ -3869,8 +3867,8 @@
         </p:nvCxnSpPr>
         <p:spPr>
           <a:xfrm>
-            <a:off x="1874519" y="6579108"/>
-            <a:ext cx="137161" cy="290866"/>
+            <a:off x="1874519" y="5143499"/>
+            <a:ext cx="137161" cy="1419498"/>
           </a:xfrm>
           <a:prstGeom prst="line">
             <a:avLst/>
@@ -3906,8 +3904,8 @@
         </p:nvCxnSpPr>
         <p:spPr>
           <a:xfrm>
-            <a:off x="1874519" y="6579108"/>
-            <a:ext cx="137161" cy="654449"/>
+            <a:off x="1874519" y="6633971"/>
+            <a:ext cx="137161" cy="283900"/>
           </a:xfrm>
           <a:prstGeom prst="line">
             <a:avLst/>
@@ -3943,8 +3941,8 @@
         </p:nvCxnSpPr>
         <p:spPr>
           <a:xfrm>
-            <a:off x="1874519" y="6579108"/>
-            <a:ext cx="137161" cy="1018032"/>
+            <a:off x="1874519" y="6633971"/>
+            <a:ext cx="137161" cy="638774"/>
           </a:xfrm>
           <a:prstGeom prst="line">
             <a:avLst/>
@@ -3980,8 +3978,8 @@
         </p:nvCxnSpPr>
         <p:spPr>
           <a:xfrm>
-            <a:off x="1874519" y="6579108"/>
-            <a:ext cx="137161" cy="1381614"/>
+            <a:off x="1874519" y="6633971"/>
+            <a:ext cx="137161" cy="993648"/>
           </a:xfrm>
           <a:prstGeom prst="line">
             <a:avLst/>
@@ -4017,8 +4015,8 @@
         </p:nvCxnSpPr>
         <p:spPr>
           <a:xfrm>
-            <a:off x="1874519" y="8106155"/>
-            <a:ext cx="137161" cy="218150"/>
+            <a:off x="1874519" y="6633971"/>
+            <a:ext cx="137161" cy="1348523"/>
           </a:xfrm>
           <a:prstGeom prst="line">
             <a:avLst/>
@@ -4054,8 +4052,8 @@
         </p:nvCxnSpPr>
         <p:spPr>
           <a:xfrm>
-            <a:off x="1874519" y="8106155"/>
-            <a:ext cx="137161" cy="581733"/>
+            <a:off x="1874519" y="8124444"/>
+            <a:ext cx="137161" cy="212924"/>
           </a:xfrm>
           <a:prstGeom prst="line">
             <a:avLst/>
@@ -4090,16 +4088,16 @@
           <p:nvPr/>
         </p:nvCxnSpPr>
         <p:spPr>
-          <a:xfrm flipV="1">
-            <a:off x="5532120" y="1381271"/>
-            <a:ext cx="228600" cy="34960"/>
+          <a:xfrm>
+            <a:off x="1874519" y="8124444"/>
+            <a:ext cx="137161" cy="567798"/>
           </a:xfrm>
           <a:prstGeom prst="line">
             <a:avLst/>
           </a:prstGeom>
           <a:ln w="9525">
             <a:solidFill>
-              <a:srgbClr val="7C93A8">
+              <a:srgbClr val="CC785C">
                 <a:alpha val="52000"/>
               </a:srgbClr>
             </a:solidFill>
@@ -4127,9 +4125,9 @@
           <p:nvPr/>
         </p:nvCxnSpPr>
         <p:spPr>
-          <a:xfrm>
-            <a:off x="5532120" y="1416231"/>
-            <a:ext cx="228600" cy="258703"/>
+          <a:xfrm flipV="1">
+            <a:off x="5532120" y="1560634"/>
+            <a:ext cx="228600" cy="34123"/>
           </a:xfrm>
           <a:prstGeom prst="line">
             <a:avLst/>
@@ -4165,8 +4163,8 @@
         </p:nvCxnSpPr>
         <p:spPr>
           <a:xfrm>
-            <a:off x="5532120" y="1416231"/>
-            <a:ext cx="228600" cy="552366"/>
+            <a:off x="5532120" y="1594757"/>
+            <a:ext cx="228600" cy="252506"/>
           </a:xfrm>
           <a:prstGeom prst="line">
             <a:avLst/>
@@ -4202,8 +4200,8 @@
         </p:nvCxnSpPr>
         <p:spPr>
           <a:xfrm>
-            <a:off x="5532120" y="1416231"/>
-            <a:ext cx="228600" cy="846029"/>
+            <a:off x="5532120" y="1594757"/>
+            <a:ext cx="228600" cy="539136"/>
           </a:xfrm>
           <a:prstGeom prst="line">
             <a:avLst/>
@@ -4239,8 +4237,8 @@
         </p:nvCxnSpPr>
         <p:spPr>
           <a:xfrm>
-            <a:off x="5532120" y="1416231"/>
-            <a:ext cx="228600" cy="1139692"/>
+            <a:off x="5532120" y="1594757"/>
+            <a:ext cx="228600" cy="825765"/>
           </a:xfrm>
           <a:prstGeom prst="line">
             <a:avLst/>
@@ -4276,8 +4274,8 @@
         </p:nvCxnSpPr>
         <p:spPr>
           <a:xfrm>
-            <a:off x="5532120" y="1779814"/>
-            <a:ext cx="228600" cy="1069772"/>
+            <a:off x="5532120" y="1594757"/>
+            <a:ext cx="228600" cy="1112394"/>
           </a:xfrm>
           <a:prstGeom prst="line">
             <a:avLst/>
@@ -4313,8 +4311,8 @@
         </p:nvCxnSpPr>
         <p:spPr>
           <a:xfrm>
-            <a:off x="5532120" y="2143397"/>
-            <a:ext cx="228600" cy="999853"/>
+            <a:off x="5532120" y="1949631"/>
+            <a:ext cx="228600" cy="1044149"/>
           </a:xfrm>
           <a:prstGeom prst="line">
             <a:avLst/>
@@ -4350,8 +4348,8 @@
         </p:nvCxnSpPr>
         <p:spPr>
           <a:xfrm>
-            <a:off x="5532120" y="2506980"/>
-            <a:ext cx="228600" cy="929933"/>
+            <a:off x="5532120" y="2304505"/>
+            <a:ext cx="228600" cy="975904"/>
           </a:xfrm>
           <a:prstGeom prst="line">
             <a:avLst/>
@@ -4387,8 +4385,8 @@
         </p:nvCxnSpPr>
         <p:spPr>
           <a:xfrm>
-            <a:off x="5532120" y="2870562"/>
-            <a:ext cx="228600" cy="860014"/>
+            <a:off x="5532120" y="2659380"/>
+            <a:ext cx="228600" cy="907659"/>
           </a:xfrm>
           <a:prstGeom prst="line">
             <a:avLst/>
@@ -4424,8 +4422,8 @@
         </p:nvCxnSpPr>
         <p:spPr>
           <a:xfrm>
-            <a:off x="5532120" y="3234145"/>
-            <a:ext cx="228600" cy="790094"/>
+            <a:off x="5532120" y="3014254"/>
+            <a:ext cx="228600" cy="839414"/>
           </a:xfrm>
           <a:prstGeom prst="line">
             <a:avLst/>
@@ -4461,8 +4459,8 @@
         </p:nvCxnSpPr>
         <p:spPr>
           <a:xfrm>
-            <a:off x="5532120" y="3597728"/>
-            <a:ext cx="228600" cy="720174"/>
+            <a:off x="5532120" y="3369128"/>
+            <a:ext cx="228600" cy="771169"/>
           </a:xfrm>
           <a:prstGeom prst="line">
             <a:avLst/>
@@ -4498,8 +4496,8 @@
         </p:nvCxnSpPr>
         <p:spPr>
           <a:xfrm>
-            <a:off x="5532120" y="3961311"/>
-            <a:ext cx="228600" cy="650254"/>
+            <a:off x="5532120" y="3724002"/>
+            <a:ext cx="228600" cy="702924"/>
           </a:xfrm>
           <a:prstGeom prst="line">
             <a:avLst/>
@@ -4535,8 +4533,8 @@
         </p:nvCxnSpPr>
         <p:spPr>
           <a:xfrm>
-            <a:off x="5532120" y="4324894"/>
-            <a:ext cx="228600" cy="580334"/>
+            <a:off x="5532120" y="4078877"/>
+            <a:ext cx="228600" cy="634679"/>
           </a:xfrm>
           <a:prstGeom prst="line">
             <a:avLst/>
@@ -4572,8 +4570,8 @@
         </p:nvCxnSpPr>
         <p:spPr>
           <a:xfrm>
-            <a:off x="5532120" y="4688477"/>
-            <a:ext cx="228600" cy="510414"/>
+            <a:off x="5532120" y="4433751"/>
+            <a:ext cx="228600" cy="566434"/>
           </a:xfrm>
           <a:prstGeom prst="line">
             <a:avLst/>
@@ -4609,8 +4607,8 @@
         </p:nvCxnSpPr>
         <p:spPr>
           <a:xfrm>
-            <a:off x="5532120" y="5052060"/>
-            <a:ext cx="228600" cy="440494"/>
+            <a:off x="5532120" y="4788625"/>
+            <a:ext cx="228600" cy="498189"/>
           </a:xfrm>
           <a:prstGeom prst="line">
             <a:avLst/>
@@ -4646,8 +4644,8 @@
         </p:nvCxnSpPr>
         <p:spPr>
           <a:xfrm>
-            <a:off x="5532120" y="5415642"/>
-            <a:ext cx="228600" cy="370575"/>
+            <a:off x="5532120" y="5143499"/>
+            <a:ext cx="228600" cy="429944"/>
           </a:xfrm>
           <a:prstGeom prst="line">
             <a:avLst/>
@@ -4683,8 +4681,8 @@
         </p:nvCxnSpPr>
         <p:spPr>
           <a:xfrm>
-            <a:off x="5532120" y="5779225"/>
-            <a:ext cx="228600" cy="300655"/>
+            <a:off x="5532120" y="5498374"/>
+            <a:ext cx="228600" cy="361699"/>
           </a:xfrm>
           <a:prstGeom prst="line">
             <a:avLst/>
@@ -4720,8 +4718,8 @@
         </p:nvCxnSpPr>
         <p:spPr>
           <a:xfrm>
-            <a:off x="5532120" y="6142808"/>
-            <a:ext cx="228600" cy="230735"/>
+            <a:off x="5532120" y="5853248"/>
+            <a:ext cx="228600" cy="293454"/>
           </a:xfrm>
           <a:prstGeom prst="line">
             <a:avLst/>
@@ -4757,8 +4755,8 @@
         </p:nvCxnSpPr>
         <p:spPr>
           <a:xfrm>
-            <a:off x="5532120" y="6506391"/>
-            <a:ext cx="228600" cy="160815"/>
+            <a:off x="5532120" y="6208122"/>
+            <a:ext cx="228600" cy="225209"/>
           </a:xfrm>
           <a:prstGeom prst="line">
             <a:avLst/>
@@ -4794,8 +4792,8 @@
         </p:nvCxnSpPr>
         <p:spPr>
           <a:xfrm>
-            <a:off x="5532120" y="6869974"/>
-            <a:ext cx="228600" cy="90895"/>
+            <a:off x="5532120" y="6562997"/>
+            <a:ext cx="228600" cy="156963"/>
           </a:xfrm>
           <a:prstGeom prst="line">
             <a:avLst/>
@@ -4831,8 +4829,8 @@
         </p:nvCxnSpPr>
         <p:spPr>
           <a:xfrm>
-            <a:off x="5532120" y="6869974"/>
-            <a:ext cx="228600" cy="384559"/>
+            <a:off x="5532120" y="6917871"/>
+            <a:ext cx="228600" cy="88718"/>
           </a:xfrm>
           <a:prstGeom prst="line">
             <a:avLst/>
@@ -4868,8 +4866,8 @@
         </p:nvCxnSpPr>
         <p:spPr>
           <a:xfrm>
-            <a:off x="5532120" y="7233557"/>
-            <a:ext cx="228600" cy="314639"/>
+            <a:off x="5532120" y="6917871"/>
+            <a:ext cx="228600" cy="375348"/>
           </a:xfrm>
           <a:prstGeom prst="line">
             <a:avLst/>
@@ -4905,8 +4903,8 @@
         </p:nvCxnSpPr>
         <p:spPr>
           <a:xfrm>
-            <a:off x="5532120" y="7597140"/>
-            <a:ext cx="228600" cy="244719"/>
+            <a:off x="5532120" y="7272745"/>
+            <a:ext cx="228600" cy="307103"/>
           </a:xfrm>
           <a:prstGeom prst="line">
             <a:avLst/>
@@ -4942,8 +4940,8 @@
         </p:nvCxnSpPr>
         <p:spPr>
           <a:xfrm>
-            <a:off x="5532120" y="7960722"/>
-            <a:ext cx="228600" cy="174800"/>
+            <a:off x="5532120" y="7627619"/>
+            <a:ext cx="228600" cy="238858"/>
           </a:xfrm>
           <a:prstGeom prst="line">
             <a:avLst/>
@@ -4979,8 +4977,8 @@
         </p:nvCxnSpPr>
         <p:spPr>
           <a:xfrm>
-            <a:off x="5532120" y="8324305"/>
-            <a:ext cx="228600" cy="104880"/>
+            <a:off x="5532120" y="7982494"/>
+            <a:ext cx="228600" cy="170612"/>
           </a:xfrm>
           <a:prstGeom prst="line">
             <a:avLst/>
@@ -5016,8 +5014,8 @@
         </p:nvCxnSpPr>
         <p:spPr>
           <a:xfrm>
-            <a:off x="5532120" y="8687888"/>
-            <a:ext cx="228600" cy="34960"/>
+            <a:off x="5532120" y="8337368"/>
+            <a:ext cx="228600" cy="102368"/>
           </a:xfrm>
           <a:prstGeom prst="line">
             <a:avLst/>
@@ -5053,15 +5051,15 @@
         </p:nvCxnSpPr>
         <p:spPr>
           <a:xfrm>
-            <a:off x="9006840" y="1381271"/>
-            <a:ext cx="365760" cy="107677"/>
+            <a:off x="5532120" y="8692242"/>
+            <a:ext cx="228600" cy="34123"/>
           </a:xfrm>
           <a:prstGeom prst="line">
             <a:avLst/>
           </a:prstGeom>
           <a:ln w="9525">
             <a:solidFill>
-              <a:srgbClr val="8A9A6B">
+              <a:srgbClr val="7C93A8">
                 <a:alpha val="52000"/>
               </a:srgbClr>
             </a:solidFill>
@@ -5089,9 +5087,9 @@
           <p:nvPr/>
         </p:nvCxnSpPr>
         <p:spPr>
-          <a:xfrm flipV="1">
-            <a:off x="9006840" y="1488948"/>
-            <a:ext cx="365760" cy="185986"/>
+          <a:xfrm>
+            <a:off x="9006840" y="1560634"/>
+            <a:ext cx="365760" cy="105098"/>
           </a:xfrm>
           <a:prstGeom prst="line">
             <a:avLst/>
@@ -5126,9 +5124,9 @@
           <p:nvPr/>
         </p:nvCxnSpPr>
         <p:spPr>
-          <a:xfrm>
-            <a:off x="9006840" y="1968597"/>
-            <a:ext cx="365760" cy="29367"/>
+          <a:xfrm flipV="1">
+            <a:off x="9006840" y="1665732"/>
+            <a:ext cx="365760" cy="181531"/>
           </a:xfrm>
           <a:prstGeom prst="line">
             <a:avLst/>
@@ -5163,9 +5161,9 @@
           <p:nvPr/>
         </p:nvCxnSpPr>
         <p:spPr>
-          <a:xfrm flipV="1">
-            <a:off x="9006840" y="1997964"/>
-            <a:ext cx="365760" cy="3200927"/>
+          <a:xfrm>
+            <a:off x="9006840" y="2133893"/>
+            <a:ext cx="365760" cy="28663"/>
           </a:xfrm>
           <a:prstGeom prst="line">
             <a:avLst/>
@@ -5200,9 +5198,9 @@
           <p:nvPr/>
         </p:nvCxnSpPr>
         <p:spPr>
-          <a:xfrm>
-            <a:off x="9006840" y="2262260"/>
-            <a:ext cx="365760" cy="244720"/>
+          <a:xfrm flipV="1">
+            <a:off x="9006840" y="2162556"/>
+            <a:ext cx="365760" cy="3124258"/>
           </a:xfrm>
           <a:prstGeom prst="line">
             <a:avLst/>
@@ -5237,9 +5235,9 @@
           <p:nvPr/>
         </p:nvCxnSpPr>
         <p:spPr>
-          <a:xfrm flipV="1">
-            <a:off x="9006840" y="2506980"/>
-            <a:ext cx="365760" cy="48943"/>
+          <a:xfrm>
+            <a:off x="9006840" y="2420522"/>
+            <a:ext cx="365760" cy="238858"/>
           </a:xfrm>
           <a:prstGeom prst="line">
             <a:avLst/>
@@ -5275,8 +5273,8 @@
         </p:nvCxnSpPr>
         <p:spPr>
           <a:xfrm flipV="1">
-            <a:off x="9006840" y="2506980"/>
-            <a:ext cx="365760" cy="4453889"/>
+            <a:off x="9006840" y="2659380"/>
+            <a:ext cx="365760" cy="47771"/>
           </a:xfrm>
           <a:prstGeom prst="line">
             <a:avLst/>
@@ -5312,8 +5310,8 @@
         </p:nvCxnSpPr>
         <p:spPr>
           <a:xfrm flipV="1">
-            <a:off x="9006840" y="2506980"/>
-            <a:ext cx="365760" cy="5041216"/>
+            <a:off x="9006840" y="2659380"/>
+            <a:ext cx="365760" cy="4347209"/>
           </a:xfrm>
           <a:prstGeom prst="line">
             <a:avLst/>
@@ -5348,9 +5346,9 @@
           <p:nvPr/>
         </p:nvCxnSpPr>
         <p:spPr>
-          <a:xfrm>
-            <a:off x="9006840" y="2849586"/>
-            <a:ext cx="365760" cy="166410"/>
+          <a:xfrm flipV="1">
+            <a:off x="9006840" y="2659380"/>
+            <a:ext cx="365760" cy="4920468"/>
           </a:xfrm>
           <a:prstGeom prst="line">
             <a:avLst/>
@@ -5385,9 +5383,9 @@
           <p:nvPr/>
         </p:nvCxnSpPr>
         <p:spPr>
-          <a:xfrm flipV="1">
-            <a:off x="9006840" y="3015996"/>
-            <a:ext cx="365760" cy="1889232"/>
+          <a:xfrm>
+            <a:off x="9006840" y="2993780"/>
+            <a:ext cx="365760" cy="162423"/>
           </a:xfrm>
           <a:prstGeom prst="line">
             <a:avLst/>
@@ -5422,9 +5420,9 @@
           <p:nvPr/>
         </p:nvCxnSpPr>
         <p:spPr>
-          <a:xfrm>
-            <a:off x="9006840" y="3143250"/>
-            <a:ext cx="365760" cy="381762"/>
+          <a:xfrm flipV="1">
+            <a:off x="9006840" y="3156203"/>
+            <a:ext cx="365760" cy="1843982"/>
           </a:xfrm>
           <a:prstGeom prst="line">
             <a:avLst/>
@@ -5460,8 +5458,8 @@
         </p:nvCxnSpPr>
         <p:spPr>
           <a:xfrm>
-            <a:off x="9006840" y="3436913"/>
-            <a:ext cx="365760" cy="597115"/>
+            <a:off x="9006840" y="3280409"/>
+            <a:ext cx="365760" cy="372619"/>
           </a:xfrm>
           <a:prstGeom prst="line">
             <a:avLst/>
@@ -5497,8 +5495,8 @@
         </p:nvCxnSpPr>
         <p:spPr>
           <a:xfrm>
-            <a:off x="9006840" y="3730576"/>
-            <a:ext cx="365760" cy="812468"/>
+            <a:off x="9006840" y="3567039"/>
+            <a:ext cx="365760" cy="582812"/>
           </a:xfrm>
           <a:prstGeom prst="line">
             <a:avLst/>
@@ -5534,8 +5532,8 @@
         </p:nvCxnSpPr>
         <p:spPr>
           <a:xfrm>
-            <a:off x="9006840" y="4024239"/>
-            <a:ext cx="365760" cy="1027821"/>
+            <a:off x="9006840" y="3853668"/>
+            <a:ext cx="365760" cy="793007"/>
           </a:xfrm>
           <a:prstGeom prst="line">
             <a:avLst/>
@@ -5570,9 +5568,9 @@
           <p:nvPr/>
         </p:nvCxnSpPr>
         <p:spPr>
-          <a:xfrm flipV="1">
-            <a:off x="9006840" y="5052060"/>
-            <a:ext cx="365760" cy="1321483"/>
+          <a:xfrm>
+            <a:off x="9006840" y="4140297"/>
+            <a:ext cx="365760" cy="1003202"/>
           </a:xfrm>
           <a:prstGeom prst="line">
             <a:avLst/>
@@ -5607,9 +5605,9 @@
           <p:nvPr/>
         </p:nvCxnSpPr>
         <p:spPr>
-          <a:xfrm>
-            <a:off x="9006840" y="4317902"/>
-            <a:ext cx="365760" cy="1243174"/>
+          <a:xfrm flipV="1">
+            <a:off x="9006840" y="5143499"/>
+            <a:ext cx="365760" cy="1289832"/>
           </a:xfrm>
           <a:prstGeom prst="line">
             <a:avLst/>
@@ -5645,8 +5643,8 @@
         </p:nvCxnSpPr>
         <p:spPr>
           <a:xfrm>
-            <a:off x="9006840" y="4611565"/>
-            <a:ext cx="365760" cy="1458527"/>
+            <a:off x="9006840" y="4426926"/>
+            <a:ext cx="365760" cy="1213398"/>
           </a:xfrm>
           <a:prstGeom prst="line">
             <a:avLst/>
@@ -5682,8 +5680,8 @@
         </p:nvCxnSpPr>
         <p:spPr>
           <a:xfrm>
-            <a:off x="9006840" y="5492554"/>
-            <a:ext cx="365760" cy="1086554"/>
+            <a:off x="9006840" y="4713556"/>
+            <a:ext cx="365760" cy="1423591"/>
           </a:xfrm>
           <a:prstGeom prst="line">
             <a:avLst/>
@@ -5719,8 +5717,8 @@
         </p:nvCxnSpPr>
         <p:spPr>
           <a:xfrm>
-            <a:off x="9006840" y="5786217"/>
-            <a:ext cx="365760" cy="1301907"/>
+            <a:off x="9006840" y="5573443"/>
+            <a:ext cx="365760" cy="1060528"/>
           </a:xfrm>
           <a:prstGeom prst="line">
             <a:avLst/>
@@ -5756,8 +5754,8 @@
         </p:nvCxnSpPr>
         <p:spPr>
           <a:xfrm>
-            <a:off x="9006840" y="6079880"/>
-            <a:ext cx="365760" cy="1517260"/>
+            <a:off x="9006840" y="5860073"/>
+            <a:ext cx="365760" cy="1270722"/>
           </a:xfrm>
           <a:prstGeom prst="line">
             <a:avLst/>
@@ -5792,9 +5790,9 @@
           <p:nvPr/>
         </p:nvCxnSpPr>
         <p:spPr>
-          <a:xfrm flipV="1">
-            <a:off x="9006840" y="8106156"/>
-            <a:ext cx="365760" cy="323029"/>
+          <a:xfrm>
+            <a:off x="9006840" y="6146702"/>
+            <a:ext cx="365760" cy="1480918"/>
           </a:xfrm>
           <a:prstGeom prst="line">
             <a:avLst/>
@@ -5830,8 +5828,8 @@
         </p:nvCxnSpPr>
         <p:spPr>
           <a:xfrm flipV="1">
-            <a:off x="9006840" y="8615171"/>
-            <a:ext cx="365760" cy="107677"/>
+            <a:off x="9006840" y="8124443"/>
+            <a:ext cx="365760" cy="315293"/>
           </a:xfrm>
           <a:prstGeom prst="line">
             <a:avLst/>
@@ -5866,17 +5864,17 @@
           <p:nvPr/>
         </p:nvCxnSpPr>
         <p:spPr>
-          <a:xfrm>
-            <a:off x="12664440" y="2506980"/>
-            <a:ext cx="457200" cy="4099560"/>
+          <a:xfrm flipV="1">
+            <a:off x="9006840" y="8621268"/>
+            <a:ext cx="365760" cy="105097"/>
           </a:xfrm>
           <a:prstGeom prst="line">
             <a:avLst/>
           </a:prstGeom>
-          <a:ln w="19050">
-            <a:solidFill>
-              <a:srgbClr val="CC785C">
-                <a:alpha val="90000"/>
+          <a:ln w="9525">
+            <a:solidFill>
+              <a:srgbClr val="8A9A6B">
+                <a:alpha val="52000"/>
               </a:srgbClr>
             </a:solidFill>
           </a:ln>
@@ -5904,8 +5902,8 @@
         </p:nvCxnSpPr>
         <p:spPr>
           <a:xfrm>
-            <a:off x="12664440" y="6070092"/>
-            <a:ext cx="457200" cy="536448"/>
+            <a:off x="12664440" y="2659380"/>
+            <a:ext cx="457200" cy="3947160"/>
           </a:xfrm>
           <a:prstGeom prst="line">
             <a:avLst/>
@@ -5941,8 +5939,8 @@
         </p:nvCxnSpPr>
         <p:spPr>
           <a:xfrm>
-            <a:off x="12664440" y="1488948"/>
-            <a:ext cx="457200" cy="2442972"/>
+            <a:off x="12664440" y="6137147"/>
+            <a:ext cx="457200" cy="469393"/>
           </a:xfrm>
           <a:prstGeom prst="line">
             <a:avLst/>
@@ -5978,8 +5976,8 @@
         </p:nvCxnSpPr>
         <p:spPr>
           <a:xfrm>
-            <a:off x="12664440" y="1997964"/>
-            <a:ext cx="457200" cy="1933956"/>
+            <a:off x="12664440" y="1665732"/>
+            <a:ext cx="457200" cy="2266188"/>
           </a:xfrm>
           <a:prstGeom prst="line">
             <a:avLst/>
@@ -6015,8 +6013,8 @@
         </p:nvCxnSpPr>
         <p:spPr>
           <a:xfrm>
-            <a:off x="12664440" y="2506980"/>
-            <a:ext cx="457200" cy="1424940"/>
+            <a:off x="12664440" y="2162556"/>
+            <a:ext cx="457200" cy="1769364"/>
           </a:xfrm>
           <a:prstGeom prst="line">
             <a:avLst/>
@@ -6052,8 +6050,8 @@
         </p:nvCxnSpPr>
         <p:spPr>
           <a:xfrm>
-            <a:off x="12664440" y="3015996"/>
-            <a:ext cx="457200" cy="915924"/>
+            <a:off x="12664440" y="2659380"/>
+            <a:ext cx="457200" cy="1272540"/>
           </a:xfrm>
           <a:prstGeom prst="line">
             <a:avLst/>
@@ -6088,9 +6086,9 @@
           <p:nvPr/>
         </p:nvCxnSpPr>
         <p:spPr>
-          <a:xfrm flipV="1">
-            <a:off x="12664440" y="3931920"/>
-            <a:ext cx="457200" cy="2647188"/>
+          <a:xfrm>
+            <a:off x="12664440" y="3156203"/>
+            <a:ext cx="457200" cy="775717"/>
           </a:xfrm>
           <a:prstGeom prst="line">
             <a:avLst/>
@@ -6127,7 +6125,7 @@
         <p:spPr>
           <a:xfrm flipV="1">
             <a:off x="12664440" y="3931920"/>
-            <a:ext cx="457200" cy="3156204"/>
+            <a:ext cx="457200" cy="2702051"/>
           </a:xfrm>
           <a:prstGeom prst="line">
             <a:avLst/>
@@ -6164,7 +6162,7 @@
         <p:spPr>
           <a:xfrm flipV="1">
             <a:off x="12664440" y="3931920"/>
-            <a:ext cx="457200" cy="1629156"/>
+            <a:ext cx="457200" cy="3198875"/>
           </a:xfrm>
           <a:prstGeom prst="line">
             <a:avLst/>
@@ -6200,19 +6198,18 @@
         </p:nvCxnSpPr>
         <p:spPr>
           <a:xfrm flipV="1">
-            <a:off x="9006840" y="6606540"/>
-            <a:ext cx="4114800" cy="647993"/>
+            <a:off x="12664440" y="3931920"/>
+            <a:ext cx="457200" cy="1708404"/>
           </a:xfrm>
           <a:prstGeom prst="line">
             <a:avLst/>
           </a:prstGeom>
-          <a:ln w="11430">
-            <a:solidFill>
-              <a:srgbClr val="9A8C7A">
-                <a:alpha val="55000"/>
+          <a:ln w="19050">
+            <a:solidFill>
+              <a:srgbClr val="CC785C">
+                <a:alpha val="90000"/>
               </a:srgbClr>
             </a:solidFill>
-            <a:prstDash val="dash"/>
           </a:ln>
         </p:spPr>
         <p:style>
@@ -6239,7 +6236,7 @@
         <p:spPr>
           <a:xfrm flipV="1">
             <a:off x="9006840" y="6606540"/>
-            <a:ext cx="4114800" cy="60666"/>
+            <a:ext cx="4114800" cy="686679"/>
           </a:xfrm>
           <a:prstGeom prst="line">
             <a:avLst/>
@@ -6277,7 +6274,7 @@
         <p:spPr>
           <a:xfrm flipV="1">
             <a:off x="9006840" y="6606540"/>
-            <a:ext cx="4114800" cy="1235319"/>
+            <a:ext cx="4114800" cy="113420"/>
           </a:xfrm>
           <a:prstGeom prst="line">
             <a:avLst/>
@@ -6315,7 +6312,7 @@
         <p:spPr>
           <a:xfrm flipV="1">
             <a:off x="9006840" y="6606540"/>
-            <a:ext cx="4114800" cy="1528982"/>
+            <a:ext cx="4114800" cy="1259937"/>
           </a:xfrm>
           <a:prstGeom prst="line">
             <a:avLst/>
@@ -6351,6 +6348,44 @@
           <p:nvPr/>
         </p:nvCxnSpPr>
         <p:spPr>
+          <a:xfrm flipV="1">
+            <a:off x="9006840" y="6606540"/>
+            <a:ext cx="4114800" cy="1546566"/>
+          </a:xfrm>
+          <a:prstGeom prst="line">
+            <a:avLst/>
+          </a:prstGeom>
+          <a:ln w="11430">
+            <a:solidFill>
+              <a:srgbClr val="9A8C7A">
+                <a:alpha val="55000"/>
+              </a:srgbClr>
+            </a:solidFill>
+            <a:prstDash val="dash"/>
+          </a:ln>
+        </p:spPr>
+        <p:style>
+          <a:lnRef idx="2">
+            <a:schemeClr val="accent1"/>
+          </a:lnRef>
+          <a:fillRef idx="0">
+            <a:schemeClr val="accent1"/>
+          </a:fillRef>
+          <a:effectRef idx="1">
+            <a:schemeClr val="accent1"/>
+          </a:effectRef>
+          <a:fontRef idx="minor">
+            <a:schemeClr val="tx1"/>
+          </a:fontRef>
+        </p:style>
+      </p:cxnSp>
+      <p:cxnSp>
+        <p:nvCxnSpPr>
+          <p:cNvPr id="91" name="Connector 90"/>
+          <p:cNvCxnSpPr/>
+          <p:nvPr/>
+        </p:nvCxnSpPr>
+        <p:spPr>
           <a:xfrm flipH="1">
             <a:off x="13121640" y="1604772"/>
             <a:ext cx="4069080" cy="2327148"/>
@@ -6383,14 +6418,14 @@
       </p:cxnSp>
       <p:sp>
         <p:nvSpPr>
-          <p:cNvPr id="91" name="Rounded Rectangle 90"/>
+          <p:cNvPr id="92" name="Rounded Rectangle 91"/>
           <p:cNvSpPr/>
           <p:nvPr/>
         </p:nvSpPr>
         <p:spPr>
           <a:xfrm>
-            <a:off x="274320" y="1872234"/>
-            <a:ext cx="1600200" cy="251460"/>
+            <a:off x="274320" y="2025395"/>
+            <a:ext cx="1600200" cy="274320"/>
           </a:xfrm>
           <a:prstGeom prst="roundRect">
             <a:avLst/>
@@ -6438,14 +6473,14 @@
       </p:sp>
       <p:sp>
         <p:nvSpPr>
-          <p:cNvPr id="92" name="Rounded Rectangle 91"/>
+          <p:cNvPr id="93" name="Rounded Rectangle 92"/>
           <p:cNvSpPr/>
           <p:nvPr/>
         </p:nvSpPr>
         <p:spPr>
           <a:xfrm>
-            <a:off x="274320" y="3399282"/>
-            <a:ext cx="1600200" cy="251460"/>
+            <a:off x="274320" y="3515867"/>
+            <a:ext cx="1600200" cy="274320"/>
           </a:xfrm>
           <a:prstGeom prst="roundRect">
             <a:avLst/>
@@ -6493,14 +6528,14 @@
       </p:sp>
       <p:sp>
         <p:nvSpPr>
-          <p:cNvPr id="93" name="Rounded Rectangle 92"/>
+          <p:cNvPr id="94" name="Rounded Rectangle 93"/>
           <p:cNvSpPr/>
           <p:nvPr/>
         </p:nvSpPr>
         <p:spPr>
           <a:xfrm>
-            <a:off x="274320" y="4926330"/>
-            <a:ext cx="1600200" cy="251460"/>
+            <a:off x="274320" y="5006339"/>
+            <a:ext cx="1600200" cy="274320"/>
           </a:xfrm>
           <a:prstGeom prst="roundRect">
             <a:avLst/>
@@ -6548,14 +6583,14 @@
       </p:sp>
       <p:sp>
         <p:nvSpPr>
-          <p:cNvPr id="94" name="Rounded Rectangle 93"/>
+          <p:cNvPr id="95" name="Rounded Rectangle 94"/>
           <p:cNvSpPr/>
           <p:nvPr/>
         </p:nvSpPr>
         <p:spPr>
           <a:xfrm>
-            <a:off x="274320" y="6453378"/>
-            <a:ext cx="1600200" cy="251460"/>
+            <a:off x="274320" y="6496811"/>
+            <a:ext cx="1600200" cy="274320"/>
           </a:xfrm>
           <a:prstGeom prst="roundRect">
             <a:avLst/>
@@ -6603,14 +6638,14 @@
       </p:sp>
       <p:sp>
         <p:nvSpPr>
-          <p:cNvPr id="95" name="Rounded Rectangle 94"/>
+          <p:cNvPr id="96" name="Rounded Rectangle 95"/>
           <p:cNvSpPr/>
           <p:nvPr/>
         </p:nvSpPr>
         <p:spPr>
           <a:xfrm>
-            <a:off x="274320" y="7980425"/>
-            <a:ext cx="1600200" cy="251460"/>
+            <a:off x="274320" y="7987283"/>
+            <a:ext cx="1600200" cy="274320"/>
           </a:xfrm>
           <a:prstGeom prst="roundRect">
             <a:avLst/>
@@ -6658,14 +6693,14 @@
       </p:sp>
       <p:sp>
         <p:nvSpPr>
-          <p:cNvPr id="96" name="Rounded Rectangle 95"/>
+          <p:cNvPr id="97" name="Rounded Rectangle 96"/>
           <p:cNvSpPr/>
           <p:nvPr/>
         </p:nvSpPr>
         <p:spPr>
           <a:xfrm>
-            <a:off x="2011680" y="1290501"/>
-            <a:ext cx="3520440" cy="251460"/>
+            <a:off x="2011680" y="1457597"/>
+            <a:ext cx="3520440" cy="274320"/>
           </a:xfrm>
           <a:prstGeom prst="roundRect">
             <a:avLst/>
@@ -6713,14 +6748,14 @@
       </p:sp>
       <p:sp>
         <p:nvSpPr>
-          <p:cNvPr id="97" name="Rounded Rectangle 96"/>
+          <p:cNvPr id="98" name="Rounded Rectangle 97"/>
           <p:cNvSpPr/>
           <p:nvPr/>
         </p:nvSpPr>
         <p:spPr>
           <a:xfrm>
-            <a:off x="2011680" y="1654084"/>
-            <a:ext cx="3520440" cy="251460"/>
+            <a:off x="2011680" y="1812471"/>
+            <a:ext cx="3520440" cy="274320"/>
           </a:xfrm>
           <a:prstGeom prst="roundRect">
             <a:avLst/>
@@ -6768,14 +6803,14 @@
       </p:sp>
       <p:sp>
         <p:nvSpPr>
-          <p:cNvPr id="98" name="Rounded Rectangle 97"/>
+          <p:cNvPr id="99" name="Rounded Rectangle 98"/>
           <p:cNvSpPr/>
           <p:nvPr/>
         </p:nvSpPr>
         <p:spPr>
           <a:xfrm>
-            <a:off x="2011680" y="2017667"/>
-            <a:ext cx="3520440" cy="251460"/>
+            <a:off x="2011680" y="2167345"/>
+            <a:ext cx="3520440" cy="274320"/>
           </a:xfrm>
           <a:prstGeom prst="roundRect">
             <a:avLst/>
@@ -6823,14 +6858,14 @@
       </p:sp>
       <p:sp>
         <p:nvSpPr>
-          <p:cNvPr id="99" name="Rounded Rectangle 98"/>
+          <p:cNvPr id="100" name="Rounded Rectangle 99"/>
           <p:cNvSpPr/>
           <p:nvPr/>
         </p:nvSpPr>
         <p:spPr>
           <a:xfrm>
-            <a:off x="2011680" y="2381250"/>
-            <a:ext cx="3520440" cy="251460"/>
+            <a:off x="2011680" y="2522220"/>
+            <a:ext cx="3520440" cy="274320"/>
           </a:xfrm>
           <a:prstGeom prst="roundRect">
             <a:avLst/>
@@ -6878,14 +6913,14 @@
       </p:sp>
       <p:sp>
         <p:nvSpPr>
-          <p:cNvPr id="100" name="Rounded Rectangle 99"/>
+          <p:cNvPr id="101" name="Rounded Rectangle 100"/>
           <p:cNvSpPr/>
           <p:nvPr/>
         </p:nvSpPr>
         <p:spPr>
           <a:xfrm>
-            <a:off x="2011680" y="2744832"/>
-            <a:ext cx="3520440" cy="251460"/>
+            <a:off x="2011680" y="2877094"/>
+            <a:ext cx="3520440" cy="274320"/>
           </a:xfrm>
           <a:prstGeom prst="roundRect">
             <a:avLst/>
@@ -6933,14 +6968,14 @@
       </p:sp>
       <p:sp>
         <p:nvSpPr>
-          <p:cNvPr id="101" name="Rounded Rectangle 100"/>
+          <p:cNvPr id="102" name="Rounded Rectangle 101"/>
           <p:cNvSpPr/>
           <p:nvPr/>
         </p:nvSpPr>
         <p:spPr>
           <a:xfrm>
-            <a:off x="2011680" y="3108415"/>
-            <a:ext cx="3520440" cy="251460"/>
+            <a:off x="2011680" y="3231968"/>
+            <a:ext cx="3520440" cy="274320"/>
           </a:xfrm>
           <a:prstGeom prst="roundRect">
             <a:avLst/>
@@ -6988,14 +7023,14 @@
       </p:sp>
       <p:sp>
         <p:nvSpPr>
-          <p:cNvPr id="102" name="Rounded Rectangle 101"/>
+          <p:cNvPr id="103" name="Rounded Rectangle 102"/>
           <p:cNvSpPr/>
           <p:nvPr/>
         </p:nvSpPr>
         <p:spPr>
           <a:xfrm>
-            <a:off x="2011680" y="3471998"/>
-            <a:ext cx="3520440" cy="251460"/>
+            <a:off x="2011680" y="3586842"/>
+            <a:ext cx="3520440" cy="274320"/>
           </a:xfrm>
           <a:prstGeom prst="roundRect">
             <a:avLst/>
@@ -7043,14 +7078,14 @@
       </p:sp>
       <p:sp>
         <p:nvSpPr>
-          <p:cNvPr id="103" name="Rounded Rectangle 102"/>
+          <p:cNvPr id="104" name="Rounded Rectangle 103"/>
           <p:cNvSpPr/>
           <p:nvPr/>
         </p:nvSpPr>
         <p:spPr>
           <a:xfrm>
-            <a:off x="2011680" y="3835581"/>
-            <a:ext cx="3520440" cy="251460"/>
+            <a:off x="2011680" y="3941717"/>
+            <a:ext cx="3520440" cy="274320"/>
           </a:xfrm>
           <a:prstGeom prst="roundRect">
             <a:avLst/>
@@ -7098,14 +7133,14 @@
       </p:sp>
       <p:sp>
         <p:nvSpPr>
-          <p:cNvPr id="104" name="Rounded Rectangle 103"/>
+          <p:cNvPr id="105" name="Rounded Rectangle 104"/>
           <p:cNvSpPr/>
           <p:nvPr/>
         </p:nvSpPr>
         <p:spPr>
           <a:xfrm>
-            <a:off x="2011680" y="4199164"/>
-            <a:ext cx="3520440" cy="251460"/>
+            <a:off x="2011680" y="4296591"/>
+            <a:ext cx="3520440" cy="274320"/>
           </a:xfrm>
           <a:prstGeom prst="roundRect">
             <a:avLst/>
@@ -7153,14 +7188,14 @@
       </p:sp>
       <p:sp>
         <p:nvSpPr>
-          <p:cNvPr id="105" name="Rounded Rectangle 104"/>
+          <p:cNvPr id="106" name="Rounded Rectangle 105"/>
           <p:cNvSpPr/>
           <p:nvPr/>
         </p:nvSpPr>
         <p:spPr>
           <a:xfrm>
-            <a:off x="2011680" y="4562747"/>
-            <a:ext cx="3520440" cy="251460"/>
+            <a:off x="2011680" y="4651465"/>
+            <a:ext cx="3520440" cy="274320"/>
           </a:xfrm>
           <a:prstGeom prst="roundRect">
             <a:avLst/>
@@ -7208,14 +7243,14 @@
       </p:sp>
       <p:sp>
         <p:nvSpPr>
-          <p:cNvPr id="106" name="Rounded Rectangle 105"/>
+          <p:cNvPr id="107" name="Rounded Rectangle 106"/>
           <p:cNvSpPr/>
           <p:nvPr/>
         </p:nvSpPr>
         <p:spPr>
           <a:xfrm>
-            <a:off x="2011680" y="4926330"/>
-            <a:ext cx="3520440" cy="251460"/>
+            <a:off x="2011680" y="5006339"/>
+            <a:ext cx="3520440" cy="274320"/>
           </a:xfrm>
           <a:prstGeom prst="roundRect">
             <a:avLst/>
@@ -7263,14 +7298,14 @@
       </p:sp>
       <p:sp>
         <p:nvSpPr>
-          <p:cNvPr id="107" name="Rounded Rectangle 106"/>
+          <p:cNvPr id="108" name="Rounded Rectangle 107"/>
           <p:cNvSpPr/>
           <p:nvPr/>
         </p:nvSpPr>
         <p:spPr>
           <a:xfrm>
-            <a:off x="2011680" y="5289912"/>
-            <a:ext cx="3520440" cy="251460"/>
+            <a:off x="2011680" y="5361214"/>
+            <a:ext cx="3520440" cy="274320"/>
           </a:xfrm>
           <a:prstGeom prst="roundRect">
             <a:avLst/>
@@ -7318,14 +7353,14 @@
       </p:sp>
       <p:sp>
         <p:nvSpPr>
-          <p:cNvPr id="108" name="Rounded Rectangle 107"/>
+          <p:cNvPr id="109" name="Rounded Rectangle 108"/>
           <p:cNvSpPr/>
           <p:nvPr/>
         </p:nvSpPr>
         <p:spPr>
           <a:xfrm>
-            <a:off x="2011680" y="5653495"/>
-            <a:ext cx="3520440" cy="251460"/>
+            <a:off x="2011680" y="5716088"/>
+            <a:ext cx="3520440" cy="274320"/>
           </a:xfrm>
           <a:prstGeom prst="roundRect">
             <a:avLst/>
@@ -7373,14 +7408,14 @@
       </p:sp>
       <p:sp>
         <p:nvSpPr>
-          <p:cNvPr id="109" name="Rounded Rectangle 108"/>
+          <p:cNvPr id="110" name="Rounded Rectangle 109"/>
           <p:cNvSpPr/>
           <p:nvPr/>
         </p:nvSpPr>
         <p:spPr>
           <a:xfrm>
-            <a:off x="2011680" y="6017078"/>
-            <a:ext cx="3520440" cy="251460"/>
+            <a:off x="2011680" y="6070962"/>
+            <a:ext cx="3520440" cy="274320"/>
           </a:xfrm>
           <a:prstGeom prst="roundRect">
             <a:avLst/>
@@ -7428,14 +7463,14 @@
       </p:sp>
       <p:sp>
         <p:nvSpPr>
-          <p:cNvPr id="110" name="Rounded Rectangle 109"/>
+          <p:cNvPr id="111" name="Rounded Rectangle 110"/>
           <p:cNvSpPr/>
           <p:nvPr/>
         </p:nvSpPr>
         <p:spPr>
           <a:xfrm>
-            <a:off x="2011680" y="6380661"/>
-            <a:ext cx="3520440" cy="251460"/>
+            <a:off x="2011680" y="6425837"/>
+            <a:ext cx="3520440" cy="274320"/>
           </a:xfrm>
           <a:prstGeom prst="roundRect">
             <a:avLst/>
@@ -7483,14 +7518,14 @@
       </p:sp>
       <p:sp>
         <p:nvSpPr>
-          <p:cNvPr id="111" name="Rounded Rectangle 110"/>
+          <p:cNvPr id="112" name="Rounded Rectangle 111"/>
           <p:cNvSpPr/>
           <p:nvPr/>
         </p:nvSpPr>
         <p:spPr>
           <a:xfrm>
-            <a:off x="2011680" y="6744244"/>
-            <a:ext cx="3520440" cy="251460"/>
+            <a:off x="2011680" y="6780711"/>
+            <a:ext cx="3520440" cy="274320"/>
           </a:xfrm>
           <a:prstGeom prst="roundRect">
             <a:avLst/>
@@ -7538,14 +7573,14 @@
       </p:sp>
       <p:sp>
         <p:nvSpPr>
-          <p:cNvPr id="112" name="Rounded Rectangle 111"/>
+          <p:cNvPr id="113" name="Rounded Rectangle 112"/>
           <p:cNvSpPr/>
           <p:nvPr/>
         </p:nvSpPr>
         <p:spPr>
           <a:xfrm>
-            <a:off x="2011680" y="7107827"/>
-            <a:ext cx="3520440" cy="251460"/>
+            <a:off x="2011680" y="7135585"/>
+            <a:ext cx="3520440" cy="274320"/>
           </a:xfrm>
           <a:prstGeom prst="roundRect">
             <a:avLst/>
@@ -7593,14 +7628,14 @@
       </p:sp>
       <p:sp>
         <p:nvSpPr>
-          <p:cNvPr id="113" name="Rounded Rectangle 112"/>
+          <p:cNvPr id="114" name="Rounded Rectangle 113"/>
           <p:cNvSpPr/>
           <p:nvPr/>
         </p:nvSpPr>
         <p:spPr>
           <a:xfrm>
-            <a:off x="2011680" y="7471410"/>
-            <a:ext cx="3520440" cy="251460"/>
+            <a:off x="2011680" y="7490459"/>
+            <a:ext cx="3520440" cy="274320"/>
           </a:xfrm>
           <a:prstGeom prst="roundRect">
             <a:avLst/>
@@ -7648,14 +7683,14 @@
       </p:sp>
       <p:sp>
         <p:nvSpPr>
-          <p:cNvPr id="114" name="Rounded Rectangle 113"/>
+          <p:cNvPr id="115" name="Rounded Rectangle 114"/>
           <p:cNvSpPr/>
           <p:nvPr/>
         </p:nvSpPr>
         <p:spPr>
           <a:xfrm>
-            <a:off x="2011680" y="7834992"/>
-            <a:ext cx="3520440" cy="251460"/>
+            <a:off x="2011680" y="7845334"/>
+            <a:ext cx="3520440" cy="274320"/>
           </a:xfrm>
           <a:prstGeom prst="roundRect">
             <a:avLst/>
@@ -7703,14 +7738,14 @@
       </p:sp>
       <p:sp>
         <p:nvSpPr>
-          <p:cNvPr id="115" name="Rounded Rectangle 114"/>
+          <p:cNvPr id="116" name="Rounded Rectangle 115"/>
           <p:cNvSpPr/>
           <p:nvPr/>
         </p:nvSpPr>
         <p:spPr>
           <a:xfrm>
-            <a:off x="2011680" y="8198575"/>
-            <a:ext cx="3520440" cy="251460"/>
+            <a:off x="2011680" y="8200208"/>
+            <a:ext cx="3520440" cy="274320"/>
           </a:xfrm>
           <a:prstGeom prst="roundRect">
             <a:avLst/>
@@ -7758,14 +7793,14 @@
       </p:sp>
       <p:sp>
         <p:nvSpPr>
-          <p:cNvPr id="116" name="Rounded Rectangle 115"/>
+          <p:cNvPr id="117" name="Rounded Rectangle 116"/>
           <p:cNvSpPr/>
           <p:nvPr/>
         </p:nvSpPr>
         <p:spPr>
           <a:xfrm>
-            <a:off x="2011680" y="8562158"/>
-            <a:ext cx="3520440" cy="251460"/>
+            <a:off x="2011680" y="8555082"/>
+            <a:ext cx="3520440" cy="274320"/>
           </a:xfrm>
           <a:prstGeom prst="roundRect">
             <a:avLst/>
@@ -7813,13 +7848,13 @@
       </p:sp>
       <p:sp>
         <p:nvSpPr>
-          <p:cNvPr id="117" name="Rounded Rectangle 116"/>
+          <p:cNvPr id="118" name="Rounded Rectangle 117"/>
           <p:cNvSpPr/>
           <p:nvPr/>
         </p:nvSpPr>
         <p:spPr>
           <a:xfrm>
-            <a:off x="5760720" y="1255541"/>
+            <a:off x="5760720" y="1434904"/>
             <a:ext cx="3246120" cy="251460"/>
           </a:xfrm>
           <a:prstGeom prst="roundRect">
@@ -7868,13 +7903,13 @@
       </p:sp>
       <p:sp>
         <p:nvSpPr>
-          <p:cNvPr id="118" name="Rounded Rectangle 117"/>
+          <p:cNvPr id="119" name="Rounded Rectangle 118"/>
           <p:cNvSpPr/>
           <p:nvPr/>
         </p:nvSpPr>
         <p:spPr>
           <a:xfrm>
-            <a:off x="5760720" y="1549204"/>
+            <a:off x="5760720" y="1721533"/>
             <a:ext cx="3246120" cy="251460"/>
           </a:xfrm>
           <a:prstGeom prst="roundRect">
@@ -7923,13 +7958,13 @@
       </p:sp>
       <p:sp>
         <p:nvSpPr>
-          <p:cNvPr id="119" name="Rounded Rectangle 118"/>
+          <p:cNvPr id="120" name="Rounded Rectangle 119"/>
           <p:cNvSpPr/>
           <p:nvPr/>
         </p:nvSpPr>
         <p:spPr>
           <a:xfrm>
-            <a:off x="5760720" y="1842867"/>
+            <a:off x="5760720" y="2008163"/>
             <a:ext cx="3246120" cy="251460"/>
           </a:xfrm>
           <a:prstGeom prst="roundRect">
@@ -7978,13 +8013,13 @@
       </p:sp>
       <p:sp>
         <p:nvSpPr>
-          <p:cNvPr id="120" name="Rounded Rectangle 119"/>
+          <p:cNvPr id="121" name="Rounded Rectangle 120"/>
           <p:cNvSpPr/>
           <p:nvPr/>
         </p:nvSpPr>
         <p:spPr>
           <a:xfrm>
-            <a:off x="5760720" y="2136530"/>
+            <a:off x="5760720" y="2294792"/>
             <a:ext cx="3246120" cy="251460"/>
           </a:xfrm>
           <a:prstGeom prst="roundRect">
@@ -8033,13 +8068,13 @@
       </p:sp>
       <p:sp>
         <p:nvSpPr>
-          <p:cNvPr id="121" name="Rounded Rectangle 120"/>
+          <p:cNvPr id="122" name="Rounded Rectangle 121"/>
           <p:cNvSpPr/>
           <p:nvPr/>
         </p:nvSpPr>
         <p:spPr>
           <a:xfrm>
-            <a:off x="5760720" y="2430193"/>
+            <a:off x="5760720" y="2581421"/>
             <a:ext cx="3246120" cy="251460"/>
           </a:xfrm>
           <a:prstGeom prst="roundRect">
@@ -8088,13 +8123,13 @@
       </p:sp>
       <p:sp>
         <p:nvSpPr>
-          <p:cNvPr id="122" name="Rounded Rectangle 121"/>
+          <p:cNvPr id="123" name="Rounded Rectangle 122"/>
           <p:cNvSpPr/>
           <p:nvPr/>
         </p:nvSpPr>
         <p:spPr>
           <a:xfrm>
-            <a:off x="5760720" y="2723856"/>
+            <a:off x="5760720" y="2868050"/>
             <a:ext cx="3246120" cy="251460"/>
           </a:xfrm>
           <a:prstGeom prst="roundRect">
@@ -8143,13 +8178,13 @@
       </p:sp>
       <p:sp>
         <p:nvSpPr>
-          <p:cNvPr id="123" name="Rounded Rectangle 122"/>
+          <p:cNvPr id="124" name="Rounded Rectangle 123"/>
           <p:cNvSpPr/>
           <p:nvPr/>
         </p:nvSpPr>
         <p:spPr>
           <a:xfrm>
-            <a:off x="5760720" y="3017520"/>
+            <a:off x="5760720" y="3154679"/>
             <a:ext cx="3246120" cy="251460"/>
           </a:xfrm>
           <a:prstGeom prst="roundRect">
@@ -8198,13 +8233,13 @@
       </p:sp>
       <p:sp>
         <p:nvSpPr>
-          <p:cNvPr id="124" name="Rounded Rectangle 123"/>
+          <p:cNvPr id="125" name="Rounded Rectangle 124"/>
           <p:cNvSpPr/>
           <p:nvPr/>
         </p:nvSpPr>
         <p:spPr>
           <a:xfrm>
-            <a:off x="5760720" y="3311183"/>
+            <a:off x="5760720" y="3441309"/>
             <a:ext cx="3246120" cy="251460"/>
           </a:xfrm>
           <a:prstGeom prst="roundRect">
@@ -8253,13 +8288,13 @@
       </p:sp>
       <p:sp>
         <p:nvSpPr>
-          <p:cNvPr id="125" name="Rounded Rectangle 124"/>
+          <p:cNvPr id="126" name="Rounded Rectangle 125"/>
           <p:cNvSpPr/>
           <p:nvPr/>
         </p:nvSpPr>
         <p:spPr>
           <a:xfrm>
-            <a:off x="5760720" y="3604846"/>
+            <a:off x="5760720" y="3727938"/>
             <a:ext cx="3246120" cy="251460"/>
           </a:xfrm>
           <a:prstGeom prst="roundRect">
@@ -8308,13 +8343,13 @@
       </p:sp>
       <p:sp>
         <p:nvSpPr>
-          <p:cNvPr id="126" name="Rounded Rectangle 125"/>
+          <p:cNvPr id="127" name="Rounded Rectangle 126"/>
           <p:cNvSpPr/>
           <p:nvPr/>
         </p:nvSpPr>
         <p:spPr>
           <a:xfrm>
-            <a:off x="5760720" y="3898509"/>
+            <a:off x="5760720" y="4014567"/>
             <a:ext cx="3246120" cy="251460"/>
           </a:xfrm>
           <a:prstGeom prst="roundRect">
@@ -8363,13 +8398,13 @@
       </p:sp>
       <p:sp>
         <p:nvSpPr>
-          <p:cNvPr id="127" name="Rounded Rectangle 126"/>
+          <p:cNvPr id="128" name="Rounded Rectangle 127"/>
           <p:cNvSpPr/>
           <p:nvPr/>
         </p:nvSpPr>
         <p:spPr>
           <a:xfrm>
-            <a:off x="5760720" y="4192172"/>
+            <a:off x="5760720" y="4301196"/>
             <a:ext cx="3246120" cy="251460"/>
           </a:xfrm>
           <a:prstGeom prst="roundRect">
@@ -8418,13 +8453,13 @@
       </p:sp>
       <p:sp>
         <p:nvSpPr>
-          <p:cNvPr id="128" name="Rounded Rectangle 127"/>
+          <p:cNvPr id="129" name="Rounded Rectangle 128"/>
           <p:cNvSpPr/>
           <p:nvPr/>
         </p:nvSpPr>
         <p:spPr>
           <a:xfrm>
-            <a:off x="5760720" y="4485835"/>
+            <a:off x="5760720" y="4587826"/>
             <a:ext cx="3246120" cy="251460"/>
           </a:xfrm>
           <a:prstGeom prst="roundRect">
@@ -8473,13 +8508,13 @@
       </p:sp>
       <p:sp>
         <p:nvSpPr>
-          <p:cNvPr id="129" name="Rounded Rectangle 128"/>
+          <p:cNvPr id="130" name="Rounded Rectangle 129"/>
           <p:cNvSpPr/>
           <p:nvPr/>
         </p:nvSpPr>
         <p:spPr>
           <a:xfrm>
-            <a:off x="5760720" y="4779498"/>
+            <a:off x="5760720" y="4874455"/>
             <a:ext cx="3246120" cy="251460"/>
           </a:xfrm>
           <a:prstGeom prst="roundRect">
@@ -8528,13 +8563,13 @@
       </p:sp>
       <p:sp>
         <p:nvSpPr>
-          <p:cNvPr id="130" name="Rounded Rectangle 129"/>
+          <p:cNvPr id="131" name="Rounded Rectangle 130"/>
           <p:cNvSpPr/>
           <p:nvPr/>
         </p:nvSpPr>
         <p:spPr>
           <a:xfrm>
-            <a:off x="5760720" y="5073161"/>
+            <a:off x="5760720" y="5161084"/>
             <a:ext cx="3246120" cy="251460"/>
           </a:xfrm>
           <a:prstGeom prst="roundRect">
@@ -8583,13 +8618,13 @@
       </p:sp>
       <p:sp>
         <p:nvSpPr>
-          <p:cNvPr id="131" name="Rounded Rectangle 130"/>
+          <p:cNvPr id="132" name="Rounded Rectangle 131"/>
           <p:cNvSpPr/>
           <p:nvPr/>
         </p:nvSpPr>
         <p:spPr>
           <a:xfrm>
-            <a:off x="5760720" y="5366824"/>
+            <a:off x="5760720" y="5447713"/>
             <a:ext cx="3246120" cy="251460"/>
           </a:xfrm>
           <a:prstGeom prst="roundRect">
@@ -8638,13 +8673,13 @@
       </p:sp>
       <p:sp>
         <p:nvSpPr>
-          <p:cNvPr id="132" name="Rounded Rectangle 131"/>
+          <p:cNvPr id="133" name="Rounded Rectangle 132"/>
           <p:cNvSpPr/>
           <p:nvPr/>
         </p:nvSpPr>
         <p:spPr>
           <a:xfrm>
-            <a:off x="5760720" y="5660487"/>
+            <a:off x="5760720" y="5734343"/>
             <a:ext cx="3246120" cy="251460"/>
           </a:xfrm>
           <a:prstGeom prst="roundRect">
@@ -8693,13 +8728,13 @@
       </p:sp>
       <p:sp>
         <p:nvSpPr>
-          <p:cNvPr id="133" name="Rounded Rectangle 132"/>
+          <p:cNvPr id="134" name="Rounded Rectangle 133"/>
           <p:cNvSpPr/>
           <p:nvPr/>
         </p:nvSpPr>
         <p:spPr>
           <a:xfrm>
-            <a:off x="5760720" y="5954150"/>
+            <a:off x="5760720" y="6020972"/>
             <a:ext cx="3246120" cy="251460"/>
           </a:xfrm>
           <a:prstGeom prst="roundRect">
@@ -8748,13 +8783,13 @@
       </p:sp>
       <p:sp>
         <p:nvSpPr>
-          <p:cNvPr id="134" name="Rounded Rectangle 133"/>
+          <p:cNvPr id="135" name="Rounded Rectangle 134"/>
           <p:cNvSpPr/>
           <p:nvPr/>
         </p:nvSpPr>
         <p:spPr>
           <a:xfrm>
-            <a:off x="5760720" y="6247813"/>
+            <a:off x="5760720" y="6307601"/>
             <a:ext cx="3246120" cy="251460"/>
           </a:xfrm>
           <a:prstGeom prst="roundRect">
@@ -8803,13 +8838,13 @@
       </p:sp>
       <p:sp>
         <p:nvSpPr>
-          <p:cNvPr id="135" name="Rounded Rectangle 134"/>
+          <p:cNvPr id="136" name="Rounded Rectangle 135"/>
           <p:cNvSpPr/>
           <p:nvPr/>
         </p:nvSpPr>
         <p:spPr>
           <a:xfrm>
-            <a:off x="5760720" y="6541476"/>
+            <a:off x="5760720" y="6594230"/>
             <a:ext cx="3246120" cy="251460"/>
           </a:xfrm>
           <a:prstGeom prst="roundRect">
@@ -8858,13 +8893,13 @@
       </p:sp>
       <p:sp>
         <p:nvSpPr>
-          <p:cNvPr id="136" name="Rounded Rectangle 135"/>
+          <p:cNvPr id="137" name="Rounded Rectangle 136"/>
           <p:cNvSpPr/>
           <p:nvPr/>
         </p:nvSpPr>
         <p:spPr>
           <a:xfrm>
-            <a:off x="5760720" y="6835139"/>
+            <a:off x="5760720" y="6880859"/>
             <a:ext cx="3246120" cy="251460"/>
           </a:xfrm>
           <a:prstGeom prst="roundRect">
@@ -8913,13 +8948,13 @@
       </p:sp>
       <p:sp>
         <p:nvSpPr>
-          <p:cNvPr id="137" name="Rounded Rectangle 136"/>
+          <p:cNvPr id="138" name="Rounded Rectangle 137"/>
           <p:cNvSpPr/>
           <p:nvPr/>
         </p:nvSpPr>
         <p:spPr>
           <a:xfrm>
-            <a:off x="5760720" y="7128803"/>
+            <a:off x="5760720" y="7167489"/>
             <a:ext cx="3246120" cy="251460"/>
           </a:xfrm>
           <a:prstGeom prst="roundRect">
@@ -8968,13 +9003,13 @@
       </p:sp>
       <p:sp>
         <p:nvSpPr>
-          <p:cNvPr id="138" name="Rounded Rectangle 137"/>
+          <p:cNvPr id="139" name="Rounded Rectangle 138"/>
           <p:cNvSpPr/>
           <p:nvPr/>
         </p:nvSpPr>
         <p:spPr>
           <a:xfrm>
-            <a:off x="5760720" y="7422466"/>
+            <a:off x="5760720" y="7454118"/>
             <a:ext cx="3246120" cy="251460"/>
           </a:xfrm>
           <a:prstGeom prst="roundRect">
@@ -9023,13 +9058,13 @@
       </p:sp>
       <p:sp>
         <p:nvSpPr>
-          <p:cNvPr id="139" name="Rounded Rectangle 138"/>
+          <p:cNvPr id="140" name="Rounded Rectangle 139"/>
           <p:cNvSpPr/>
           <p:nvPr/>
         </p:nvSpPr>
         <p:spPr>
           <a:xfrm>
-            <a:off x="5760720" y="7716129"/>
+            <a:off x="5760720" y="7740747"/>
             <a:ext cx="3246120" cy="251460"/>
           </a:xfrm>
           <a:prstGeom prst="roundRect">
@@ -9078,13 +9113,13 @@
       </p:sp>
       <p:sp>
         <p:nvSpPr>
-          <p:cNvPr id="140" name="Rounded Rectangle 139"/>
+          <p:cNvPr id="141" name="Rounded Rectangle 140"/>
           <p:cNvSpPr/>
           <p:nvPr/>
         </p:nvSpPr>
         <p:spPr>
           <a:xfrm>
-            <a:off x="5760720" y="8009792"/>
+            <a:off x="5760720" y="8027376"/>
             <a:ext cx="3246120" cy="251460"/>
           </a:xfrm>
           <a:prstGeom prst="roundRect">
@@ -9133,13 +9168,13 @@
       </p:sp>
       <p:sp>
         <p:nvSpPr>
-          <p:cNvPr id="141" name="Rounded Rectangle 140"/>
+          <p:cNvPr id="142" name="Rounded Rectangle 141"/>
           <p:cNvSpPr/>
           <p:nvPr/>
         </p:nvSpPr>
         <p:spPr>
           <a:xfrm>
-            <a:off x="5760720" y="8303455"/>
+            <a:off x="5760720" y="8314006"/>
             <a:ext cx="3246120" cy="251460"/>
           </a:xfrm>
           <a:prstGeom prst="roundRect">
@@ -9188,13 +9223,13 @@
       </p:sp>
       <p:sp>
         <p:nvSpPr>
-          <p:cNvPr id="142" name="Rounded Rectangle 141"/>
+          <p:cNvPr id="143" name="Rounded Rectangle 142"/>
           <p:cNvSpPr/>
           <p:nvPr/>
         </p:nvSpPr>
         <p:spPr>
           <a:xfrm>
-            <a:off x="5760720" y="8597118"/>
+            <a:off x="5760720" y="8600635"/>
             <a:ext cx="3246120" cy="251460"/>
           </a:xfrm>
           <a:prstGeom prst="roundRect">
@@ -9243,14 +9278,14 @@
       </p:sp>
       <p:sp>
         <p:nvSpPr>
-          <p:cNvPr id="143" name="Rounded Rectangle 142"/>
+          <p:cNvPr id="144" name="Rounded Rectangle 143"/>
           <p:cNvSpPr/>
           <p:nvPr/>
         </p:nvSpPr>
         <p:spPr>
           <a:xfrm>
-            <a:off x="9372600" y="1363218"/>
-            <a:ext cx="3291840" cy="251460"/>
+            <a:off x="9372600" y="1455420"/>
+            <a:ext cx="3291840" cy="420624"/>
           </a:xfrm>
           <a:prstGeom prst="roundRect">
             <a:avLst/>
@@ -9285,7 +9320,7 @@
           <a:p>
             <a:pPr algn="ctr"/>
             <a:r>
-              <a:rPr sz="850" b="1">
+              <a:rPr sz="900" b="1">
                 <a:solidFill>
                   <a:srgbClr val="2B2A28"/>
                 </a:solidFill>
@@ -9294,18 +9329,30 @@
               <a:t>financial_metrics</a:t>
             </a:r>
           </a:p>
-        </p:txBody>
-      </p:sp>
-      <p:sp>
-        <p:nvSpPr>
-          <p:cNvPr id="144" name="Rounded Rectangle 143"/>
+          <a:p>
+            <a:pPr algn="ctr"/>
+            <a:r>
+              <a:rPr sz="730" b="0">
+                <a:solidFill>
+                  <a:srgbClr val="2B2A28"/>
+                </a:solidFill>
+                <a:latin typeface="Malgun Gothic"/>
+              </a:rPr>
+              <a:t>재무·회계 risk 진단</a:t>
+            </a:r>
+          </a:p>
+        </p:txBody>
+      </p:sp>
+      <p:sp>
+        <p:nvSpPr>
+          <p:cNvPr id="145" name="Rounded Rectangle 144"/>
           <p:cNvSpPr/>
           <p:nvPr/>
         </p:nvSpPr>
         <p:spPr>
           <a:xfrm>
-            <a:off x="9372600" y="1872234"/>
-            <a:ext cx="3291840" cy="251460"/>
+            <a:off x="9372600" y="1952243"/>
+            <a:ext cx="3291840" cy="420624"/>
           </a:xfrm>
           <a:prstGeom prst="roundRect">
             <a:avLst/>
@@ -9340,7 +9387,7 @@
           <a:p>
             <a:pPr algn="ctr"/>
             <a:r>
-              <a:rPr sz="850" b="1">
+              <a:rPr sz="900" b="1">
                 <a:solidFill>
                   <a:srgbClr val="2B2A28"/>
                 </a:solidFill>
@@ -9349,18 +9396,30 @@
               <a:t>dividend</a:t>
             </a:r>
           </a:p>
-        </p:txBody>
-      </p:sp>
-      <p:sp>
-        <p:nvSpPr>
-          <p:cNvPr id="145" name="Rounded Rectangle 144"/>
+          <a:p>
+            <a:pPr algn="ctr"/>
+            <a:r>
+              <a:rPr sz="730" b="0">
+                <a:solidFill>
+                  <a:srgbClr val="2B2A28"/>
+                </a:solidFill>
+                <a:latin typeface="Malgun Gothic"/>
+              </a:rPr>
+              <a:t>배당 사실·추이</a:t>
+            </a:r>
+          </a:p>
+        </p:txBody>
+      </p:sp>
+      <p:sp>
+        <p:nvSpPr>
+          <p:cNvPr id="146" name="Rounded Rectangle 145"/>
           <p:cNvSpPr/>
           <p:nvPr/>
         </p:nvSpPr>
         <p:spPr>
           <a:xfrm>
-            <a:off x="9372600" y="2381250"/>
-            <a:ext cx="3291840" cy="251460"/>
+            <a:off x="9372600" y="2449068"/>
+            <a:ext cx="3291840" cy="420624"/>
           </a:xfrm>
           <a:prstGeom prst="roundRect">
             <a:avLst/>
@@ -9395,7 +9454,7 @@
           <a:p>
             <a:pPr algn="ctr"/>
             <a:r>
-              <a:rPr sz="850" b="1">
+              <a:rPr sz="900" b="1">
                 <a:solidFill>
                   <a:srgbClr val="2B2A28"/>
                 </a:solidFill>
@@ -9404,18 +9463,30 @@
               <a:t>ownership_structure</a:t>
             </a:r>
           </a:p>
-        </p:txBody>
-      </p:sp>
-      <p:sp>
-        <p:nvSpPr>
-          <p:cNvPr id="146" name="Rounded Rectangle 145"/>
+          <a:p>
+            <a:pPr algn="ctr"/>
+            <a:r>
+              <a:rPr sz="730" b="0">
+                <a:solidFill>
+                  <a:srgbClr val="2B2A28"/>
+                </a:solidFill>
+                <a:latin typeface="Malgun Gothic"/>
+              </a:rPr>
+              <a:t>지분구조·공동보유자</a:t>
+            </a:r>
+          </a:p>
+        </p:txBody>
+      </p:sp>
+      <p:sp>
+        <p:nvSpPr>
+          <p:cNvPr id="147" name="Rounded Rectangle 146"/>
           <p:cNvSpPr/>
           <p:nvPr/>
         </p:nvSpPr>
         <p:spPr>
           <a:xfrm>
-            <a:off x="9372600" y="2890266"/>
-            <a:ext cx="3291840" cy="251460"/>
+            <a:off x="9372600" y="2945891"/>
+            <a:ext cx="3291840" cy="420624"/>
           </a:xfrm>
           <a:prstGeom prst="roundRect">
             <a:avLst/>
@@ -9450,7 +9521,7 @@
           <a:p>
             <a:pPr algn="ctr"/>
             <a:r>
-              <a:rPr sz="850" b="1">
+              <a:rPr sz="900" b="1">
                 <a:solidFill>
                   <a:srgbClr val="2B2A28"/>
                 </a:solidFill>
@@ -9459,18 +9530,30 @@
               <a:t>treasury_share</a:t>
             </a:r>
           </a:p>
-        </p:txBody>
-      </p:sp>
-      <p:sp>
-        <p:nvSpPr>
-          <p:cNvPr id="147" name="Rounded Rectangle 146"/>
+          <a:p>
+            <a:pPr algn="ctr"/>
+            <a:r>
+              <a:rPr sz="730" b="0">
+                <a:solidFill>
+                  <a:srgbClr val="2B2A28"/>
+                </a:solidFill>
+                <a:latin typeface="Malgun Gothic"/>
+              </a:rPr>
+              <a:t>자사주 이벤트</a:t>
+            </a:r>
+          </a:p>
+        </p:txBody>
+      </p:sp>
+      <p:sp>
+        <p:nvSpPr>
+          <p:cNvPr id="148" name="Rounded Rectangle 147"/>
           <p:cNvSpPr/>
           <p:nvPr/>
         </p:nvSpPr>
         <p:spPr>
           <a:xfrm>
-            <a:off x="9372600" y="3399282"/>
-            <a:ext cx="3291840" cy="251460"/>
+            <a:off x="9372600" y="3442716"/>
+            <a:ext cx="3291840" cy="420624"/>
           </a:xfrm>
           <a:prstGeom prst="roundRect">
             <a:avLst/>
@@ -9505,7 +9588,7 @@
           <a:p>
             <a:pPr algn="ctr"/>
             <a:r>
-              <a:rPr sz="850" b="1">
+              <a:rPr sz="900" b="1">
                 <a:solidFill>
                   <a:srgbClr val="2B2A28"/>
                 </a:solidFill>
@@ -9514,18 +9597,30 @@
               <a:t>dilutive_issuance</a:t>
             </a:r>
           </a:p>
-        </p:txBody>
-      </p:sp>
-      <p:sp>
-        <p:nvSpPr>
-          <p:cNvPr id="148" name="Rounded Rectangle 147"/>
+          <a:p>
+            <a:pPr algn="ctr"/>
+            <a:r>
+              <a:rPr sz="730" b="0">
+                <a:solidFill>
+                  <a:srgbClr val="2B2A28"/>
+                </a:solidFill>
+                <a:latin typeface="Malgun Gothic"/>
+              </a:rPr>
+              <a:t>증자·CB 등 희석</a:t>
+            </a:r>
+          </a:p>
+        </p:txBody>
+      </p:sp>
+      <p:sp>
+        <p:nvSpPr>
+          <p:cNvPr id="149" name="Rounded Rectangle 148"/>
           <p:cNvSpPr/>
           <p:nvPr/>
         </p:nvSpPr>
         <p:spPr>
           <a:xfrm>
-            <a:off x="9372600" y="3908298"/>
-            <a:ext cx="3291840" cy="251460"/>
+            <a:off x="9372600" y="3939539"/>
+            <a:ext cx="3291840" cy="420624"/>
           </a:xfrm>
           <a:prstGeom prst="roundRect">
             <a:avLst/>
@@ -9560,7 +9655,7 @@
           <a:p>
             <a:pPr algn="ctr"/>
             <a:r>
-              <a:rPr sz="850" b="1">
+              <a:rPr sz="900" b="1">
                 <a:solidFill>
                   <a:srgbClr val="2B2A28"/>
                 </a:solidFill>
@@ -9569,18 +9664,30 @@
               <a:t>corporate_restructuring</a:t>
             </a:r>
           </a:p>
-        </p:txBody>
-      </p:sp>
-      <p:sp>
-        <p:nvSpPr>
-          <p:cNvPr id="149" name="Rounded Rectangle 148"/>
+          <a:p>
+            <a:pPr algn="ctr"/>
+            <a:r>
+              <a:rPr sz="730" b="0">
+                <a:solidFill>
+                  <a:srgbClr val="2B2A28"/>
+                </a:solidFill>
+                <a:latin typeface="Malgun Gothic"/>
+              </a:rPr>
+              <a:t>합병·분할·교환</a:t>
+            </a:r>
+          </a:p>
+        </p:txBody>
+      </p:sp>
+      <p:sp>
+        <p:nvSpPr>
+          <p:cNvPr id="150" name="Rounded Rectangle 149"/>
           <p:cNvSpPr/>
           <p:nvPr/>
         </p:nvSpPr>
         <p:spPr>
           <a:xfrm>
-            <a:off x="9372600" y="4417314"/>
-            <a:ext cx="3291840" cy="251460"/>
+            <a:off x="9372600" y="4436363"/>
+            <a:ext cx="3291840" cy="420624"/>
           </a:xfrm>
           <a:prstGeom prst="roundRect">
             <a:avLst/>
@@ -9615,7 +9722,7 @@
           <a:p>
             <a:pPr algn="ctr"/>
             <a:r>
-              <a:rPr sz="850" b="1">
+              <a:rPr sz="900" b="1">
                 <a:solidFill>
                   <a:srgbClr val="2B2A28"/>
                 </a:solidFill>
@@ -9624,18 +9731,30 @@
               <a:t>corporate_deals</a:t>
             </a:r>
           </a:p>
-        </p:txBody>
-      </p:sp>
-      <p:sp>
-        <p:nvSpPr>
-          <p:cNvPr id="150" name="Rounded Rectangle 149"/>
+          <a:p>
+            <a:pPr algn="ctr"/>
+            <a:r>
+              <a:rPr sz="730" b="0">
+                <a:solidFill>
+                  <a:srgbClr val="2B2A28"/>
+                </a:solidFill>
+                <a:latin typeface="Malgun Gothic"/>
+              </a:rPr>
+              <a:t>인수·매각</a:t>
+            </a:r>
+          </a:p>
+        </p:txBody>
+      </p:sp>
+      <p:sp>
+        <p:nvSpPr>
+          <p:cNvPr id="151" name="Rounded Rectangle 150"/>
           <p:cNvSpPr/>
           <p:nvPr/>
         </p:nvSpPr>
         <p:spPr>
           <a:xfrm>
-            <a:off x="9372600" y="4926330"/>
-            <a:ext cx="3291840" cy="251460"/>
+            <a:off x="9372600" y="4933187"/>
+            <a:ext cx="3291840" cy="420624"/>
           </a:xfrm>
           <a:prstGeom prst="roundRect">
             <a:avLst/>
@@ -9670,7 +9789,7 @@
           <a:p>
             <a:pPr algn="ctr"/>
             <a:r>
-              <a:rPr sz="850" b="1">
+              <a:rPr sz="900" b="1">
                 <a:solidFill>
                   <a:srgbClr val="2B2A28"/>
                 </a:solidFill>
@@ -9679,18 +9798,30 @@
               <a:t>risk_events</a:t>
             </a:r>
           </a:p>
-        </p:txBody>
-      </p:sp>
-      <p:sp>
-        <p:nvSpPr>
-          <p:cNvPr id="151" name="Rounded Rectangle 150"/>
+          <a:p>
+            <a:pPr algn="ctr"/>
+            <a:r>
+              <a:rPr sz="730" b="0">
+                <a:solidFill>
+                  <a:srgbClr val="2B2A28"/>
+                </a:solidFill>
+                <a:latin typeface="Malgun Gothic"/>
+              </a:rPr>
+              <a:t>악재 스캔</a:t>
+            </a:r>
+          </a:p>
+        </p:txBody>
+      </p:sp>
+      <p:sp>
+        <p:nvSpPr>
+          <p:cNvPr id="152" name="Rounded Rectangle 151"/>
           <p:cNvSpPr/>
           <p:nvPr/>
         </p:nvSpPr>
         <p:spPr>
           <a:xfrm>
-            <a:off x="9372600" y="5435346"/>
-            <a:ext cx="3291840" cy="251460"/>
+            <a:off x="9372600" y="5430011"/>
+            <a:ext cx="3291840" cy="420624"/>
           </a:xfrm>
           <a:prstGeom prst="roundRect">
             <a:avLst/>
@@ -9725,7 +9856,7 @@
           <a:p>
             <a:pPr algn="ctr"/>
             <a:r>
-              <a:rPr sz="850" b="1">
+              <a:rPr sz="900" b="1">
                 <a:solidFill>
                   <a:srgbClr val="2B2A28"/>
                 </a:solidFill>
@@ -9734,18 +9865,30 @@
               <a:t>shareholder_meeting_notice</a:t>
             </a:r>
           </a:p>
-        </p:txBody>
-      </p:sp>
-      <p:sp>
-        <p:nvSpPr>
-          <p:cNvPr id="152" name="Rounded Rectangle 151"/>
+          <a:p>
+            <a:pPr algn="ctr"/>
+            <a:r>
+              <a:rPr sz="730" b="0">
+                <a:solidFill>
+                  <a:srgbClr val="2B2A28"/>
+                </a:solidFill>
+                <a:latin typeface="Malgun Gothic"/>
+              </a:rPr>
+              <a:t>주총 안건 (사전)</a:t>
+            </a:r>
+          </a:p>
+        </p:txBody>
+      </p:sp>
+      <p:sp>
+        <p:nvSpPr>
+          <p:cNvPr id="153" name="Rounded Rectangle 152"/>
           <p:cNvSpPr/>
           <p:nvPr/>
         </p:nvSpPr>
         <p:spPr>
           <a:xfrm>
-            <a:off x="9372600" y="5944362"/>
-            <a:ext cx="3291840" cy="251460"/>
+            <a:off x="9372600" y="5926835"/>
+            <a:ext cx="3291840" cy="420624"/>
           </a:xfrm>
           <a:prstGeom prst="roundRect">
             <a:avLst/>
@@ -9780,7 +9923,7 @@
           <a:p>
             <a:pPr algn="ctr"/>
             <a:r>
-              <a:rPr sz="850" b="1">
+              <a:rPr sz="900" b="1">
                 <a:solidFill>
                   <a:srgbClr val="2B2A28"/>
                 </a:solidFill>
@@ -9789,18 +9932,30 @@
               <a:t>shareholder_meeting_results</a:t>
             </a:r>
           </a:p>
-        </p:txBody>
-      </p:sp>
-      <p:sp>
-        <p:nvSpPr>
-          <p:cNvPr id="153" name="Rounded Rectangle 152"/>
+          <a:p>
+            <a:pPr algn="ctr"/>
+            <a:r>
+              <a:rPr sz="730" b="0">
+                <a:solidFill>
+                  <a:srgbClr val="2B2A28"/>
+                </a:solidFill>
+                <a:latin typeface="Malgun Gothic"/>
+              </a:rPr>
+              <a:t>주총 결과 (사후)</a:t>
+            </a:r>
+          </a:p>
+        </p:txBody>
+      </p:sp>
+      <p:sp>
+        <p:nvSpPr>
+          <p:cNvPr id="154" name="Rounded Rectangle 153"/>
           <p:cNvSpPr/>
           <p:nvPr/>
         </p:nvSpPr>
         <p:spPr>
           <a:xfrm>
-            <a:off x="9372600" y="6453378"/>
-            <a:ext cx="3291840" cy="251460"/>
+            <a:off x="9372600" y="6423659"/>
+            <a:ext cx="3291840" cy="420624"/>
           </a:xfrm>
           <a:prstGeom prst="roundRect">
             <a:avLst/>
@@ -9835,7 +9990,7 @@
           <a:p>
             <a:pPr algn="ctr"/>
             <a:r>
-              <a:rPr sz="850" b="1">
+              <a:rPr sz="900" b="1">
                 <a:solidFill>
                   <a:srgbClr val="2B2A28"/>
                 </a:solidFill>
@@ -9844,18 +9999,30 @@
               <a:t>order_contracts</a:t>
             </a:r>
           </a:p>
-        </p:txBody>
-      </p:sp>
-      <p:sp>
-        <p:nvSpPr>
-          <p:cNvPr id="154" name="Rounded Rectangle 153"/>
+          <a:p>
+            <a:pPr algn="ctr"/>
+            <a:r>
+              <a:rPr sz="730" b="0">
+                <a:solidFill>
+                  <a:srgbClr val="2B2A28"/>
+                </a:solidFill>
+                <a:latin typeface="Malgun Gothic"/>
+              </a:rPr>
+              <a:t>수주 추적</a:t>
+            </a:r>
+          </a:p>
+        </p:txBody>
+      </p:sp>
+      <p:sp>
+        <p:nvSpPr>
+          <p:cNvPr id="155" name="Rounded Rectangle 154"/>
           <p:cNvSpPr/>
           <p:nvPr/>
         </p:nvSpPr>
         <p:spPr>
           <a:xfrm>
-            <a:off x="9372600" y="6962394"/>
-            <a:ext cx="3291840" cy="251460"/>
+            <a:off x="9372600" y="6920483"/>
+            <a:ext cx="3291840" cy="420624"/>
           </a:xfrm>
           <a:prstGeom prst="roundRect">
             <a:avLst/>
@@ -9890,7 +10057,7 @@
           <a:p>
             <a:pPr algn="ctr"/>
             <a:r>
-              <a:rPr sz="850" b="1">
+              <a:rPr sz="900" b="1">
                 <a:solidFill>
                   <a:srgbClr val="2B2A28"/>
                 </a:solidFill>
@@ -9899,18 +10066,30 @@
               <a:t>corp_gov_report</a:t>
             </a:r>
           </a:p>
-        </p:txBody>
-      </p:sp>
-      <p:sp>
-        <p:nvSpPr>
-          <p:cNvPr id="155" name="Rounded Rectangle 154"/>
+          <a:p>
+            <a:pPr algn="ctr"/>
+            <a:r>
+              <a:rPr sz="730" b="0">
+                <a:solidFill>
+                  <a:srgbClr val="2B2A28"/>
+                </a:solidFill>
+                <a:latin typeface="Malgun Gothic"/>
+              </a:rPr>
+              <a:t>지배구조 점검</a:t>
+            </a:r>
+          </a:p>
+        </p:txBody>
+      </p:sp>
+      <p:sp>
+        <p:nvSpPr>
+          <p:cNvPr id="156" name="Rounded Rectangle 155"/>
           <p:cNvSpPr/>
           <p:nvPr/>
         </p:nvSpPr>
         <p:spPr>
           <a:xfrm>
-            <a:off x="9372600" y="7471410"/>
-            <a:ext cx="3291840" cy="251460"/>
+            <a:off x="9372600" y="7417308"/>
+            <a:ext cx="3291840" cy="420624"/>
           </a:xfrm>
           <a:prstGeom prst="roundRect">
             <a:avLst/>
@@ -9945,7 +10124,7 @@
           <a:p>
             <a:pPr algn="ctr"/>
             <a:r>
-              <a:rPr sz="850" b="1">
+              <a:rPr sz="900" b="1">
                 <a:solidFill>
                   <a:srgbClr val="2B2A28"/>
                 </a:solidFill>
@@ -9954,18 +10133,30 @@
               <a:t>value_up</a:t>
             </a:r>
           </a:p>
-        </p:txBody>
-      </p:sp>
-      <p:sp>
-        <p:nvSpPr>
-          <p:cNvPr id="156" name="Rounded Rectangle 155"/>
+          <a:p>
+            <a:pPr algn="ctr"/>
+            <a:r>
+              <a:rPr sz="730" b="0">
+                <a:solidFill>
+                  <a:srgbClr val="2B2A28"/>
+                </a:solidFill>
+                <a:latin typeface="Malgun Gothic"/>
+              </a:rPr>
+              <a:t>밸류업 이행</a:t>
+            </a:r>
+          </a:p>
+        </p:txBody>
+      </p:sp>
+      <p:sp>
+        <p:nvSpPr>
+          <p:cNvPr id="157" name="Rounded Rectangle 156"/>
           <p:cNvSpPr/>
           <p:nvPr/>
         </p:nvSpPr>
         <p:spPr>
           <a:xfrm>
-            <a:off x="9372600" y="7980426"/>
-            <a:ext cx="3291840" cy="251460"/>
+            <a:off x="9372600" y="7914131"/>
+            <a:ext cx="3291840" cy="420624"/>
           </a:xfrm>
           <a:prstGeom prst="roundRect">
             <a:avLst/>
@@ -10000,7 +10191,7 @@
           <a:p>
             <a:pPr algn="ctr"/>
             <a:r>
-              <a:rPr sz="850" b="1">
+              <a:rPr sz="900" b="1">
                 <a:solidFill>
                   <a:srgbClr val="2B2A28"/>
                 </a:solidFill>
@@ -10009,18 +10200,30 @@
               <a:t>company</a:t>
             </a:r>
           </a:p>
-        </p:txBody>
-      </p:sp>
-      <p:sp>
-        <p:nvSpPr>
-          <p:cNvPr id="157" name="Rounded Rectangle 156"/>
+          <a:p>
+            <a:pPr algn="ctr"/>
+            <a:r>
+              <a:rPr sz="730" b="0">
+                <a:solidFill>
+                  <a:srgbClr val="2B2A28"/>
+                </a:solidFill>
+                <a:latin typeface="Malgun Gothic"/>
+              </a:rPr>
+              <a:t>회사 식별·진입</a:t>
+            </a:r>
+          </a:p>
+        </p:txBody>
+      </p:sp>
+      <p:sp>
+        <p:nvSpPr>
+          <p:cNvPr id="158" name="Rounded Rectangle 157"/>
           <p:cNvSpPr/>
           <p:nvPr/>
         </p:nvSpPr>
         <p:spPr>
           <a:xfrm>
-            <a:off x="9372600" y="8489442"/>
-            <a:ext cx="3291840" cy="251460"/>
+            <a:off x="9372600" y="8410956"/>
+            <a:ext cx="3291840" cy="420624"/>
           </a:xfrm>
           <a:prstGeom prst="roundRect">
             <a:avLst/>
@@ -10055,7 +10258,7 @@
           <a:p>
             <a:pPr algn="ctr"/>
             <a:r>
-              <a:rPr sz="850" b="1">
+              <a:rPr sz="900" b="1">
                 <a:solidFill>
                   <a:srgbClr val="2B2A28"/>
                 </a:solidFill>
@@ -10064,11 +10267,23 @@
               <a:t>evidence</a:t>
             </a:r>
           </a:p>
-        </p:txBody>
-      </p:sp>
-      <p:sp>
-        <p:nvSpPr>
-          <p:cNvPr id="158" name="Rounded Rectangle 157"/>
+          <a:p>
+            <a:pPr algn="ctr"/>
+            <a:r>
+              <a:rPr sz="730" b="0">
+                <a:solidFill>
+                  <a:srgbClr val="2B2A28"/>
+                </a:solidFill>
+                <a:latin typeface="Malgun Gothic"/>
+              </a:rPr>
+              <a:t>출처 링크</a:t>
+            </a:r>
+          </a:p>
+        </p:txBody>
+      </p:sp>
+      <p:sp>
+        <p:nvSpPr>
+          <p:cNvPr id="159" name="Rounded Rectangle 158"/>
           <p:cNvSpPr/>
           <p:nvPr/>
         </p:nvSpPr>
@@ -10135,7 +10350,7 @@
       </p:sp>
       <p:sp>
         <p:nvSpPr>
-          <p:cNvPr id="159" name="Rounded Rectangle 158"/>
+          <p:cNvPr id="160" name="Rounded Rectangle 159"/>
           <p:cNvSpPr/>
           <p:nvPr/>
         </p:nvSpPr>
@@ -10226,7 +10441,7 @@
       </p:sp>
       <p:sp>
         <p:nvSpPr>
-          <p:cNvPr id="160" name="Rounded Rectangle 159"/>
+          <p:cNvPr id="161" name="Rounded Rectangle 160"/>
           <p:cNvSpPr/>
           <p:nvPr/>
         </p:nvSpPr>
@@ -10299,6 +10514,145 @@
                 <a:latin typeface="Malgun Gothic"/>
               </a:rPr>
               <a:t>(+ 소송·위임장·공개매수·5% 공시 직접조회)</a:t>
+            </a:r>
+          </a:p>
+        </p:txBody>
+      </p:sp>
+      <p:sp>
+        <p:nvSpPr>
+          <p:cNvPr id="162" name="Rounded Rectangle 161"/>
+          <p:cNvSpPr/>
+          <p:nvPr/>
+        </p:nvSpPr>
+        <p:spPr>
+          <a:xfrm>
+            <a:off x="13121640" y="7360920"/>
+            <a:ext cx="4069080" cy="1481328"/>
+          </a:xfrm>
+          <a:prstGeom prst="roundRect">
+            <a:avLst/>
+          </a:prstGeom>
+          <a:solidFill>
+            <a:srgbClr val="F4F1EA"/>
+          </a:solidFill>
+          <a:ln w="12700">
+            <a:solidFill>
+              <a:srgbClr val="D8CFC0"/>
+            </a:solidFill>
+          </a:ln>
+          <a:effectLst/>
+        </p:spPr>
+        <p:style>
+          <a:lnRef idx="1">
+            <a:schemeClr val="accent1"/>
+          </a:lnRef>
+          <a:fillRef idx="3">
+            <a:schemeClr val="accent1"/>
+          </a:fillRef>
+          <a:effectRef idx="2">
+            <a:schemeClr val="accent1"/>
+          </a:effectRef>
+          <a:fontRef idx="minor">
+            <a:schemeClr val="lt1"/>
+          </a:fontRef>
+        </p:style>
+        <p:txBody>
+          <a:bodyPr rtlCol="0" anchor="t" wrap="square" lIns="70000" rIns="40000" tIns="45000" bIns="20000"/>
+          <a:lstStyle/>
+          <a:p>
+            <a:pPr algn="l"/>
+            <a:r>
+              <a:rPr sz="900" b="1">
+                <a:solidFill>
+                  <a:srgbClr val="2B2A28"/>
+                </a:solidFill>
+                <a:latin typeface="Malgun Gothic"/>
+              </a:rPr>
+              <a:t>［ 범례 / 읽는 법 ］</a:t>
+            </a:r>
+          </a:p>
+          <a:p>
+            <a:pPr algn="l"/>
+            <a:r>
+              <a:rPr sz="780" b="0">
+                <a:solidFill>
+                  <a:srgbClr val="2B2A28"/>
+                </a:solidFill>
+                <a:latin typeface="Malgun Gothic"/>
+              </a:rPr>
+              <a:t>• 일반 선 : 공시 → 데이터 → 도구 (추출 흐름)</a:t>
+            </a:r>
+          </a:p>
+          <a:p>
+            <a:pPr algn="l"/>
+            <a:r>
+              <a:rPr sz="780" b="0">
+                <a:solidFill>
+                  <a:srgbClr val="2B2A28"/>
+                </a:solidFill>
+                <a:latin typeface="Malgun Gothic"/>
+              </a:rPr>
+              <a:t>• 굵은 선 : 기반 도구를 불러 합침 (오케스트레이션)</a:t>
+            </a:r>
+          </a:p>
+          <a:p>
+            <a:pPr algn="l"/>
+            <a:r>
+              <a:rPr sz="780" b="0">
+                <a:solidFill>
+                  <a:srgbClr val="2B2A28"/>
+                </a:solidFill>
+                <a:latin typeface="Malgun Gothic"/>
+              </a:rPr>
+              <a:t>• 점선 : 종합 도구가 공시를 직접 조회</a:t>
+            </a:r>
+          </a:p>
+          <a:p>
+            <a:pPr algn="l"/>
+            <a:r>
+              <a:rPr sz="780" b="0">
+                <a:solidFill>
+                  <a:srgbClr val="2B2A28"/>
+                </a:solidFill>
+                <a:latin typeface="Malgun Gothic"/>
+              </a:rPr>
+              <a:t>• ★ TOOL OF TOOLS : 여러 도구를 모아 최종 판단</a:t>
+            </a:r>
+          </a:p>
+          <a:p>
+            <a:pPr algn="l"/>
+            <a:r>
+              <a:rPr sz="780" b="0">
+                <a:solidFill>
+                  <a:srgbClr val="2B2A28"/>
+                </a:solidFill>
+                <a:latin typeface="Malgun Gothic"/>
+              </a:rPr>
+              <a:t>• 색상 = 컬럼(공시유형·이름·데이터·도구·종합) 구분</a:t>
+            </a:r>
+          </a:p>
+          <a:p>
+            <a:pPr algn="l"/>
+            <a:r>
+              <a:rPr sz="780" b="0">
+                <a:solidFill>
+                  <a:srgbClr val="2B2A28"/>
+                </a:solidFill>
+                <a:latin typeface="Malgun Gothic"/>
+              </a:rPr>
+              <a:t>• 약어 : MCP=AI 도구호출 규약 · rcept_no=공시 접수번호</a:t>
+            </a:r>
+          </a:p>
+          <a:p>
+            <a:pPr algn="l"/>
+            <a:r>
+              <a:rPr sz="780" b="0">
+                <a:solidFill>
+                  <a:srgbClr val="2B2A28"/>
+                </a:solidFill>
+                <a:latin typeface="Malgun Gothic"/>
+              </a:rPr>
+              <a:t>          DPS=주당배당금 · BS/IS/CF=재무상태표/손익/현금흐름표</a:t>
             </a:r>
           </a:p>
         </p:txBody>
